--- a/Agentes Hallazgos/sistema-de-creencias-deck-flat.pptx
+++ b/Agentes Hallazgos/sistema-de-creencias-deck-flat.pptx
@@ -21,6 +21,10 @@
     <p:sldId id="269" r:id="rId20"/>
     <p:sldId id="270" r:id="rId21"/>
     <p:sldId id="271" r:id="rId22"/>
+    <p:sldId id="272" r:id="rId23"/>
+    <p:sldId id="273" r:id="rId24"/>
+    <p:sldId id="274" r:id="rId25"/>
+    <p:sldId id="275" r:id="rId26"/>
   </p:sldIdLst>
   <p:sldSz cx="18288000" cy="10287000" type="screen4x3"/>
   <p:notesSz cx="6858000" cy="9144000"/>
@@ -3119,38 +3123,38 @@
         </p:nvSpPr>
         <p:spPr>
           <a:xfrm>
-            <a:off x="952500" y="952500"/>
-            <a:ext cx="16383000" cy="2857500"/>
-          </a:xfrm>
-          <a:prstGeom prst="rect">
-            <a:avLst/>
-          </a:prstGeom>
-          <a:noFill/>
-        </p:spPr>
-        <p:txBody>
-          <a:bodyPr wrap="square" lIns="0" rIns="0" tIns="0" bIns="0">
-            <a:spAutoFit/>
-          </a:bodyPr>
-          <a:lstStyle/>
-          <a:p>
-            <a:pPr algn="ctr"/>
-            <a:r>
-              <a:rPr sz="3150" b="0" i="0" kern="0" spc="0">
+            <a:off x="952500" y="762000"/>
+            <a:ext cx="16383000" cy="3048000"/>
+          </a:xfrm>
+          <a:prstGeom prst="rect">
+            <a:avLst/>
+          </a:prstGeom>
+          <a:noFill/>
+        </p:spPr>
+        <p:txBody>
+          <a:bodyPr wrap="square" lIns="0" rIns="0" tIns="0" bIns="0">
+            <a:spAutoFit/>
+          </a:bodyPr>
+          <a:lstStyle/>
+          <a:p>
+            <a:pPr algn="ctr"/>
+            <a:r>
+              <a:rPr sz="5000" b="0" i="0" kern="0" spc="0">
                 <a:solidFill>
                   <a:srgbClr val="FFFFFF"/>
                 </a:solidFill>
                 <a:latin typeface="Instrument Serif"/>
               </a:rPr>
-              <a:t>EL PAÍS APRUEBA LA PROPIEDAD COMPARTIDA, RECHAZA LA ADOPCIÓN 2 A 1. </a:t>
-            </a:r>
-            <a:r>
-              <a:rPr sz="3150" b="0" i="1" kern="0" spc="0">
+              <a:t>LA PAREJA DEL MISMO SEXO PUEDE COMPRARSE UNA CASA JUNTOS. ADOPTAR UN HIJO, </a:t>
+            </a:r>
+            <a:r>
+              <a:rPr sz="5000" b="0" i="1" kern="0" spc="0">
                 <a:solidFill>
                   <a:srgbClr val="FFFFFF"/>
                 </a:solidFill>
                 <a:latin typeface="Instrument Serif"/>
               </a:rPr>
-              <a:t>PARA LAS PAREJAS DEL MISMO SEXO, LO QUE EL DERECHO NO DA, TAMPOCO LO PUEDE QUITAR NADIE.</a:t>
+              <a:t>NO — EL 61.8% RECHAZA ESO Y EL 60.4% QUE LOS RECONOZCAN COMO PADRES.</a:t>
             </a:r>
           </a:p>
         </p:txBody>
@@ -3163,7 +3167,7 @@
         </p:nvSpPr>
         <p:spPr>
           <a:xfrm>
-            <a:off x="6848475" y="4572000"/>
+            <a:off x="6848475" y="4381500"/>
             <a:ext cx="19050" cy="2647950"/>
           </a:xfrm>
           <a:prstGeom prst="rect">
@@ -3206,7 +3210,7 @@
         </p:nvSpPr>
         <p:spPr>
           <a:xfrm>
-            <a:off x="11420475" y="4572000"/>
+            <a:off x="11420475" y="4381500"/>
             <a:ext cx="19050" cy="2647950"/>
           </a:xfrm>
           <a:prstGeom prst="rect">
@@ -3249,7 +3253,7 @@
         </p:nvSpPr>
         <p:spPr>
           <a:xfrm>
-            <a:off x="1905000" y="4762500"/>
+            <a:off x="1905000" y="4572000"/>
             <a:ext cx="5334000" cy="1905000"/>
           </a:xfrm>
           <a:prstGeom prst="rect">
@@ -3271,7 +3275,7 @@
                 </a:solidFill>
                 <a:latin typeface="Instrument Serif"/>
               </a:rPr>
-              <a:t>40%</a:t>
+              <a:t>62%</a:t>
             </a:r>
           </a:p>
         </p:txBody>
@@ -3284,7 +3288,7 @@
         </p:nvSpPr>
         <p:spPr>
           <a:xfrm>
-            <a:off x="1905000" y="6858000"/>
+            <a:off x="1905000" y="6667500"/>
             <a:ext cx="5334000" cy="1714500"/>
           </a:xfrm>
           <a:prstGeom prst="rect">
@@ -3300,31 +3304,31 @@
           <a:p>
             <a:pPr algn="ctr"/>
             <a:r>
-              <a:rPr sz="1650" b="0" i="0" kern="0" spc="0">
-                <a:solidFill>
-                  <a:srgbClr val="FFFFFF"/>
-                </a:solidFill>
-                <a:latin typeface="Poppins"/>
-              </a:rPr>
-              <a:t>está muy de acuerdo con que una pareja del mismo sexo compre </a:t>
-            </a:r>
-            <a:r>
-              <a:rPr sz="1650" b="1" i="0" kern="0" spc="0">
-                <a:solidFill>
-                  <a:srgbClr val="FFFFFF"/>
-                </a:solidFill>
-                <a:latin typeface="Poppins"/>
-              </a:rPr>
-              <a:t>propiedad</a:t>
-            </a:r>
-            <a:r>
-              <a:rPr sz="1650" b="0" i="0" kern="0" spc="0">
-                <a:solidFill>
-                  <a:srgbClr val="FFFFFF"/>
-                </a:solidFill>
-                <a:latin typeface="Poppins"/>
-              </a:rPr>
-              <a:t> juntos — ítem de mayor aprobación de Q55. En el extremo, 61.8% rechaza la adopción legal.</a:t>
+              <a:rPr sz="1600" b="0" i="0" kern="0" spc="0">
+                <a:solidFill>
+                  <a:srgbClr val="FFFFFF"/>
+                </a:solidFill>
+                <a:latin typeface="Poppins"/>
+              </a:rPr>
+              <a:t>está en desacuerdo con que una pareja del mismo sexo pueda </a:t>
+            </a:r>
+            <a:r>
+              <a:rPr sz="1600" b="1" i="0" kern="0" spc="0">
+                <a:solidFill>
+                  <a:srgbClr val="FFFFFF"/>
+                </a:solidFill>
+                <a:latin typeface="Poppins"/>
+              </a:rPr>
+              <a:t>adoptar legalmente</a:t>
+            </a:r>
+            <a:r>
+              <a:rPr sz="1600" b="0" i="0" kern="0" spc="0">
+                <a:solidFill>
+                  <a:srgbClr val="FFFFFF"/>
+                </a:solidFill>
+                <a:latin typeface="Poppins"/>
+              </a:rPr>
+              <a:t> un hijo — el ítem con mayor rechazo de la batería Q55. 60.4% rechaza además el reconocimiento legal como padres.</a:t>
             </a:r>
           </a:p>
         </p:txBody>
@@ -3337,7 +3341,7 @@
         </p:nvSpPr>
         <p:spPr>
           <a:xfrm>
-            <a:off x="6477000" y="4762500"/>
+            <a:off x="6477000" y="4572000"/>
             <a:ext cx="5334000" cy="1905000"/>
           </a:xfrm>
           <a:prstGeom prst="rect">
@@ -3359,6 +3363,94 @@
                 </a:solidFill>
                 <a:latin typeface="Instrument Serif"/>
               </a:rPr>
+              <a:t>52%</a:t>
+            </a:r>
+          </a:p>
+        </p:txBody>
+      </p:sp>
+      <p:sp>
+        <p:nvSpPr>
+          <p:cNvPr id="8" name="TextBox 7"/>
+          <p:cNvSpPr txBox="1"/>
+          <p:nvPr/>
+        </p:nvSpPr>
+        <p:spPr>
+          <a:xfrm>
+            <a:off x="6477000" y="6667500"/>
+            <a:ext cx="5334000" cy="1714500"/>
+          </a:xfrm>
+          <a:prstGeom prst="rect">
+            <a:avLst/>
+          </a:prstGeom>
+          <a:noFill/>
+        </p:spPr>
+        <p:txBody>
+          <a:bodyPr wrap="square" lIns="0" rIns="0" tIns="0" bIns="0">
+            <a:spAutoFit/>
+          </a:bodyPr>
+          <a:lstStyle/>
+          <a:p>
+            <a:pPr algn="ctr"/>
+            <a:r>
+              <a:rPr sz="1600" b="0" i="0" kern="0" spc="0">
+                <a:solidFill>
+                  <a:srgbClr val="FFFFFF"/>
+                </a:solidFill>
+                <a:latin typeface="Poppins"/>
+              </a:rPr>
+              <a:t>acepta que </a:t>
+            </a:r>
+            <a:r>
+              <a:rPr sz="1600" b="1" i="0" kern="0" spc="0">
+                <a:solidFill>
+                  <a:srgbClr val="FFFFFF"/>
+                </a:solidFill>
+                <a:latin typeface="Poppins"/>
+              </a:rPr>
+              <a:t>compren una propiedad juntos</a:t>
+            </a:r>
+            <a:r>
+              <a:rPr sz="1600" b="0" i="0" kern="0" spc="0">
+                <a:solidFill>
+                  <a:srgbClr val="FFFFFF"/>
+                </a:solidFill>
+                <a:latin typeface="Poppins"/>
+              </a:rPr>
+              <a:t> (39.8% muy de acuerdo + 12.2% algo de acuerdo). Los dos ítems más aceptados son los que no involucran a un tercero.</a:t>
+            </a:r>
+          </a:p>
+        </p:txBody>
+      </p:sp>
+      <p:sp>
+        <p:nvSpPr>
+          <p:cNvPr id="9" name="TextBox 8"/>
+          <p:cNvSpPr txBox="1"/>
+          <p:nvPr/>
+        </p:nvSpPr>
+        <p:spPr>
+          <a:xfrm>
+            <a:off x="11049000" y="4572000"/>
+            <a:ext cx="5334000" cy="1905000"/>
+          </a:xfrm>
+          <a:prstGeom prst="rect">
+            <a:avLst/>
+          </a:prstGeom>
+          <a:noFill/>
+        </p:spPr>
+        <p:txBody>
+          <a:bodyPr wrap="square" lIns="0" rIns="0" tIns="0" bIns="0">
+            <a:spAutoFit/>
+          </a:bodyPr>
+          <a:lstStyle/>
+          <a:p>
+            <a:pPr algn="ctr"/>
+            <a:r>
+              <a:rPr sz="13500" b="0" i="1" kern="0" spc="0">
+                <a:solidFill>
+                  <a:srgbClr val="FFFFFF"/>
+                </a:solidFill>
+                <a:latin typeface="Instrument Serif"/>
+              </a:rPr>
               <a:t>48%</a:t>
             </a:r>
           </a:p>
@@ -3366,13 +3458,13 @@
       </p:sp>
       <p:sp>
         <p:nvSpPr>
-          <p:cNvPr id="8" name="TextBox 7"/>
-          <p:cNvSpPr txBox="1"/>
-          <p:nvPr/>
-        </p:nvSpPr>
-        <p:spPr>
-          <a:xfrm>
-            <a:off x="6477000" y="6858000"/>
+          <p:cNvPr id="10" name="TextBox 9"/>
+          <p:cNvSpPr txBox="1"/>
+          <p:nvPr/>
+        </p:nvSpPr>
+        <p:spPr>
+          <a:xfrm>
+            <a:off x="11049000" y="6667500"/>
             <a:ext cx="5334000" cy="1714500"/>
           </a:xfrm>
           <a:prstGeom prst="rect">
@@ -3388,16 +3480,16 @@
           <a:p>
             <a:pPr algn="ctr"/>
             <a:r>
-              <a:rPr sz="1650" b="0" i="0" kern="0" spc="0">
-                <a:solidFill>
-                  <a:srgbClr val="FFFFFF"/>
-                </a:solidFill>
-                <a:latin typeface="Poppins"/>
-              </a:rPr>
-              <a:t>muy de acuerdo con acceso a </a:t>
-            </a:r>
-            <a:r>
-              <a:rPr sz="1650" b="1" i="0" kern="0" spc="0">
+              <a:rPr sz="1600" b="0" i="0" kern="0" spc="0">
+                <a:solidFill>
+                  <a:srgbClr val="FFFFFF"/>
+                </a:solidFill>
+                <a:latin typeface="Poppins"/>
+              </a:rPr>
+              <a:t>está muy de acuerdo con el acceso a </a:t>
+            </a:r>
+            <a:r>
+              <a:rPr sz="1600" b="1" i="0" kern="0" spc="0">
                 <a:solidFill>
                   <a:srgbClr val="FFFFFF"/>
                 </a:solidFill>
@@ -3406,136 +3498,13 @@
               <a:t>servicios de salud familiar</a:t>
             </a:r>
             <a:r>
-              <a:rPr sz="1650" b="0" i="0" kern="0" spc="0">
-                <a:solidFill>
-                  <a:srgbClr val="FFFFFF"/>
-                </a:solidFill>
-                <a:latin typeface="Poppins"/>
-              </a:rPr>
-              <a:t> como beneficiarios mutuos, frente a 26.2% en desacuerdo. Salud: más apoyo que lo bancario.</a:t>
-            </a:r>
-          </a:p>
-        </p:txBody>
-      </p:sp>
-      <p:sp>
-        <p:nvSpPr>
-          <p:cNvPr id="9" name="TextBox 8"/>
-          <p:cNvSpPr txBox="1"/>
-          <p:nvPr/>
-        </p:nvSpPr>
-        <p:spPr>
-          <a:xfrm>
-            <a:off x="11049000" y="4762500"/>
-            <a:ext cx="5334000" cy="1905000"/>
-          </a:xfrm>
-          <a:prstGeom prst="rect">
-            <a:avLst/>
-          </a:prstGeom>
-          <a:noFill/>
-        </p:spPr>
-        <p:txBody>
-          <a:bodyPr wrap="square" lIns="0" rIns="0" tIns="0" bIns="0">
-            <a:spAutoFit/>
-          </a:bodyPr>
-          <a:lstStyle/>
-          <a:p>
-            <a:pPr algn="ctr"/>
-            <a:r>
-              <a:rPr sz="13500" b="0" i="1" kern="0" spc="0">
-                <a:solidFill>
-                  <a:srgbClr val="FFFFFF"/>
-                </a:solidFill>
-                <a:latin typeface="Instrument Serif"/>
-              </a:rPr>
-              <a:t>30%</a:t>
-            </a:r>
-          </a:p>
-        </p:txBody>
-      </p:sp>
-      <p:sp>
-        <p:nvSpPr>
-          <p:cNvPr id="10" name="TextBox 9"/>
-          <p:cNvSpPr txBox="1"/>
-          <p:nvPr/>
-        </p:nvSpPr>
-        <p:spPr>
-          <a:xfrm>
-            <a:off x="11049000" y="6858000"/>
-            <a:ext cx="5334000" cy="1714500"/>
-          </a:xfrm>
-          <a:prstGeom prst="rect">
-            <a:avLst/>
-          </a:prstGeom>
-          <a:noFill/>
-        </p:spPr>
-        <p:txBody>
-          <a:bodyPr wrap="square" lIns="0" rIns="0" tIns="0" bIns="0">
-            <a:spAutoFit/>
-          </a:bodyPr>
-          <a:lstStyle/>
-          <a:p>
-            <a:pPr algn="ctr"/>
-            <a:r>
-              <a:rPr sz="1650" b="0" i="0" kern="0" spc="0">
-                <a:solidFill>
-                  <a:srgbClr val="FFFFFF"/>
-                </a:solidFill>
-                <a:latin typeface="Poppins"/>
-              </a:rPr>
-              <a:t>muy de acuerdo con </a:t>
-            </a:r>
-            <a:r>
-              <a:rPr sz="1650" b="1" i="0" kern="0" spc="0">
-                <a:solidFill>
-                  <a:srgbClr val="FFFFFF"/>
-                </a:solidFill>
-                <a:latin typeface="Poppins"/>
-              </a:rPr>
-              <a:t>préstamo bancario mancomunado</a:t>
-            </a:r>
-            <a:r>
-              <a:rPr sz="1650" b="0" i="0" kern="0" spc="0">
-                <a:solidFill>
-                  <a:srgbClr val="FFFFFF"/>
-                </a:solidFill>
-                <a:latin typeface="Poppins"/>
-              </a:rPr>
-              <a:t>, pero 37.8% sigue en desacuerdo. El derecho más técnico tampoco alcanza mayoría.</a:t>
-            </a:r>
-          </a:p>
-        </p:txBody>
-      </p:sp>
-      <p:sp>
-        <p:nvSpPr>
-          <p:cNvPr id="11" name="TextBox 10"/>
-          <p:cNvSpPr txBox="1"/>
-          <p:nvPr/>
-        </p:nvSpPr>
-        <p:spPr>
-          <a:xfrm>
-            <a:off x="0" y="9429750"/>
-            <a:ext cx="18288000" cy="476250"/>
-          </a:xfrm>
-          <a:prstGeom prst="rect">
-            <a:avLst/>
-          </a:prstGeom>
-          <a:noFill/>
-        </p:spPr>
-        <p:txBody>
-          <a:bodyPr wrap="square" lIns="0" rIns="0" tIns="0" bIns="0">
-            <a:spAutoFit/>
-          </a:bodyPr>
-          <a:lstStyle/>
-          <a:p>
-            <a:pPr algn="ctr"/>
-            <a:r>
-              <a:rPr sz="1200" b="0" i="1" kern="0" spc="0">
-                <a:solidFill>
-                  <a:srgbClr val="9B9B9B"/>
-                </a:solidFill>
-                <a:latin typeface="Poppins"/>
-              </a:rPr>
-              <a:t>Source: Código Casa — Estudio cuantitativo + cualitativo 2025 · Q55 · Base 500.</a:t>
+              <a:rPr sz="1600" b="0" i="0" kern="0" spc="0">
+                <a:solidFill>
+                  <a:srgbClr val="FFFFFF"/>
+                </a:solidFill>
+                <a:latin typeface="Poppins"/>
+              </a:rPr>
+              <a:t> como beneficiarios mutuos (+ 10.0% algo de acuerdo = 57.8% total). El préstamo mancomunado suma 45.2% de aprobación.</a:t>
             </a:r>
           </a:p>
         </p:txBody>
@@ -3574,82 +3543,65 @@
         </p:nvSpPr>
         <p:spPr>
           <a:xfrm>
-            <a:off x="952500" y="952500"/>
-            <a:ext cx="16383000" cy="2857500"/>
-          </a:xfrm>
-          <a:prstGeom prst="rect">
-            <a:avLst/>
-          </a:prstGeom>
-          <a:noFill/>
-        </p:spPr>
-        <p:txBody>
-          <a:bodyPr wrap="square" lIns="0" rIns="0" tIns="0" bIns="0">
-            <a:spAutoFit/>
-          </a:bodyPr>
-          <a:lstStyle/>
-          <a:p>
-            <a:pPr algn="ctr"/>
-            <a:r>
-              <a:rPr sz="3150" b="0" i="0" kern="0" spc="0">
+            <a:off x="0" y="762000"/>
+            <a:ext cx="18288000" cy="476250"/>
+          </a:xfrm>
+          <a:prstGeom prst="rect">
+            <a:avLst/>
+          </a:prstGeom>
+          <a:noFill/>
+        </p:spPr>
+        <p:txBody>
+          <a:bodyPr wrap="square" lIns="0" rIns="0" tIns="0" bIns="0">
+            <a:spAutoFit/>
+          </a:bodyPr>
+          <a:lstStyle/>
+          <a:p>
+            <a:pPr algn="ctr"/>
+            <a:r>
+              <a:rPr sz="1400" b="0" i="0" kern="0" spc="0">
+                <a:solidFill>
+                  <a:srgbClr val="9B9B9B"/>
+                </a:solidFill>
+                <a:latin typeface="Poppins"/>
+              </a:rPr>
+              <a:t>CONSUMER VOICE</a:t>
+            </a:r>
+          </a:p>
+        </p:txBody>
+      </p:sp>
+      <p:sp>
+        <p:nvSpPr>
+          <p:cNvPr id="3" name="TextBox 2"/>
+          <p:cNvSpPr txBox="1"/>
+          <p:nvPr/>
+        </p:nvSpPr>
+        <p:spPr>
+          <a:xfrm>
+            <a:off x="1343025" y="2667000"/>
+            <a:ext cx="15592425" cy="4286250"/>
+          </a:xfrm>
+          <a:prstGeom prst="rect">
+            <a:avLst/>
+          </a:prstGeom>
+          <a:noFill/>
+        </p:spPr>
+        <p:txBody>
+          <a:bodyPr wrap="square" lIns="0" rIns="0" tIns="0" bIns="0">
+            <a:spAutoFit/>
+          </a:bodyPr>
+          <a:lstStyle/>
+          <a:p>
+            <a:pPr algn="ctr"/>
+            <a:r>
+              <a:rPr sz="6000" i="0" b="0" kern="0" spc="0">
                 <a:solidFill>
                   <a:srgbClr val="FFFFFF"/>
                 </a:solidFill>
                 <a:latin typeface="Instrument Serif"/>
               </a:rPr>
-              <a:t>HABLAR DE ORIENTACIÓN SEXUAL EN FAMILIA PARTE AL PAÍS EN DOS. EL HOMBRE SE INCLINA AL SILENCIO; </a:t>
-            </a:r>
-            <a:r>
-              <a:rPr sz="3150" b="0" i="1" kern="0" spc="0">
-                <a:solidFill>
-                  <a:srgbClr val="FFFFFF"/>
-                </a:solidFill>
-                <a:latin typeface="Instrument Serif"/>
-              </a:rPr>
-              <a:t>LA MUJER, A LA CONVERSACIÓN — POR CASI 20 PUNTOS DE DIFERENCIA.</a:t>
-            </a:r>
-          </a:p>
-        </p:txBody>
-      </p:sp>
-      <p:sp>
-        <p:nvSpPr>
-          <p:cNvPr id="3" name="Rectangle 2"/>
-          <p:cNvSpPr/>
-          <p:nvPr/>
-        </p:nvSpPr>
-        <p:spPr>
-          <a:xfrm>
-            <a:off x="9134475" y="4572000"/>
-            <a:ext cx="19050" cy="2647950"/>
-          </a:xfrm>
-          <a:prstGeom prst="rect">
-            <a:avLst/>
-          </a:prstGeom>
-          <a:solidFill>
-            <a:srgbClr val="2E2E2E"/>
-          </a:solidFill>
-          <a:ln>
-            <a:noFill/>
-          </a:ln>
-        </p:spPr>
-        <p:style>
-          <a:lnRef idx="1">
-            <a:schemeClr val="accent1"/>
-          </a:lnRef>
-          <a:fillRef idx="3">
-            <a:schemeClr val="accent1"/>
-          </a:fillRef>
-          <a:effectRef idx="2">
-            <a:schemeClr val="accent1"/>
-          </a:effectRef>
-          <a:fontRef idx="minor">
-            <a:schemeClr val="lt1"/>
-          </a:fontRef>
-        </p:style>
-        <p:txBody>
-          <a:bodyPr rtlCol="0" anchor="ctr"/>
-          <a:lstStyle/>
-          <a:p>
-            <a:pPr algn="ctr"/>
+              <a:t>«Si esos maestros supieran trabajar con ese tipo de niños, esos niños fueran más incluidos como otros amiguitos, no necesitarían una educación especial en un colegio especial que le cuesta más de la mitad del sueldo de un padre.»</a:t>
+            </a:r>
           </a:p>
         </p:txBody>
       </p:sp>
@@ -3661,205 +3613,29 @@
         </p:nvSpPr>
         <p:spPr>
           <a:xfrm>
-            <a:off x="1905000" y="4762500"/>
-            <a:ext cx="8382000" cy="1905000"/>
-          </a:xfrm>
-          <a:prstGeom prst="rect">
-            <a:avLst/>
-          </a:prstGeom>
-          <a:noFill/>
-        </p:spPr>
-        <p:txBody>
-          <a:bodyPr wrap="square" lIns="0" rIns="0" tIns="0" bIns="0">
-            <a:spAutoFit/>
-          </a:bodyPr>
-          <a:lstStyle/>
-          <a:p>
-            <a:pPr algn="ctr"/>
-            <a:r>
-              <a:rPr sz="13500" b="0" i="1" kern="0" spc="0">
-                <a:solidFill>
-                  <a:srgbClr val="FFFFFF"/>
-                </a:solidFill>
-                <a:latin typeface="Instrument Serif"/>
-              </a:rPr>
-              <a:t>37%</a:t>
-            </a:r>
-          </a:p>
-        </p:txBody>
-      </p:sp>
-      <p:sp>
-        <p:nvSpPr>
-          <p:cNvPr id="5" name="TextBox 4"/>
-          <p:cNvSpPr txBox="1"/>
-          <p:nvPr/>
-        </p:nvSpPr>
-        <p:spPr>
-          <a:xfrm>
-            <a:off x="1905000" y="6858000"/>
-            <a:ext cx="8382000" cy="1714500"/>
-          </a:xfrm>
-          <a:prstGeom prst="rect">
-            <a:avLst/>
-          </a:prstGeom>
-          <a:noFill/>
-        </p:spPr>
-        <p:txBody>
-          <a:bodyPr wrap="square" lIns="0" rIns="0" tIns="0" bIns="0">
-            <a:spAutoFit/>
-          </a:bodyPr>
-          <a:lstStyle/>
-          <a:p>
-            <a:pPr algn="ctr"/>
-            <a:r>
-              <a:rPr sz="1650" b="0" i="0" kern="0" spc="0">
-                <a:solidFill>
-                  <a:srgbClr val="FFFFFF"/>
-                </a:solidFill>
-                <a:latin typeface="Poppins"/>
-              </a:rPr>
-              <a:t>se siente </a:t>
-            </a:r>
-            <a:r>
-              <a:rPr sz="1650" b="1" i="0" kern="0" spc="0">
-                <a:solidFill>
-                  <a:srgbClr val="FFFFFF"/>
-                </a:solidFill>
-                <a:latin typeface="Poppins"/>
-              </a:rPr>
-              <a:t>muy cómodo</a:t>
-            </a:r>
-            <a:r>
-              <a:rPr sz="1650" b="0" i="0" kern="0" spc="0">
-                <a:solidFill>
-                  <a:srgbClr val="FFFFFF"/>
-                </a:solidFill>
-                <a:latin typeface="Poppins"/>
-              </a:rPr>
-              <a:t> hablando de orientación sexual o identidad de género en familia, y 34.8% nada cómodo. La distribución nacional es casi espejo. Q64, Base 500.</a:t>
-            </a:r>
-          </a:p>
-        </p:txBody>
-      </p:sp>
-      <p:sp>
-        <p:nvSpPr>
-          <p:cNvPr id="6" name="TextBox 5"/>
-          <p:cNvSpPr txBox="1"/>
-          <p:nvPr/>
-        </p:nvSpPr>
-        <p:spPr>
-          <a:xfrm>
-            <a:off x="8001000" y="4762500"/>
-            <a:ext cx="8382000" cy="1905000"/>
-          </a:xfrm>
-          <a:prstGeom prst="rect">
-            <a:avLst/>
-          </a:prstGeom>
-          <a:noFill/>
-        </p:spPr>
-        <p:txBody>
-          <a:bodyPr wrap="square" lIns="0" rIns="0" tIns="0" bIns="0">
-            <a:spAutoFit/>
-          </a:bodyPr>
-          <a:lstStyle/>
-          <a:p>
-            <a:pPr algn="ctr"/>
-            <a:r>
-              <a:rPr sz="13500" b="0" i="1" kern="0" spc="0">
-                <a:solidFill>
-                  <a:srgbClr val="FFFFFF"/>
-                </a:solidFill>
-                <a:latin typeface="Instrument Serif"/>
-              </a:rPr>
-              <a:t>40%</a:t>
-            </a:r>
-          </a:p>
-        </p:txBody>
-      </p:sp>
-      <p:sp>
-        <p:nvSpPr>
-          <p:cNvPr id="7" name="TextBox 6"/>
-          <p:cNvSpPr txBox="1"/>
-          <p:nvPr/>
-        </p:nvSpPr>
-        <p:spPr>
-          <a:xfrm>
-            <a:off x="8001000" y="6858000"/>
-            <a:ext cx="8382000" cy="1714500"/>
-          </a:xfrm>
-          <a:prstGeom prst="rect">
-            <a:avLst/>
-          </a:prstGeom>
-          <a:noFill/>
-        </p:spPr>
-        <p:txBody>
-          <a:bodyPr wrap="square" lIns="0" rIns="0" tIns="0" bIns="0">
-            <a:spAutoFit/>
-          </a:bodyPr>
-          <a:lstStyle/>
-          <a:p>
-            <a:pPr algn="ctr"/>
-            <a:r>
-              <a:rPr sz="1650" b="0" i="0" kern="0" spc="0">
-                <a:solidFill>
-                  <a:srgbClr val="FFFFFF"/>
-                </a:solidFill>
-                <a:latin typeface="Poppins"/>
-              </a:rPr>
-              <a:t>de las </a:t>
-            </a:r>
-            <a:r>
-              <a:rPr sz="1650" b="1" i="0" kern="0" spc="0">
-                <a:solidFill>
-                  <a:srgbClr val="FFFFFF"/>
-                </a:solidFill>
-                <a:latin typeface="Poppins"/>
-              </a:rPr>
-              <a:t>mujeres</a:t>
-            </a:r>
-            <a:r>
-              <a:rPr sz="1650" b="0" i="0" kern="0" spc="0">
-                <a:solidFill>
-                  <a:srgbClr val="FFFFFF"/>
-                </a:solidFill>
-                <a:latin typeface="Poppins"/>
-              </a:rPr>
-              <a:t> tiene "muy cómoda" como respuesta top; 39.5% de los hombres tiene "nada cómodo" como respuesta top. El género invierte el polo dominante.</a:t>
-            </a:r>
-          </a:p>
-        </p:txBody>
-      </p:sp>
-      <p:sp>
-        <p:nvSpPr>
-          <p:cNvPr id="8" name="TextBox 7"/>
-          <p:cNvSpPr txBox="1"/>
-          <p:nvPr/>
-        </p:nvSpPr>
-        <p:spPr>
-          <a:xfrm>
-            <a:off x="0" y="9429750"/>
-            <a:ext cx="18288000" cy="476250"/>
-          </a:xfrm>
-          <a:prstGeom prst="rect">
-            <a:avLst/>
-          </a:prstGeom>
-          <a:noFill/>
-        </p:spPr>
-        <p:txBody>
-          <a:bodyPr wrap="square" lIns="0" rIns="0" tIns="0" bIns="0">
-            <a:spAutoFit/>
-          </a:bodyPr>
-          <a:lstStyle/>
-          <a:p>
-            <a:pPr algn="ctr"/>
-            <a:r>
-              <a:rPr sz="1200" b="0" i="1" kern="0" spc="0">
-                <a:solidFill>
-                  <a:srgbClr val="9B9B9B"/>
-                </a:solidFill>
-                <a:latin typeface="Poppins"/>
-              </a:rPr>
-              <a:t>Source: Código Casa — Estudio cuantitativo + cualitativo 2025 · Q64, Q64 × D2 · Base 500.</a:t>
+            <a:off x="0" y="5524500"/>
+            <a:ext cx="18288000" cy="571500"/>
+          </a:xfrm>
+          <a:prstGeom prst="rect">
+            <a:avLst/>
+          </a:prstGeom>
+          <a:noFill/>
+        </p:spPr>
+        <p:txBody>
+          <a:bodyPr wrap="square" lIns="0" rIns="0" tIns="0" bIns="0">
+            <a:spAutoFit/>
+          </a:bodyPr>
+          <a:lstStyle/>
+          <a:p>
+            <a:pPr algn="ctr"/>
+            <a:r>
+              <a:rPr sz="2000" b="0" i="1" kern="0" spc="0">
+                <a:solidFill>
+                  <a:srgbClr val="FFFFFF"/>
+                </a:solidFill>
+                <a:latin typeface="Poppins"/>
+              </a:rPr>
+              <a:t>— Familia Sin Hijos</a:t>
             </a:r>
           </a:p>
         </p:txBody>
@@ -3898,53 +3674,58 @@
         </p:nvSpPr>
         <p:spPr>
           <a:xfrm>
-            <a:off x="0" y="762000"/>
-            <a:ext cx="18288000" cy="476250"/>
-          </a:xfrm>
-          <a:prstGeom prst="rect">
-            <a:avLst/>
-          </a:prstGeom>
-          <a:noFill/>
-        </p:spPr>
-        <p:txBody>
-          <a:bodyPr wrap="square" lIns="0" rIns="0" tIns="0" bIns="0">
-            <a:spAutoFit/>
-          </a:bodyPr>
-          <a:lstStyle/>
-          <a:p>
-            <a:pPr algn="ctr"/>
-            <a:r>
-              <a:rPr sz="1200" b="0" i="0" kern="0" spc="0">
-                <a:solidFill>
-                  <a:srgbClr val="9B9B9B"/>
-                </a:solidFill>
-                <a:latin typeface="Poppins"/>
-              </a:rPr>
-              <a:t>CONSUMER VOICE</a:t>
-            </a:r>
-          </a:p>
-        </p:txBody>
-      </p:sp>
-      <p:sp>
-        <p:nvSpPr>
-          <p:cNvPr id="3" name="Rounded Rectangle 2"/>
+            <a:off x="952500" y="762000"/>
+            <a:ext cx="16383000" cy="3048000"/>
+          </a:xfrm>
+          <a:prstGeom prst="rect">
+            <a:avLst/>
+          </a:prstGeom>
+          <a:noFill/>
+        </p:spPr>
+        <p:txBody>
+          <a:bodyPr wrap="square" lIns="0" rIns="0" tIns="0" bIns="0">
+            <a:spAutoFit/>
+          </a:bodyPr>
+          <a:lstStyle/>
+          <a:p>
+            <a:pPr algn="ctr"/>
+            <a:r>
+              <a:rPr sz="5000" b="0" i="0" kern="0" spc="0">
+                <a:solidFill>
+                  <a:srgbClr val="FFFFFF"/>
+                </a:solidFill>
+                <a:latin typeface="Instrument Serif"/>
+              </a:rPr>
+              <a:t>HABLAR DE ORIENTACIÓN SEXUAL EN FAMILIA PARTE AL DOMINICANO EN DOS: 36.8% MUY CÓMODO, 34.8% NADA CÓMODO. </a:t>
+            </a:r>
+            <a:r>
+              <a:rPr sz="5000" b="0" i="1" kern="0" spc="0">
+                <a:solidFill>
+                  <a:srgbClr val="FFFFFF"/>
+                </a:solidFill>
+                <a:latin typeface="Instrument Serif"/>
+              </a:rPr>
+              <a:t>EL HOMBRE SE CIERRA DONDE LA MUJER HABLA.</a:t>
+            </a:r>
+          </a:p>
+        </p:txBody>
+      </p:sp>
+      <p:sp>
+        <p:nvSpPr>
+          <p:cNvPr id="3" name="Rectangle 2"/>
           <p:cNvSpPr/>
           <p:nvPr/>
         </p:nvSpPr>
         <p:spPr>
           <a:xfrm>
-            <a:off x="1343025" y="2095500"/>
-            <a:ext cx="15592425" cy="4619625"/>
-          </a:xfrm>
-          <a:prstGeom prst="roundRect">
-            <a:avLst>
-              <a:gd name="adj" fmla="val 5000"/>
-            </a:avLst>
+            <a:off x="9134475" y="4381500"/>
+            <a:ext cx="19050" cy="2647950"/>
+          </a:xfrm>
+          <a:prstGeom prst="rect">
+            <a:avLst/>
           </a:prstGeom>
           <a:solidFill>
-            <a:srgbClr val="000000">
-              <a:alpha val="45000"/>
-            </a:srgbClr>
+            <a:srgbClr val="2E2E2E"/>
           </a:solidFill>
           <a:ln>
             <a:noFill/>
@@ -3980,45 +3761,170 @@
         </p:nvSpPr>
         <p:spPr>
           <a:xfrm>
-            <a:off x="2105025" y="2667000"/>
-            <a:ext cx="14068425" cy="3476625"/>
-          </a:xfrm>
-          <a:prstGeom prst="rect">
-            <a:avLst/>
-          </a:prstGeom>
-          <a:noFill/>
-        </p:spPr>
-        <p:txBody>
-          <a:bodyPr wrap="square" lIns="0" rIns="0" tIns="0" bIns="0">
-            <a:spAutoFit/>
-          </a:bodyPr>
-          <a:lstStyle/>
-          <a:p>
-            <a:pPr algn="ctr"/>
-            <a:r>
-              <a:rPr sz="3750" i="0" b="0" kern="0" spc="0">
+            <a:off x="1905000" y="4572000"/>
+            <a:ext cx="8382000" cy="1905000"/>
+          </a:xfrm>
+          <a:prstGeom prst="rect">
+            <a:avLst/>
+          </a:prstGeom>
+          <a:noFill/>
+        </p:spPr>
+        <p:txBody>
+          <a:bodyPr wrap="square" lIns="0" rIns="0" tIns="0" bIns="0">
+            <a:spAutoFit/>
+          </a:bodyPr>
+          <a:lstStyle/>
+          <a:p>
+            <a:pPr algn="ctr"/>
+            <a:r>
+              <a:rPr sz="13500" b="0" i="1" kern="0" spc="0">
                 <a:solidFill>
                   <a:srgbClr val="FFFFFF"/>
                 </a:solidFill>
                 <a:latin typeface="Instrument Serif"/>
               </a:rPr>
-              <a:t>«Si tú vives con una pareja gay, depende de la educación que tú le des. Viene de la educación... porque si tú te reprimes a no, no, yo no voy a poder porque yo soy lo que soy, es gay, entonces el muchacho después lo que me va a reclamar por eso.»</a:t>
-            </a:r>
-          </a:p>
-          <a:p>
-            <a:pPr algn="ctr">
-              <a:spcBef>
-                <a:spcPts val="1000"/>
-              </a:spcBef>
-            </a:pPr>
-            <a:r>
-              <a:rPr sz="1650" i="1" b="0" kern="0" spc="0">
-                <a:solidFill>
-                  <a:srgbClr val="FFFFFF"/>
-                </a:solidFill>
-                <a:latin typeface="Poppins"/>
-              </a:rPr>
-              <a:t>— Familia Homoparental</a:t>
+              <a:t>37%</a:t>
+            </a:r>
+          </a:p>
+        </p:txBody>
+      </p:sp>
+      <p:sp>
+        <p:nvSpPr>
+          <p:cNvPr id="5" name="TextBox 4"/>
+          <p:cNvSpPr txBox="1"/>
+          <p:nvPr/>
+        </p:nvSpPr>
+        <p:spPr>
+          <a:xfrm>
+            <a:off x="1905000" y="6667500"/>
+            <a:ext cx="8382000" cy="1714500"/>
+          </a:xfrm>
+          <a:prstGeom prst="rect">
+            <a:avLst/>
+          </a:prstGeom>
+          <a:noFill/>
+        </p:spPr>
+        <p:txBody>
+          <a:bodyPr wrap="square" lIns="0" rIns="0" tIns="0" bIns="0">
+            <a:spAutoFit/>
+          </a:bodyPr>
+          <a:lstStyle/>
+          <a:p>
+            <a:pPr algn="ctr"/>
+            <a:r>
+              <a:rPr sz="1600" b="0" i="0" kern="0" spc="0">
+                <a:solidFill>
+                  <a:srgbClr val="FFFFFF"/>
+                </a:solidFill>
+                <a:latin typeface="Poppins"/>
+              </a:rPr>
+              <a:t>se siente "</a:t>
+            </a:r>
+            <a:r>
+              <a:rPr sz="1600" b="1" i="0" kern="0" spc="0">
+                <a:solidFill>
+                  <a:srgbClr val="FFFFFF"/>
+                </a:solidFill>
+                <a:latin typeface="Poppins"/>
+              </a:rPr>
+              <a:t>muy cómodo/a</a:t>
+            </a:r>
+            <a:r>
+              <a:rPr sz="1600" b="0" i="0" kern="0" spc="0">
+                <a:solidFill>
+                  <a:srgbClr val="FFFFFF"/>
+                </a:solidFill>
+                <a:latin typeface="Poppins"/>
+              </a:rPr>
+              <a:t>" hablando de orientación sexual o identidad de género en familia, y 34.8% "nada cómodo/a". El centro de la escala es minoritario. Q64, Base 500.</a:t>
+            </a:r>
+          </a:p>
+        </p:txBody>
+      </p:sp>
+      <p:sp>
+        <p:nvSpPr>
+          <p:cNvPr id="6" name="TextBox 5"/>
+          <p:cNvSpPr txBox="1"/>
+          <p:nvPr/>
+        </p:nvSpPr>
+        <p:spPr>
+          <a:xfrm>
+            <a:off x="8001000" y="4572000"/>
+            <a:ext cx="8382000" cy="1905000"/>
+          </a:xfrm>
+          <a:prstGeom prst="rect">
+            <a:avLst/>
+          </a:prstGeom>
+          <a:noFill/>
+        </p:spPr>
+        <p:txBody>
+          <a:bodyPr wrap="square" lIns="0" rIns="0" tIns="0" bIns="0">
+            <a:spAutoFit/>
+          </a:bodyPr>
+          <a:lstStyle/>
+          <a:p>
+            <a:pPr algn="ctr"/>
+            <a:r>
+              <a:rPr sz="13500" b="0" i="1" kern="0" spc="0">
+                <a:solidFill>
+                  <a:srgbClr val="FFFFFF"/>
+                </a:solidFill>
+                <a:latin typeface="Instrument Serif"/>
+              </a:rPr>
+              <a:t>40%</a:t>
+            </a:r>
+          </a:p>
+        </p:txBody>
+      </p:sp>
+      <p:sp>
+        <p:nvSpPr>
+          <p:cNvPr id="7" name="TextBox 6"/>
+          <p:cNvSpPr txBox="1"/>
+          <p:nvPr/>
+        </p:nvSpPr>
+        <p:spPr>
+          <a:xfrm>
+            <a:off x="8001000" y="6667500"/>
+            <a:ext cx="8382000" cy="1714500"/>
+          </a:xfrm>
+          <a:prstGeom prst="rect">
+            <a:avLst/>
+          </a:prstGeom>
+          <a:noFill/>
+        </p:spPr>
+        <p:txBody>
+          <a:bodyPr wrap="square" lIns="0" rIns="0" tIns="0" bIns="0">
+            <a:spAutoFit/>
+          </a:bodyPr>
+          <a:lstStyle/>
+          <a:p>
+            <a:pPr algn="ctr"/>
+            <a:r>
+              <a:rPr sz="1600" b="0" i="0" kern="0" spc="0">
+                <a:solidFill>
+                  <a:srgbClr val="FFFFFF"/>
+                </a:solidFill>
+                <a:latin typeface="Poppins"/>
+              </a:rPr>
+              <a:t>de las </a:t>
+            </a:r>
+            <a:r>
+              <a:rPr sz="1600" b="1" i="0" kern="0" spc="0">
+                <a:solidFill>
+                  <a:srgbClr val="FFFFFF"/>
+                </a:solidFill>
+                <a:latin typeface="Poppins"/>
+              </a:rPr>
+              <a:t>mujeres</a:t>
+            </a:r>
+            <a:r>
+              <a:rPr sz="1600" b="0" i="0" kern="0" spc="0">
+                <a:solidFill>
+                  <a:srgbClr val="FFFFFF"/>
+                </a:solidFill>
+                <a:latin typeface="Poppins"/>
+              </a:rPr>
+              <a:t> tiene "muy cómoda" como respuesta top (40.3%, n=123); 39.5% de los hombres tiene "nada cómodo" como respuesta top (n=77). El género predice el polo.</a:t>
             </a:r>
           </a:p>
         </p:txBody>
@@ -4057,82 +3963,65 @@
         </p:nvSpPr>
         <p:spPr>
           <a:xfrm>
-            <a:off x="952500" y="952500"/>
-            <a:ext cx="16383000" cy="2857500"/>
-          </a:xfrm>
-          <a:prstGeom prst="rect">
-            <a:avLst/>
-          </a:prstGeom>
-          <a:noFill/>
-        </p:spPr>
-        <p:txBody>
-          <a:bodyPr wrap="square" lIns="0" rIns="0" tIns="0" bIns="0">
-            <a:spAutoFit/>
-          </a:bodyPr>
-          <a:lstStyle/>
-          <a:p>
-            <a:pPr algn="ctr"/>
-            <a:r>
-              <a:rPr sz="3150" b="0" i="0" kern="0" spc="0">
+            <a:off x="0" y="762000"/>
+            <a:ext cx="18288000" cy="476250"/>
+          </a:xfrm>
+          <a:prstGeom prst="rect">
+            <a:avLst/>
+          </a:prstGeom>
+          <a:noFill/>
+        </p:spPr>
+        <p:txBody>
+          <a:bodyPr wrap="square" lIns="0" rIns="0" tIns="0" bIns="0">
+            <a:spAutoFit/>
+          </a:bodyPr>
+          <a:lstStyle/>
+          <a:p>
+            <a:pPr algn="ctr"/>
+            <a:r>
+              <a:rPr sz="1400" b="0" i="0" kern="0" spc="0">
+                <a:solidFill>
+                  <a:srgbClr val="9B9B9B"/>
+                </a:solidFill>
+                <a:latin typeface="Poppins"/>
+              </a:rPr>
+              <a:t>CONSUMER VOICE</a:t>
+            </a:r>
+          </a:p>
+        </p:txBody>
+      </p:sp>
+      <p:sp>
+        <p:nvSpPr>
+          <p:cNvPr id="3" name="TextBox 2"/>
+          <p:cNvSpPr txBox="1"/>
+          <p:nvPr/>
+        </p:nvSpPr>
+        <p:spPr>
+          <a:xfrm>
+            <a:off x="1343025" y="2667000"/>
+            <a:ext cx="15592425" cy="4286250"/>
+          </a:xfrm>
+          <a:prstGeom prst="rect">
+            <a:avLst/>
+          </a:prstGeom>
+          <a:noFill/>
+        </p:spPr>
+        <p:txBody>
+          <a:bodyPr wrap="square" lIns="0" rIns="0" tIns="0" bIns="0">
+            <a:spAutoFit/>
+          </a:bodyPr>
+          <a:lstStyle/>
+          <a:p>
+            <a:pPr algn="ctr"/>
+            <a:r>
+              <a:rPr sz="6000" i="0" b="0" kern="0" spc="0">
                 <a:solidFill>
                   <a:srgbClr val="FFFFFF"/>
                 </a:solidFill>
                 <a:latin typeface="Instrument Serif"/>
               </a:rPr>
-              <a:t>LA VIOLENCIA QUE MÁS PESA EN EL HOGAR DOMINICANO NO ES LA DE LOS GOLPES: 20.2% REPORTA VIOLENCIA ECONÓMICA, CASI TRIPLICANDO A LA FÍSICA. </a:t>
-            </a:r>
-            <a:r>
-              <a:rPr sz="3150" b="0" i="1" kern="0" spc="0">
-                <a:solidFill>
-                  <a:srgbClr val="FFFFFF"/>
-                </a:solidFill>
-                <a:latin typeface="Instrument Serif"/>
-              </a:rPr>
-              <a:t>EL CONTROL DEL DINERO ES EL PRIMER ARMA.</a:t>
-            </a:r>
-          </a:p>
-        </p:txBody>
-      </p:sp>
-      <p:sp>
-        <p:nvSpPr>
-          <p:cNvPr id="3" name="Rectangle 2"/>
-          <p:cNvSpPr/>
-          <p:nvPr/>
-        </p:nvSpPr>
-        <p:spPr>
-          <a:xfrm>
-            <a:off x="9134475" y="4572000"/>
-            <a:ext cx="19050" cy="2647950"/>
-          </a:xfrm>
-          <a:prstGeom prst="rect">
-            <a:avLst/>
-          </a:prstGeom>
-          <a:solidFill>
-            <a:srgbClr val="2E2E2E"/>
-          </a:solidFill>
-          <a:ln>
-            <a:noFill/>
-          </a:ln>
-        </p:spPr>
-        <p:style>
-          <a:lnRef idx="1">
-            <a:schemeClr val="accent1"/>
-          </a:lnRef>
-          <a:fillRef idx="3">
-            <a:schemeClr val="accent1"/>
-          </a:fillRef>
-          <a:effectRef idx="2">
-            <a:schemeClr val="accent1"/>
-          </a:effectRef>
-          <a:fontRef idx="minor">
-            <a:schemeClr val="lt1"/>
-          </a:fontRef>
-        </p:style>
-        <p:txBody>
-          <a:bodyPr rtlCol="0" anchor="ctr"/>
-          <a:lstStyle/>
-          <a:p>
-            <a:pPr algn="ctr"/>
+              <a:t>«Mi hijo mayor cuando se declaró gay, esa parte yo no... eso me marcó, porque yo lo rechacé, lo aborrecido como si fuera un trapo viejo (...) Y después de un tiempo (...) yo decidí acercarme y ahora (...) yo lo quiero, hasta su pareja.»</a:t>
+            </a:r>
           </a:p>
         </p:txBody>
       </p:sp>
@@ -4144,205 +4033,29 @@
         </p:nvSpPr>
         <p:spPr>
           <a:xfrm>
-            <a:off x="1905000" y="4762500"/>
-            <a:ext cx="8382000" cy="1905000"/>
-          </a:xfrm>
-          <a:prstGeom prst="rect">
-            <a:avLst/>
-          </a:prstGeom>
-          <a:noFill/>
-        </p:spPr>
-        <p:txBody>
-          <a:bodyPr wrap="square" lIns="0" rIns="0" tIns="0" bIns="0">
-            <a:spAutoFit/>
-          </a:bodyPr>
-          <a:lstStyle/>
-          <a:p>
-            <a:pPr algn="ctr"/>
-            <a:r>
-              <a:rPr sz="13500" b="0" i="1" kern="0" spc="0">
-                <a:solidFill>
-                  <a:srgbClr val="FFFFFF"/>
-                </a:solidFill>
-                <a:latin typeface="Instrument Serif"/>
-              </a:rPr>
-              <a:t>20%</a:t>
-            </a:r>
-          </a:p>
-        </p:txBody>
-      </p:sp>
-      <p:sp>
-        <p:nvSpPr>
-          <p:cNvPr id="5" name="TextBox 4"/>
-          <p:cNvSpPr txBox="1"/>
-          <p:nvPr/>
-        </p:nvSpPr>
-        <p:spPr>
-          <a:xfrm>
-            <a:off x="1905000" y="6858000"/>
-            <a:ext cx="8382000" cy="1714500"/>
-          </a:xfrm>
-          <a:prstGeom prst="rect">
-            <a:avLst/>
-          </a:prstGeom>
-          <a:noFill/>
-        </p:spPr>
-        <p:txBody>
-          <a:bodyPr wrap="square" lIns="0" rIns="0" tIns="0" bIns="0">
-            <a:spAutoFit/>
-          </a:bodyPr>
-          <a:lstStyle/>
-          <a:p>
-            <a:pPr algn="ctr"/>
-            <a:r>
-              <a:rPr sz="1650" b="0" i="0" kern="0" spc="0">
-                <a:solidFill>
-                  <a:srgbClr val="FFFFFF"/>
-                </a:solidFill>
-                <a:latin typeface="Poppins"/>
-              </a:rPr>
-              <a:t>señala la </a:t>
-            </a:r>
-            <a:r>
-              <a:rPr sz="1650" b="1" i="0" kern="0" spc="0">
-                <a:solidFill>
-                  <a:srgbClr val="FFFFFF"/>
-                </a:solidFill>
-                <a:latin typeface="Poppins"/>
-              </a:rPr>
-              <a:t>violencia económica</a:t>
-            </a:r>
-            <a:r>
-              <a:rPr sz="1650" b="0" i="0" kern="0" spc="0">
-                <a:solidFill>
-                  <a:srgbClr val="FFFFFF"/>
-                </a:solidFill>
-                <a:latin typeface="Poppins"/>
-              </a:rPr>
-              <a:t> —restricción del acceso al dinero, control financiero— como el tipo de violencia experimentada con mayor frecuencia en los últimos 3 años. La física: 7.6%.</a:t>
-            </a:r>
-          </a:p>
-        </p:txBody>
-      </p:sp>
-      <p:sp>
-        <p:nvSpPr>
-          <p:cNvPr id="6" name="TextBox 5"/>
-          <p:cNvSpPr txBox="1"/>
-          <p:nvPr/>
-        </p:nvSpPr>
-        <p:spPr>
-          <a:xfrm>
-            <a:off x="8001000" y="4762500"/>
-            <a:ext cx="8382000" cy="1905000"/>
-          </a:xfrm>
-          <a:prstGeom prst="rect">
-            <a:avLst/>
-          </a:prstGeom>
-          <a:noFill/>
-        </p:spPr>
-        <p:txBody>
-          <a:bodyPr wrap="square" lIns="0" rIns="0" tIns="0" bIns="0">
-            <a:spAutoFit/>
-          </a:bodyPr>
-          <a:lstStyle/>
-          <a:p>
-            <a:pPr algn="ctr"/>
-            <a:r>
-              <a:rPr sz="13500" b="0" i="1" kern="0" spc="0">
-                <a:solidFill>
-                  <a:srgbClr val="FFFFFF"/>
-                </a:solidFill>
-                <a:latin typeface="Instrument Serif"/>
-              </a:rPr>
-              <a:t>17%</a:t>
-            </a:r>
-          </a:p>
-        </p:txBody>
-      </p:sp>
-      <p:sp>
-        <p:nvSpPr>
-          <p:cNvPr id="7" name="TextBox 6"/>
-          <p:cNvSpPr txBox="1"/>
-          <p:nvPr/>
-        </p:nvSpPr>
-        <p:spPr>
-          <a:xfrm>
-            <a:off x="8001000" y="6858000"/>
-            <a:ext cx="8382000" cy="1714500"/>
-          </a:xfrm>
-          <a:prstGeom prst="rect">
-            <a:avLst/>
-          </a:prstGeom>
-          <a:noFill/>
-        </p:spPr>
-        <p:txBody>
-          <a:bodyPr wrap="square" lIns="0" rIns="0" tIns="0" bIns="0">
-            <a:spAutoFit/>
-          </a:bodyPr>
-          <a:lstStyle/>
-          <a:p>
-            <a:pPr algn="ctr"/>
-            <a:r>
-              <a:rPr sz="1650" b="0" i="0" kern="0" spc="0">
-                <a:solidFill>
-                  <a:srgbClr val="FFFFFF"/>
-                </a:solidFill>
-                <a:latin typeface="Poppins"/>
-              </a:rPr>
-              <a:t>reporta </a:t>
-            </a:r>
-            <a:r>
-              <a:rPr sz="1650" b="1" i="0" kern="0" spc="0">
-                <a:solidFill>
-                  <a:srgbClr val="FFFFFF"/>
-                </a:solidFill>
-                <a:latin typeface="Poppins"/>
-              </a:rPr>
-              <a:t>violencia emocional o psicológica</a:t>
-            </a:r>
-            <a:r>
-              <a:rPr sz="1650" b="0" i="0" kern="0" spc="0">
-                <a:solidFill>
-                  <a:srgbClr val="FFFFFF"/>
-                </a:solidFill>
-                <a:latin typeface="Poppins"/>
-              </a:rPr>
-              <a:t>. Sumadas, la económica y la emocional (37.6%) más que cuadruplican a la física (7.6%). Q67, Base 500.</a:t>
-            </a:r>
-          </a:p>
-        </p:txBody>
-      </p:sp>
-      <p:sp>
-        <p:nvSpPr>
-          <p:cNvPr id="8" name="TextBox 7"/>
-          <p:cNvSpPr txBox="1"/>
-          <p:nvPr/>
-        </p:nvSpPr>
-        <p:spPr>
-          <a:xfrm>
-            <a:off x="0" y="9429750"/>
-            <a:ext cx="18288000" cy="476250"/>
-          </a:xfrm>
-          <a:prstGeom prst="rect">
-            <a:avLst/>
-          </a:prstGeom>
-          <a:noFill/>
-        </p:spPr>
-        <p:txBody>
-          <a:bodyPr wrap="square" lIns="0" rIns="0" tIns="0" bIns="0">
-            <a:spAutoFit/>
-          </a:bodyPr>
-          <a:lstStyle/>
-          <a:p>
-            <a:pPr algn="ctr"/>
-            <a:r>
-              <a:rPr sz="1200" b="0" i="1" kern="0" spc="0">
-                <a:solidFill>
-                  <a:srgbClr val="9B9B9B"/>
-                </a:solidFill>
-                <a:latin typeface="Poppins"/>
-              </a:rPr>
-              <a:t>Source: Código Casa — Estudio cuantitativo 2025 · Q67 · Base 500.</a:t>
+            <a:off x="0" y="5524500"/>
+            <a:ext cx="18288000" cy="571500"/>
+          </a:xfrm>
+          <a:prstGeom prst="rect">
+            <a:avLst/>
+          </a:prstGeom>
+          <a:noFill/>
+        </p:spPr>
+        <p:txBody>
+          <a:bodyPr wrap="square" lIns="0" rIns="0" tIns="0" bIns="0">
+            <a:spAutoFit/>
+          </a:bodyPr>
+          <a:lstStyle/>
+          <a:p>
+            <a:pPr algn="ctr"/>
+            <a:r>
+              <a:rPr sz="2000" b="0" i="1" kern="0" spc="0">
+                <a:solidFill>
+                  <a:srgbClr val="FFFFFF"/>
+                </a:solidFill>
+                <a:latin typeface="Poppins"/>
+              </a:rPr>
+              <a:t>— Familia Biparental con Hijos Adultos</a:t>
             </a:r>
           </a:p>
         </p:txBody>
@@ -4381,86 +4094,74 @@
         </p:nvSpPr>
         <p:spPr>
           <a:xfrm>
-            <a:off x="952500" y="952500"/>
-            <a:ext cx="16383000" cy="2857500"/>
-          </a:xfrm>
-          <a:prstGeom prst="rect">
-            <a:avLst/>
-          </a:prstGeom>
-          <a:noFill/>
-        </p:spPr>
-        <p:txBody>
-          <a:bodyPr wrap="square" lIns="0" rIns="0" tIns="0" bIns="0">
-            <a:spAutoFit/>
-          </a:bodyPr>
-          <a:lstStyle/>
-          <a:p>
-            <a:pPr algn="ctr"/>
-            <a:r>
-              <a:rPr sz="3150" b="0" i="0" kern="0" spc="0">
+            <a:off x="952500" y="762000"/>
+            <a:ext cx="16383000" cy="3048000"/>
+          </a:xfrm>
+          <a:prstGeom prst="rect">
+            <a:avLst/>
+          </a:prstGeom>
+          <a:noFill/>
+        </p:spPr>
+        <p:txBody>
+          <a:bodyPr wrap="square" lIns="0" rIns="0" tIns="0" bIns="0">
+            <a:spAutoFit/>
+          </a:bodyPr>
+          <a:lstStyle/>
+          <a:p>
+            <a:pPr algn="ctr"/>
+            <a:r>
+              <a:rPr sz="5000" b="0" i="0" kern="0" spc="0">
                 <a:solidFill>
                   <a:srgbClr val="FFFFFF"/>
                 </a:solidFill>
                 <a:latin typeface="Instrument Serif"/>
               </a:rPr>
-              <a:t>HAY HOGARES DONDE EL GOLPE SE APRENDE COMO RESPUESTA AL AMOR. </a:t>
-            </a:r>
-            <a:r>
-              <a:rPr sz="3150" b="0" i="1" kern="0" spc="0">
+              <a:t>11.6% DE LOS PADRES REPORTA QUE UN HIJO VIVIÓ BULLYING ESCOLAR O DIGITAL. </a:t>
+            </a:r>
+            <a:r>
+              <a:rPr sz="5000" b="0" i="1" kern="0" spc="0">
                 <a:solidFill>
                   <a:srgbClr val="FFFFFF"/>
                 </a:solidFill>
                 <a:latin typeface="Instrument Serif"/>
               </a:rPr>
-              <a:t>LA MADRE LO SABE: SI SU HIJA VE QUE EL ESPOSO LA GOLPEA, LA HIJA ENTIENDE QUE ASÍ SE QUIERE.</a:t>
-            </a:r>
-          </a:p>
-        </p:txBody>
-      </p:sp>
-      <p:sp>
-        <p:nvSpPr>
-          <p:cNvPr id="3" name="Rounded Rectangle 2"/>
-          <p:cNvSpPr/>
-          <p:nvPr/>
-        </p:nvSpPr>
-        <p:spPr>
-          <a:xfrm>
-            <a:off x="1343025" y="4095750"/>
-            <a:ext cx="15592425" cy="4619625"/>
-          </a:xfrm>
-          <a:prstGeom prst="roundRect">
-            <a:avLst>
-              <a:gd name="adj" fmla="val 5000"/>
-            </a:avLst>
-          </a:prstGeom>
-          <a:solidFill>
-            <a:srgbClr val="000000">
-              <a:alpha val="45000"/>
-            </a:srgbClr>
-          </a:solidFill>
-          <a:ln>
-            <a:noFill/>
-          </a:ln>
-        </p:spPr>
-        <p:style>
-          <a:lnRef idx="1">
-            <a:schemeClr val="accent1"/>
-          </a:lnRef>
-          <a:fillRef idx="3">
-            <a:schemeClr val="accent1"/>
-          </a:fillRef>
-          <a:effectRef idx="2">
-            <a:schemeClr val="accent1"/>
-          </a:effectRef>
-          <a:fontRef idx="minor">
-            <a:schemeClr val="lt1"/>
-          </a:fontRef>
-        </p:style>
-        <p:txBody>
-          <a:bodyPr rtlCol="0" anchor="ctr"/>
-          <a:lstStyle/>
-          <a:p>
-            <a:pPr algn="ctr"/>
+              <a:t>EL 75% DICE QUE NO. EL SILENCIO NO ES PRUEBA DE AUSENCIA.</a:t>
+            </a:r>
+          </a:p>
+        </p:txBody>
+      </p:sp>
+      <p:sp>
+        <p:nvSpPr>
+          <p:cNvPr id="3" name="TextBox 2"/>
+          <p:cNvSpPr txBox="1"/>
+          <p:nvPr/>
+        </p:nvSpPr>
+        <p:spPr>
+          <a:xfrm>
+            <a:off x="5229225" y="4572000"/>
+            <a:ext cx="7829550" cy="1905000"/>
+          </a:xfrm>
+          <a:prstGeom prst="rect">
+            <a:avLst/>
+          </a:prstGeom>
+          <a:noFill/>
+        </p:spPr>
+        <p:txBody>
+          <a:bodyPr wrap="square" lIns="0" rIns="0" tIns="0" bIns="0">
+            <a:spAutoFit/>
+          </a:bodyPr>
+          <a:lstStyle/>
+          <a:p>
+            <a:pPr algn="ctr"/>
+            <a:r>
+              <a:rPr sz="13500" b="0" i="1" kern="0" spc="0">
+                <a:solidFill>
+                  <a:srgbClr val="FFFFFF"/>
+                </a:solidFill>
+                <a:latin typeface="Instrument Serif"/>
+              </a:rPr>
+              <a:t>12%</a:t>
+            </a:r>
           </a:p>
         </p:txBody>
       </p:sp>
@@ -4472,80 +4173,47 @@
         </p:nvSpPr>
         <p:spPr>
           <a:xfrm>
-            <a:off x="2105025" y="4667250"/>
-            <a:ext cx="14068425" cy="3476625"/>
-          </a:xfrm>
-          <a:prstGeom prst="rect">
-            <a:avLst/>
-          </a:prstGeom>
-          <a:noFill/>
-        </p:spPr>
-        <p:txBody>
-          <a:bodyPr wrap="square" lIns="0" rIns="0" tIns="0" bIns="0">
-            <a:spAutoFit/>
-          </a:bodyPr>
-          <a:lstStyle/>
-          <a:p>
-            <a:pPr algn="ctr"/>
-            <a:r>
-              <a:rPr sz="3750" i="0" b="0" kern="0" spc="0">
-                <a:solidFill>
-                  <a:srgbClr val="FFFFFF"/>
-                </a:solidFill>
-                <a:latin typeface="Instrument Serif"/>
-              </a:rPr>
-              <a:t>«Si por ejemplo yo, si mi esposo me golpea, o sea aunque yo le diga a mi hija, mira tú no puedes dejar que nadie te golpea, ella entiende que si él, que es mi esposo, me quiere y me golpea, es una respuesta al amor. Entonces, es como que eso es parte de la educación.»</a:t>
-            </a:r>
-          </a:p>
-          <a:p>
-            <a:pPr algn="ctr">
-              <a:spcBef>
-                <a:spcPts val="1000"/>
-              </a:spcBef>
-            </a:pPr>
-            <a:r>
-              <a:rPr sz="1650" i="1" b="0" kern="0" spc="0">
-                <a:solidFill>
-                  <a:srgbClr val="FFFFFF"/>
-                </a:solidFill>
-                <a:latin typeface="Poppins"/>
-              </a:rPr>
-              <a:t>— Familia Extendida</a:t>
-            </a:r>
-          </a:p>
-        </p:txBody>
-      </p:sp>
-      <p:sp>
-        <p:nvSpPr>
-          <p:cNvPr id="5" name="TextBox 4"/>
-          <p:cNvSpPr txBox="1"/>
-          <p:nvPr/>
-        </p:nvSpPr>
-        <p:spPr>
-          <a:xfrm>
-            <a:off x="0" y="9429750"/>
-            <a:ext cx="18288000" cy="476250"/>
-          </a:xfrm>
-          <a:prstGeom prst="rect">
-            <a:avLst/>
-          </a:prstGeom>
-          <a:noFill/>
-        </p:spPr>
-        <p:txBody>
-          <a:bodyPr wrap="square" lIns="0" rIns="0" tIns="0" bIns="0">
-            <a:spAutoFit/>
-          </a:bodyPr>
-          <a:lstStyle/>
-          <a:p>
-            <a:pPr algn="ctr"/>
-            <a:r>
-              <a:rPr sz="1200" b="0" i="1" kern="0" spc="0">
-                <a:solidFill>
-                  <a:srgbClr val="9B9B9B"/>
-                </a:solidFill>
-                <a:latin typeface="Poppins"/>
-              </a:rPr>
-              <a:t>Source: Código Casa — Estudio cualitativo 2025 · Q67 · Base cualitativa: 11 grupos de enfoque.</a:t>
+            <a:off x="5229225" y="6667500"/>
+            <a:ext cx="7829550" cy="1714500"/>
+          </a:xfrm>
+          <a:prstGeom prst="rect">
+            <a:avLst/>
+          </a:prstGeom>
+          <a:noFill/>
+        </p:spPr>
+        <p:txBody>
+          <a:bodyPr wrap="square" lIns="0" rIns="0" tIns="0" bIns="0">
+            <a:spAutoFit/>
+          </a:bodyPr>
+          <a:lstStyle/>
+          <a:p>
+            <a:pPr algn="ctr"/>
+            <a:r>
+              <a:rPr sz="1600" b="0" i="0" kern="0" spc="0">
+                <a:solidFill>
+                  <a:srgbClr val="FFFFFF"/>
+                </a:solidFill>
+                <a:latin typeface="Poppins"/>
+              </a:rPr>
+              <a:t>declara que algún hijo vivió </a:t>
+            </a:r>
+            <a:r>
+              <a:rPr sz="1600" b="1" i="0" kern="0" spc="0">
+                <a:solidFill>
+                  <a:srgbClr val="FFFFFF"/>
+                </a:solidFill>
+                <a:latin typeface="Poppins"/>
+              </a:rPr>
+              <a:t>acoso o bullying</a:t>
+            </a:r>
+            <a:r>
+              <a:rPr sz="1600" b="0" i="0" kern="0" spc="0">
+                <a:solidFill>
+                  <a:srgbClr val="FFFFFF"/>
+                </a:solidFill>
+                <a:latin typeface="Poppins"/>
+              </a:rPr>
+              <a:t> escolar o digital; 75.0% (n=375) dice que no y 12.8% no tiene hijos. Recalculado sobre quienes tienen hijos (n≈436): ∼13.3%. Q65, Base 500.</a:t>
             </a:r>
           </a:p>
         </p:txBody>
@@ -4584,82 +4252,65 @@
         </p:nvSpPr>
         <p:spPr>
           <a:xfrm>
-            <a:off x="952500" y="952500"/>
-            <a:ext cx="16383000" cy="2857500"/>
-          </a:xfrm>
-          <a:prstGeom prst="rect">
-            <a:avLst/>
-          </a:prstGeom>
-          <a:noFill/>
-        </p:spPr>
-        <p:txBody>
-          <a:bodyPr wrap="square" lIns="0" rIns="0" tIns="0" bIns="0">
-            <a:spAutoFit/>
-          </a:bodyPr>
-          <a:lstStyle/>
-          <a:p>
-            <a:pPr algn="ctr"/>
-            <a:r>
-              <a:rPr sz="3150" b="0" i="0" kern="0" spc="0">
+            <a:off x="0" y="762000"/>
+            <a:ext cx="18288000" cy="476250"/>
+          </a:xfrm>
+          <a:prstGeom prst="rect">
+            <a:avLst/>
+          </a:prstGeom>
+          <a:noFill/>
+        </p:spPr>
+        <p:txBody>
+          <a:bodyPr wrap="square" lIns="0" rIns="0" tIns="0" bIns="0">
+            <a:spAutoFit/>
+          </a:bodyPr>
+          <a:lstStyle/>
+          <a:p>
+            <a:pPr algn="ctr"/>
+            <a:r>
+              <a:rPr sz="1400" b="0" i="0" kern="0" spc="0">
+                <a:solidFill>
+                  <a:srgbClr val="9B9B9B"/>
+                </a:solidFill>
+                <a:latin typeface="Poppins"/>
+              </a:rPr>
+              <a:t>CONSUMER VOICE</a:t>
+            </a:r>
+          </a:p>
+        </p:txBody>
+      </p:sp>
+      <p:sp>
+        <p:nvSpPr>
+          <p:cNvPr id="3" name="TextBox 2"/>
+          <p:cNvSpPr txBox="1"/>
+          <p:nvPr/>
+        </p:nvSpPr>
+        <p:spPr>
+          <a:xfrm>
+            <a:off x="1343025" y="3143250"/>
+            <a:ext cx="15592425" cy="4286250"/>
+          </a:xfrm>
+          <a:prstGeom prst="rect">
+            <a:avLst/>
+          </a:prstGeom>
+          <a:noFill/>
+        </p:spPr>
+        <p:txBody>
+          <a:bodyPr wrap="square" lIns="0" rIns="0" tIns="0" bIns="0">
+            <a:spAutoFit/>
+          </a:bodyPr>
+          <a:lstStyle/>
+          <a:p>
+            <a:pPr algn="ctr"/>
+            <a:r>
+              <a:rPr sz="6000" i="0" b="0" kern="0" spc="0">
                 <a:solidFill>
                   <a:srgbClr val="FFFFFF"/>
                 </a:solidFill>
                 <a:latin typeface="Instrument Serif"/>
               </a:rPr>
-              <a:t>62.6% PIDE UNA SOLA COSA PARA LA EQUIDAD FAMILIAR: QUE LOS PADRES ESTÉN MÁS PRESENTES. </a:t>
-            </a:r>
-            <a:r>
-              <a:rPr sz="3150" b="0" i="1" kern="0" spc="0">
-                <a:solidFill>
-                  <a:srgbClr val="FFFFFF"/>
-                </a:solidFill>
-                <a:latin typeface="Instrument Serif"/>
-              </a:rPr>
-              <a:t>LAS REFORMAS LABORALES Y LA PARIDAD SALARIAL NO APARECEN EN EL RADAR.</a:t>
-            </a:r>
-          </a:p>
-        </p:txBody>
-      </p:sp>
-      <p:sp>
-        <p:nvSpPr>
-          <p:cNvPr id="3" name="Rectangle 2"/>
-          <p:cNvSpPr/>
-          <p:nvPr/>
-        </p:nvSpPr>
-        <p:spPr>
-          <a:xfrm>
-            <a:off x="9134475" y="4572000"/>
-            <a:ext cx="19050" cy="2647950"/>
-          </a:xfrm>
-          <a:prstGeom prst="rect">
-            <a:avLst/>
-          </a:prstGeom>
-          <a:solidFill>
-            <a:srgbClr val="2E2E2E"/>
-          </a:solidFill>
-          <a:ln>
-            <a:noFill/>
-          </a:ln>
-        </p:spPr>
-        <p:style>
-          <a:lnRef idx="1">
-            <a:schemeClr val="accent1"/>
-          </a:lnRef>
-          <a:fillRef idx="3">
-            <a:schemeClr val="accent1"/>
-          </a:fillRef>
-          <a:effectRef idx="2">
-            <a:schemeClr val="accent1"/>
-          </a:effectRef>
-          <a:fontRef idx="minor">
-            <a:schemeClr val="lt1"/>
-          </a:fontRef>
-        </p:style>
-        <p:txBody>
-          <a:bodyPr rtlCol="0" anchor="ctr"/>
-          <a:lstStyle/>
-          <a:p>
-            <a:pPr algn="ctr"/>
+              <a:t>«Tuve al principio de año escolar un momento de tensión porque le estaban haciendo bullying a las niñas, y las niñas que le gustaban su colegio no querían ir. Ya se fue una señal de alerta para mí.»</a:t>
+            </a:r>
           </a:p>
         </p:txBody>
       </p:sp>
@@ -4671,205 +4322,29 @@
         </p:nvSpPr>
         <p:spPr>
           <a:xfrm>
-            <a:off x="1905000" y="4762500"/>
-            <a:ext cx="8382000" cy="1905000"/>
-          </a:xfrm>
-          <a:prstGeom prst="rect">
-            <a:avLst/>
-          </a:prstGeom>
-          <a:noFill/>
-        </p:spPr>
-        <p:txBody>
-          <a:bodyPr wrap="square" lIns="0" rIns="0" tIns="0" bIns="0">
-            <a:spAutoFit/>
-          </a:bodyPr>
-          <a:lstStyle/>
-          <a:p>
-            <a:pPr algn="ctr"/>
-            <a:r>
-              <a:rPr sz="13500" b="0" i="1" kern="0" spc="0">
-                <a:solidFill>
-                  <a:srgbClr val="FFFFFF"/>
-                </a:solidFill>
-                <a:latin typeface="Instrument Serif"/>
-              </a:rPr>
-              <a:t>63%</a:t>
-            </a:r>
-          </a:p>
-        </p:txBody>
-      </p:sp>
-      <p:sp>
-        <p:nvSpPr>
-          <p:cNvPr id="5" name="TextBox 4"/>
-          <p:cNvSpPr txBox="1"/>
-          <p:nvPr/>
-        </p:nvSpPr>
-        <p:spPr>
-          <a:xfrm>
-            <a:off x="1905000" y="6858000"/>
-            <a:ext cx="8382000" cy="1714500"/>
-          </a:xfrm>
-          <a:prstGeom prst="rect">
-            <a:avLst/>
-          </a:prstGeom>
-          <a:noFill/>
-        </p:spPr>
-        <p:txBody>
-          <a:bodyPr wrap="square" lIns="0" rIns="0" tIns="0" bIns="0">
-            <a:spAutoFit/>
-          </a:bodyPr>
-          <a:lstStyle/>
-          <a:p>
-            <a:pPr algn="ctr"/>
-            <a:r>
-              <a:rPr sz="1650" b="0" i="0" kern="0" spc="0">
-                <a:solidFill>
-                  <a:srgbClr val="FFFFFF"/>
-                </a:solidFill>
-                <a:latin typeface="Poppins"/>
-              </a:rPr>
-              <a:t>considera que el cambio social más urgente para la equidad familiar es que los </a:t>
-            </a:r>
-            <a:r>
-              <a:rPr sz="1650" b="1" i="0" kern="0" spc="0">
-                <a:solidFill>
-                  <a:srgbClr val="FFFFFF"/>
-                </a:solidFill>
-                <a:latin typeface="Poppins"/>
-              </a:rPr>
-              <a:t>padres estén más presentes</a:t>
-            </a:r>
-            <a:r>
-              <a:rPr sz="1650" b="0" i="0" kern="0" spc="0">
-                <a:solidFill>
-                  <a:srgbClr val="FFFFFF"/>
-                </a:solidFill>
-                <a:latin typeface="Poppins"/>
-              </a:rPr>
-              <a:t> en la crianza y las tareas del hogar. TOP-1 con margen amplio. Q66, Base 500.</a:t>
-            </a:r>
-          </a:p>
-        </p:txBody>
-      </p:sp>
-      <p:sp>
-        <p:nvSpPr>
-          <p:cNvPr id="6" name="TextBox 5"/>
-          <p:cNvSpPr txBox="1"/>
-          <p:nvPr/>
-        </p:nvSpPr>
-        <p:spPr>
-          <a:xfrm>
-            <a:off x="8001000" y="4762500"/>
-            <a:ext cx="8382000" cy="1905000"/>
-          </a:xfrm>
-          <a:prstGeom prst="rect">
-            <a:avLst/>
-          </a:prstGeom>
-          <a:noFill/>
-        </p:spPr>
-        <p:txBody>
-          <a:bodyPr wrap="square" lIns="0" rIns="0" tIns="0" bIns="0">
-            <a:spAutoFit/>
-          </a:bodyPr>
-          <a:lstStyle/>
-          <a:p>
-            <a:pPr algn="ctr"/>
-            <a:r>
-              <a:rPr sz="13500" b="0" i="1" kern="0" spc="0">
-                <a:solidFill>
-                  <a:srgbClr val="FFFFFF"/>
-                </a:solidFill>
-                <a:latin typeface="Instrument Serif"/>
-              </a:rPr>
-              <a:t>13%</a:t>
-            </a:r>
-          </a:p>
-        </p:txBody>
-      </p:sp>
-      <p:sp>
-        <p:nvSpPr>
-          <p:cNvPr id="7" name="TextBox 6"/>
-          <p:cNvSpPr txBox="1"/>
-          <p:nvPr/>
-        </p:nvSpPr>
-        <p:spPr>
-          <a:xfrm>
-            <a:off x="8001000" y="6858000"/>
-            <a:ext cx="8382000" cy="1714500"/>
-          </a:xfrm>
-          <a:prstGeom prst="rect">
-            <a:avLst/>
-          </a:prstGeom>
-          <a:noFill/>
-        </p:spPr>
-        <p:txBody>
-          <a:bodyPr wrap="square" lIns="0" rIns="0" tIns="0" bIns="0">
-            <a:spAutoFit/>
-          </a:bodyPr>
-          <a:lstStyle/>
-          <a:p>
-            <a:pPr algn="ctr"/>
-            <a:r>
-              <a:rPr sz="1650" b="0" i="0" kern="0" spc="0">
-                <a:solidFill>
-                  <a:srgbClr val="FFFFFF"/>
-                </a:solidFill>
-                <a:latin typeface="Poppins"/>
-              </a:rPr>
-              <a:t>elige </a:t>
-            </a:r>
-            <a:r>
-              <a:rPr sz="1650" b="1" i="0" kern="0" spc="0">
-                <a:solidFill>
-                  <a:srgbClr val="FFFFFF"/>
-                </a:solidFill>
-                <a:latin typeface="Poppins"/>
-              </a:rPr>
-              <a:t>flexibilidad laboral para ambos padres</a:t>
-            </a:r>
-            <a:r>
-              <a:rPr sz="1650" b="0" i="0" kern="0" spc="0">
-                <a:solidFill>
-                  <a:srgbClr val="FFFFFF"/>
-                </a:solidFill>
-                <a:latin typeface="Poppins"/>
-              </a:rPr>
-              <a:t> y apenas 2.8% que la maternidad no implique retroceso profesional. Lo estructural queda cinco veces por debajo de lo presencial.</a:t>
-            </a:r>
-          </a:p>
-        </p:txBody>
-      </p:sp>
-      <p:sp>
-        <p:nvSpPr>
-          <p:cNvPr id="8" name="TextBox 7"/>
-          <p:cNvSpPr txBox="1"/>
-          <p:nvPr/>
-        </p:nvSpPr>
-        <p:spPr>
-          <a:xfrm>
-            <a:off x="0" y="9429750"/>
-            <a:ext cx="18288000" cy="476250"/>
-          </a:xfrm>
-          <a:prstGeom prst="rect">
-            <a:avLst/>
-          </a:prstGeom>
-          <a:noFill/>
-        </p:spPr>
-        <p:txBody>
-          <a:bodyPr wrap="square" lIns="0" rIns="0" tIns="0" bIns="0">
-            <a:spAutoFit/>
-          </a:bodyPr>
-          <a:lstStyle/>
-          <a:p>
-            <a:pPr algn="ctr"/>
-            <a:r>
-              <a:rPr sz="1200" b="0" i="1" kern="0" spc="0">
-                <a:solidFill>
-                  <a:srgbClr val="9B9B9B"/>
-                </a:solidFill>
-                <a:latin typeface="Poppins"/>
-              </a:rPr>
-              <a:t>Source: Código Casa — Estudio cuantitativo 2025 · Q66 · Base 500.</a:t>
+            <a:off x="0" y="6000750"/>
+            <a:ext cx="18288000" cy="571500"/>
+          </a:xfrm>
+          <a:prstGeom prst="rect">
+            <a:avLst/>
+          </a:prstGeom>
+          <a:noFill/>
+        </p:spPr>
+        <p:txBody>
+          <a:bodyPr wrap="square" lIns="0" rIns="0" tIns="0" bIns="0">
+            <a:spAutoFit/>
+          </a:bodyPr>
+          <a:lstStyle/>
+          <a:p>
+            <a:pPr algn="ctr"/>
+            <a:r>
+              <a:rPr sz="2000" b="0" i="1" kern="0" spc="0">
+                <a:solidFill>
+                  <a:srgbClr val="FFFFFF"/>
+                </a:solidFill>
+                <a:latin typeface="Poppins"/>
+              </a:rPr>
+              <a:t>— Familia Extendida</a:t>
             </a:r>
           </a:p>
         </p:txBody>
@@ -4908,38 +4383,38 @@
         </p:nvSpPr>
         <p:spPr>
           <a:xfrm>
-            <a:off x="952500" y="952500"/>
-            <a:ext cx="16383000" cy="2857500"/>
-          </a:xfrm>
-          <a:prstGeom prst="rect">
-            <a:avLst/>
-          </a:prstGeom>
-          <a:noFill/>
-        </p:spPr>
-        <p:txBody>
-          <a:bodyPr wrap="square" lIns="0" rIns="0" tIns="0" bIns="0">
-            <a:spAutoFit/>
-          </a:bodyPr>
-          <a:lstStyle/>
-          <a:p>
-            <a:pPr algn="ctr"/>
-            <a:r>
-              <a:rPr sz="3150" b="0" i="0" kern="0" spc="0">
+            <a:off x="952500" y="762000"/>
+            <a:ext cx="16383000" cy="3048000"/>
+          </a:xfrm>
+          <a:prstGeom prst="rect">
+            <a:avLst/>
+          </a:prstGeom>
+          <a:noFill/>
+        </p:spPr>
+        <p:txBody>
+          <a:bodyPr wrap="square" lIns="0" rIns="0" tIns="0" bIns="0">
+            <a:spAutoFit/>
+          </a:bodyPr>
+          <a:lstStyle/>
+          <a:p>
+            <a:pPr algn="ctr"/>
+            <a:r>
+              <a:rPr sz="5000" b="0" i="0" kern="0" spc="0">
                 <a:solidFill>
                   <a:srgbClr val="FFFFFF"/>
                 </a:solidFill>
                 <a:latin typeface="Instrument Serif"/>
               </a:rPr>
-              <a:t>73.8% PIDE PENSIONES PARA QUE LOS MAYORES VIVAN CON DIGNIDAD. </a:t>
-            </a:r>
-            <a:r>
-              <a:rPr sz="3150" b="0" i="1" kern="0" spc="0">
+              <a:t>62.6% DICE QUE EL CAMBIO MÁS URGENTE PARA LA EQUIDAD ES QUE LOS PADRES ESTÉN PRESENTES. </a:t>
+            </a:r>
+            <a:r>
+              <a:rPr sz="5000" b="0" i="1" kern="0" spc="0">
                 <a:solidFill>
                   <a:srgbClr val="FFFFFF"/>
                 </a:solidFill>
                 <a:latin typeface="Instrument Serif"/>
               </a:rPr>
-              <a:t>EL RESPETO, LA COMPAÑÍA Y EL CUIDADO EMOCIONAL LLEGAN DESPUÉS. LO PRIMERO ES EL CHEQUE.</a:t>
+              <a:t>LA FLEXIBILIDAD LABORAL Y LA CARRERA DE LA MUJER NO LLEGAN NI AL 13%.</a:t>
             </a:r>
           </a:p>
         </p:txBody>
@@ -4952,7 +4427,7 @@
         </p:nvSpPr>
         <p:spPr>
           <a:xfrm>
-            <a:off x="9134475" y="4572000"/>
+            <a:off x="9134475" y="4381500"/>
             <a:ext cx="19050" cy="2647950"/>
           </a:xfrm>
           <a:prstGeom prst="rect">
@@ -4995,7 +4470,7 @@
         </p:nvSpPr>
         <p:spPr>
           <a:xfrm>
-            <a:off x="1905000" y="4762500"/>
+            <a:off x="1905000" y="4572000"/>
             <a:ext cx="8382000" cy="1905000"/>
           </a:xfrm>
           <a:prstGeom prst="rect">
@@ -5017,7 +4492,7 @@
                 </a:solidFill>
                 <a:latin typeface="Instrument Serif"/>
               </a:rPr>
-              <a:t>74%</a:t>
+              <a:t>63%</a:t>
             </a:r>
           </a:p>
         </p:txBody>
@@ -5030,7 +4505,7 @@
         </p:nvSpPr>
         <p:spPr>
           <a:xfrm>
-            <a:off x="1905000" y="6858000"/>
+            <a:off x="1905000" y="6667500"/>
             <a:ext cx="8382000" cy="1714500"/>
           </a:xfrm>
           <a:prstGeom prst="rect">
@@ -5046,31 +4521,31 @@
           <a:p>
             <a:pPr algn="ctr"/>
             <a:r>
-              <a:rPr sz="1650" b="0" i="0" kern="0" spc="0">
-                <a:solidFill>
-                  <a:srgbClr val="FFFFFF"/>
-                </a:solidFill>
-                <a:latin typeface="Poppins"/>
-              </a:rPr>
-              <a:t>cree que lo que más falta para la dignidad de la tercera edad son </a:t>
-            </a:r>
-            <a:r>
-              <a:rPr sz="1650" b="1" i="0" kern="0" spc="0">
-                <a:solidFill>
-                  <a:srgbClr val="FFFFFF"/>
-                </a:solidFill>
-                <a:latin typeface="Poppins"/>
-              </a:rPr>
-              <a:t>pensiones o apoyos económicos suficientes</a:t>
-            </a:r>
-            <a:r>
-              <a:rPr sz="1650" b="0" i="0" kern="0" spc="0">
-                <a:solidFill>
-                  <a:srgbClr val="FFFFFF"/>
-                </a:solidFill>
-                <a:latin typeface="Poppins"/>
-              </a:rPr>
-              <a:t>. Le sigue acceso a salud con 53.4%. TOP-1 absoluto. Q69, Base 500.</a:t>
+              <a:rPr sz="1600" b="0" i="0" kern="0" spc="0">
+                <a:solidFill>
+                  <a:srgbClr val="FFFFFF"/>
+                </a:solidFill>
+                <a:latin typeface="Poppins"/>
+              </a:rPr>
+              <a:t>elige "que los </a:t>
+            </a:r>
+            <a:r>
+              <a:rPr sz="1600" b="1" i="0" kern="0" spc="0">
+                <a:solidFill>
+                  <a:srgbClr val="FFFFFF"/>
+                </a:solidFill>
+                <a:latin typeface="Poppins"/>
+              </a:rPr>
+              <a:t>padres estén más presentes</a:t>
+            </a:r>
+            <a:r>
+              <a:rPr sz="1600" b="0" i="0" kern="0" spc="0">
+                <a:solidFill>
+                  <a:srgbClr val="FFFFFF"/>
+                </a:solidFill>
+                <a:latin typeface="Poppins"/>
+              </a:rPr>
+              <a:t>" en la crianza y el hogar como el cambio social más urgente para la equidad familiar. Muy por encima de flexibilidad laboral (12.8%) o que la maternidad no frene la carrera (2.8%). Q66, Base 500.</a:t>
             </a:r>
           </a:p>
         </p:txBody>
@@ -5083,7 +4558,7 @@
         </p:nvSpPr>
         <p:spPr>
           <a:xfrm>
-            <a:off x="8001000" y="4762500"/>
+            <a:off x="8001000" y="4572000"/>
             <a:ext cx="8382000" cy="1905000"/>
           </a:xfrm>
           <a:prstGeom prst="rect">
@@ -5105,7 +4580,7 @@
                 </a:solidFill>
                 <a:latin typeface="Instrument Serif"/>
               </a:rPr>
-              <a:t>32%</a:t>
+              <a:t>13%</a:t>
             </a:r>
           </a:p>
         </p:txBody>
@@ -5118,7 +4593,7 @@
         </p:nvSpPr>
         <p:spPr>
           <a:xfrm>
-            <a:off x="8001000" y="6858000"/>
+            <a:off x="8001000" y="6667500"/>
             <a:ext cx="8382000" cy="1714500"/>
           </a:xfrm>
           <a:prstGeom prst="rect">
@@ -5134,66 +4609,31 @@
           <a:p>
             <a:pPr algn="ctr"/>
             <a:r>
-              <a:rPr sz="1650" b="0" i="0" kern="0" spc="0">
-                <a:solidFill>
-                  <a:srgbClr val="FFFFFF"/>
-                </a:solidFill>
-                <a:latin typeface="Poppins"/>
-              </a:rPr>
-              <a:t>elige prevención del </a:t>
-            </a:r>
-            <a:r>
-              <a:rPr sz="1650" b="1" i="0" kern="0" spc="0">
-                <a:solidFill>
-                  <a:srgbClr val="FFFFFF"/>
-                </a:solidFill>
-                <a:latin typeface="Poppins"/>
-              </a:rPr>
-              <a:t>abandono, la soledad y el maltrato</a:t>
-            </a:r>
-            <a:r>
-              <a:rPr sz="1650" b="0" i="0" kern="0" spc="0">
-                <a:solidFill>
-                  <a:srgbClr val="FFFFFF"/>
-                </a:solidFill>
-                <a:latin typeface="Poppins"/>
-              </a:rPr>
-              <a:t> (quinto lugar con 32.2%) y sólo 32.4% el respeto y reconocimiento familiar. Lo emocional pesa la mitad que lo económico.</a:t>
-            </a:r>
-          </a:p>
-        </p:txBody>
-      </p:sp>
-      <p:sp>
-        <p:nvSpPr>
-          <p:cNvPr id="8" name="TextBox 7"/>
-          <p:cNvSpPr txBox="1"/>
-          <p:nvPr/>
-        </p:nvSpPr>
-        <p:spPr>
-          <a:xfrm>
-            <a:off x="0" y="9429750"/>
-            <a:ext cx="18288000" cy="476250"/>
-          </a:xfrm>
-          <a:prstGeom prst="rect">
-            <a:avLst/>
-          </a:prstGeom>
-          <a:noFill/>
-        </p:spPr>
-        <p:txBody>
-          <a:bodyPr wrap="square" lIns="0" rIns="0" tIns="0" bIns="0">
-            <a:spAutoFit/>
-          </a:bodyPr>
-          <a:lstStyle/>
-          <a:p>
-            <a:pPr algn="ctr"/>
-            <a:r>
-              <a:rPr sz="1200" b="0" i="1" kern="0" spc="0">
-                <a:solidFill>
-                  <a:srgbClr val="9B9B9B"/>
-                </a:solidFill>
-                <a:latin typeface="Poppins"/>
-              </a:rPr>
-              <a:t>Source: Código Casa — Estudio cuantitativo 2025 · Q69 · Base 500.</a:t>
+              <a:rPr sz="1600" b="0" i="0" kern="0" spc="0">
+                <a:solidFill>
+                  <a:srgbClr val="FFFFFF"/>
+                </a:solidFill>
+                <a:latin typeface="Poppins"/>
+              </a:rPr>
+              <a:t>elige </a:t>
+            </a:r>
+            <a:r>
+              <a:rPr sz="1600" b="1" i="0" kern="0" spc="0">
+                <a:solidFill>
+                  <a:srgbClr val="FFFFFF"/>
+                </a:solidFill>
+                <a:latin typeface="Poppins"/>
+              </a:rPr>
+              <a:t>flexibilidad laboral para ambos padres</a:t>
+            </a:r>
+            <a:r>
+              <a:rPr sz="1600" b="0" i="0" kern="0" spc="0">
+                <a:solidFill>
+                  <a:srgbClr val="FFFFFF"/>
+                </a:solidFill>
+                <a:latin typeface="Poppins"/>
+              </a:rPr>
+              <a:t>. La prioridad de "padres presentes" es más intensa en NSE bajo: 75.0% en NSE E (n=32, tendencia direccional) vs 43.5% en AB.</a:t>
             </a:r>
           </a:p>
         </p:txBody>
@@ -5232,38 +4672,169 @@
         </p:nvSpPr>
         <p:spPr>
           <a:xfrm>
-            <a:off x="952500" y="952500"/>
-            <a:ext cx="16383000" cy="2857500"/>
-          </a:xfrm>
-          <a:prstGeom prst="rect">
-            <a:avLst/>
-          </a:prstGeom>
-          <a:noFill/>
-        </p:spPr>
-        <p:txBody>
-          <a:bodyPr wrap="square" lIns="0" rIns="0" tIns="0" bIns="0">
-            <a:spAutoFit/>
-          </a:bodyPr>
-          <a:lstStyle/>
-          <a:p>
-            <a:pPr algn="ctr"/>
-            <a:r>
-              <a:rPr sz="3150" b="0" i="0" kern="0" spc="0">
+            <a:off x="0" y="762000"/>
+            <a:ext cx="18288000" cy="476250"/>
+          </a:xfrm>
+          <a:prstGeom prst="rect">
+            <a:avLst/>
+          </a:prstGeom>
+          <a:noFill/>
+        </p:spPr>
+        <p:txBody>
+          <a:bodyPr wrap="square" lIns="0" rIns="0" tIns="0" bIns="0">
+            <a:spAutoFit/>
+          </a:bodyPr>
+          <a:lstStyle/>
+          <a:p>
+            <a:pPr algn="ctr"/>
+            <a:r>
+              <a:rPr sz="1400" b="0" i="0" kern="0" spc="0">
+                <a:solidFill>
+                  <a:srgbClr val="9B9B9B"/>
+                </a:solidFill>
+                <a:latin typeface="Poppins"/>
+              </a:rPr>
+              <a:t>CONSUMER VOICE</a:t>
+            </a:r>
+          </a:p>
+        </p:txBody>
+      </p:sp>
+      <p:sp>
+        <p:nvSpPr>
+          <p:cNvPr id="3" name="TextBox 2"/>
+          <p:cNvSpPr txBox="1"/>
+          <p:nvPr/>
+        </p:nvSpPr>
+        <p:spPr>
+          <a:xfrm>
+            <a:off x="1343025" y="3143250"/>
+            <a:ext cx="15592425" cy="4286250"/>
+          </a:xfrm>
+          <a:prstGeom prst="rect">
+            <a:avLst/>
+          </a:prstGeom>
+          <a:noFill/>
+        </p:spPr>
+        <p:txBody>
+          <a:bodyPr wrap="square" lIns="0" rIns="0" tIns="0" bIns="0">
+            <a:spAutoFit/>
+          </a:bodyPr>
+          <a:lstStyle/>
+          <a:p>
+            <a:pPr algn="ctr"/>
+            <a:r>
+              <a:rPr sz="6000" i="0" b="0" kern="0" spc="0">
                 <a:solidFill>
                   <a:srgbClr val="FFFFFF"/>
                 </a:solidFill>
                 <a:latin typeface="Instrument Serif"/>
               </a:rPr>
-              <a:t>91.2% DICE NO HABER SIDO DISCRIMINADO EN 3 AÑOS. </a:t>
-            </a:r>
-            <a:r>
-              <a:rPr sz="3150" b="0" i="1" kern="0" spc="0">
+              <a:t>«Que los padres estén más presentes... porque uno se lo da en la casa, que es donde todo empieza, pero ellos, la mayor parte de su tiempo, no están en la casa.»</a:t>
+            </a:r>
+          </a:p>
+        </p:txBody>
+      </p:sp>
+      <p:sp>
+        <p:nvSpPr>
+          <p:cNvPr id="4" name="TextBox 3"/>
+          <p:cNvSpPr txBox="1"/>
+          <p:nvPr/>
+        </p:nvSpPr>
+        <p:spPr>
+          <a:xfrm>
+            <a:off x="0" y="6000750"/>
+            <a:ext cx="18288000" cy="571500"/>
+          </a:xfrm>
+          <a:prstGeom prst="rect">
+            <a:avLst/>
+          </a:prstGeom>
+          <a:noFill/>
+        </p:spPr>
+        <p:txBody>
+          <a:bodyPr wrap="square" lIns="0" rIns="0" tIns="0" bIns="0">
+            <a:spAutoFit/>
+          </a:bodyPr>
+          <a:lstStyle/>
+          <a:p>
+            <a:pPr algn="ctr"/>
+            <a:r>
+              <a:rPr sz="2000" b="0" i="1" kern="0" spc="0">
+                <a:solidFill>
+                  <a:srgbClr val="FFFFFF"/>
+                </a:solidFill>
+                <a:latin typeface="Poppins"/>
+              </a:rPr>
+              <a:t>— Familia Monoparental</a:t>
+            </a:r>
+          </a:p>
+        </p:txBody>
+      </p:sp>
+    </p:spTree>
+  </p:cSld>
+  <p:clrMapOvr>
+    <a:masterClrMapping/>
+  </p:clrMapOvr>
+</p:sld>
+</file>
+
+<file path=ppt/slides/slide17.xml><?xml version="1.0" encoding="utf-8"?>
+<p:sld xmlns:a="http://schemas.openxmlformats.org/drawingml/2006/main" xmlns:p="http://schemas.openxmlformats.org/presentationml/2006/main" xmlns:r="http://schemas.openxmlformats.org/officeDocument/2006/relationships">
+  <p:cSld>
+    <p:bg>
+      <p:bgPr>
+        <a:solidFill>
+          <a:srgbClr val="000000"/>
+        </a:solidFill>
+        <a:effectLst/>
+      </p:bgPr>
+    </p:bg>
+    <p:spTree>
+      <p:nvGrpSpPr>
+        <p:cNvPr id="1" name=""/>
+        <p:cNvGrpSpPr/>
+        <p:nvPr/>
+      </p:nvGrpSpPr>
+      <p:grpSpPr/>
+      <p:sp>
+        <p:nvSpPr>
+          <p:cNvPr id="2" name="TextBox 1"/>
+          <p:cNvSpPr txBox="1"/>
+          <p:nvPr/>
+        </p:nvSpPr>
+        <p:spPr>
+          <a:xfrm>
+            <a:off x="952500" y="762000"/>
+            <a:ext cx="16383000" cy="3048000"/>
+          </a:xfrm>
+          <a:prstGeom prst="rect">
+            <a:avLst/>
+          </a:prstGeom>
+          <a:noFill/>
+        </p:spPr>
+        <p:txBody>
+          <a:bodyPr wrap="square" lIns="0" rIns="0" tIns="0" bIns="0">
+            <a:spAutoFit/>
+          </a:bodyPr>
+          <a:lstStyle/>
+          <a:p>
+            <a:pPr algn="ctr"/>
+            <a:r>
+              <a:rPr sz="5000" b="0" i="0" kern="0" spc="0">
                 <a:solidFill>
                   <a:srgbClr val="FFFFFF"/>
                 </a:solidFill>
                 <a:latin typeface="Instrument Serif"/>
               </a:rPr>
-              <a:t>LO POCO QUE SÍ SE REPORTA TIENE CARA: COLOR DE PIEL Y CABELLO CONCENTRAN CASI TODOS LOS CASOS.</a:t>
+              <a:t>CUANDO EL DOMINICANO SÍ SUFRE VIOLENCIA, LA MÁS FRECUENTE NO ES LA FÍSICA: ES ECONÓMICA. </a:t>
+            </a:r>
+            <a:r>
+              <a:rPr sz="5000" b="0" i="1" kern="0" spc="0">
+                <a:solidFill>
+                  <a:srgbClr val="FFFFFF"/>
+                </a:solidFill>
+                <a:latin typeface="Instrument Serif"/>
+              </a:rPr>
+              <a:t>20.2% REPORTA CONTROL FINANCIERO — CASI EL TRIPLE QUE EL 7.6% DE VIOLENCIA FÍSICA.</a:t>
             </a:r>
           </a:p>
         </p:txBody>
@@ -5276,7 +4847,7 @@
         </p:nvSpPr>
         <p:spPr>
           <a:xfrm>
-            <a:off x="9134475" y="4572000"/>
+            <a:off x="9134475" y="4381500"/>
             <a:ext cx="19050" cy="2647950"/>
           </a:xfrm>
           <a:prstGeom prst="rect">
@@ -5319,7 +4890,7 @@
         </p:nvSpPr>
         <p:spPr>
           <a:xfrm>
-            <a:off x="1905000" y="4762500"/>
+            <a:off x="1905000" y="4572000"/>
             <a:ext cx="8382000" cy="1905000"/>
           </a:xfrm>
           <a:prstGeom prst="rect">
@@ -5341,7 +4912,7 @@
                 </a:solidFill>
                 <a:latin typeface="Instrument Serif"/>
               </a:rPr>
-              <a:t>91%</a:t>
+              <a:t>20%</a:t>
             </a:r>
           </a:p>
         </p:txBody>
@@ -5354,7 +4925,7 @@
         </p:nvSpPr>
         <p:spPr>
           <a:xfrm>
-            <a:off x="1905000" y="6858000"/>
+            <a:off x="1905000" y="6667500"/>
             <a:ext cx="8382000" cy="1714500"/>
           </a:xfrm>
           <a:prstGeom prst="rect">
@@ -5370,31 +4941,31 @@
           <a:p>
             <a:pPr algn="ctr"/>
             <a:r>
-              <a:rPr sz="1650" b="0" i="0" kern="0" spc="0">
-                <a:solidFill>
-                  <a:srgbClr val="FFFFFF"/>
-                </a:solidFill>
-                <a:latin typeface="Poppins"/>
-              </a:rPr>
-              <a:t>declara no haber sido víctima de </a:t>
-            </a:r>
-            <a:r>
-              <a:rPr sz="1650" b="1" i="0" kern="0" spc="0">
-                <a:solidFill>
-                  <a:srgbClr val="FFFFFF"/>
-                </a:solidFill>
-                <a:latin typeface="Poppins"/>
-              </a:rPr>
-              <a:t>discriminación</a:t>
-            </a:r>
-            <a:r>
-              <a:rPr sz="1650" b="0" i="0" kern="0" spc="0">
-                <a:solidFill>
-                  <a:srgbClr val="FFFFFF"/>
-                </a:solidFill>
-                <a:latin typeface="Poppins"/>
-              </a:rPr>
-              <a:t> en los últimos 3 años por raza, color de piel, etnia, nacionalidad, orientación sexual o religión. Q60, Base 500.</a:t>
+              <a:rPr sz="1600" b="0" i="0" kern="0" spc="0">
+                <a:solidFill>
+                  <a:srgbClr val="FFFFFF"/>
+                </a:solidFill>
+                <a:latin typeface="Poppins"/>
+              </a:rPr>
+              <a:t>reporta </a:t>
+            </a:r>
+            <a:r>
+              <a:rPr sz="1600" b="1" i="0" kern="0" spc="0">
+                <a:solidFill>
+                  <a:srgbClr val="FFFFFF"/>
+                </a:solidFill>
+                <a:latin typeface="Poppins"/>
+              </a:rPr>
+              <a:t>violencia económica</a:t>
+            </a:r>
+            <a:r>
+              <a:rPr sz="1600" b="0" i="0" kern="0" spc="0">
+                <a:solidFill>
+                  <a:srgbClr val="FFFFFF"/>
+                </a:solidFill>
+                <a:latin typeface="Poppins"/>
+              </a:rPr>
+              <a:t> — control del acceso al dinero, restricción financiera — como el tipo de violencia más frecuente en los últimos 3 años. Le sigue la emocional/psicológica (17.4%) y la física (7.6%). Q67, Base 500.</a:t>
             </a:r>
           </a:p>
         </p:txBody>
@@ -5407,7 +4978,7 @@
         </p:nvSpPr>
         <p:spPr>
           <a:xfrm>
-            <a:off x="8001000" y="4762500"/>
+            <a:off x="8001000" y="4572000"/>
             <a:ext cx="8382000" cy="1905000"/>
           </a:xfrm>
           <a:prstGeom prst="rect">
@@ -5429,7 +5000,7 @@
                 </a:solidFill>
                 <a:latin typeface="Instrument Serif"/>
               </a:rPr>
-              <a:t>2.8%</a:t>
+              <a:t>56%</a:t>
             </a:r>
           </a:p>
         </p:txBody>
@@ -5442,7 +5013,7 @@
         </p:nvSpPr>
         <p:spPr>
           <a:xfrm>
-            <a:off x="8001000" y="6858000"/>
+            <a:off x="8001000" y="6667500"/>
             <a:ext cx="8382000" cy="1714500"/>
           </a:xfrm>
           <a:prstGeom prst="rect">
@@ -5458,44 +5029,70 @@
           <a:p>
             <a:pPr algn="ctr"/>
             <a:r>
-              <a:rPr sz="1650" b="0" i="0" kern="0" spc="0">
-                <a:solidFill>
-                  <a:srgbClr val="FFFFFF"/>
-                </a:solidFill>
-                <a:latin typeface="Poppins"/>
-              </a:rPr>
-              <a:t>reporta discriminación por </a:t>
-            </a:r>
-            <a:r>
-              <a:rPr sz="1650" b="1" i="0" kern="0" spc="0">
-                <a:solidFill>
-                  <a:srgbClr val="FFFFFF"/>
-                </a:solidFill>
-                <a:latin typeface="Poppins"/>
-              </a:rPr>
-              <a:t>color de piel</a:t>
-            </a:r>
-            <a:r>
-              <a:rPr sz="1650" b="0" i="0" kern="0" spc="0">
-                <a:solidFill>
-                  <a:srgbClr val="FFFFFF"/>
-                </a:solidFill>
-                <a:latin typeface="Poppins"/>
-              </a:rPr>
-              <a:t> (n=14) y 1.8% por cabello (n=9). El cuerpo racializado concentra lo poco que se declara. Cifras sobre n=500 total.</a:t>
-            </a:r>
-          </a:p>
-        </p:txBody>
-      </p:sp>
-      <p:sp>
-        <p:nvSpPr>
-          <p:cNvPr id="8" name="TextBox 7"/>
-          <p:cNvSpPr txBox="1"/>
-          <p:nvPr/>
-        </p:nvSpPr>
-        <p:spPr>
-          <a:xfrm>
-            <a:off x="0" y="9429750"/>
+              <a:rPr sz="1600" b="0" i="0" kern="0" spc="0">
+                <a:solidFill>
+                  <a:srgbClr val="FFFFFF"/>
+                </a:solidFill>
+                <a:latin typeface="Poppins"/>
+              </a:rPr>
+              <a:t>declara no haber sufrido </a:t>
+            </a:r>
+            <a:r>
+              <a:rPr sz="1600" b="1" i="0" kern="0" spc="0">
+                <a:solidFill>
+                  <a:srgbClr val="FFFFFF"/>
+                </a:solidFill>
+                <a:latin typeface="Poppins"/>
+              </a:rPr>
+              <a:t>ningún tipo de violencia</a:t>
+            </a:r>
+            <a:r>
+              <a:rPr sz="1600" b="0" i="0" kern="0" spc="0">
+                <a:solidFill>
+                  <a:srgbClr val="FFFFFF"/>
+                </a:solidFill>
+                <a:latin typeface="Poppins"/>
+              </a:rPr>
+              <a:t>. El 44% restante que sí reporta algo distribuye mayoritariamente en económica y emocional. El cruce NSE E × "no víctima" (n=14) no es publicable.</a:t>
+            </a:r>
+          </a:p>
+        </p:txBody>
+      </p:sp>
+    </p:spTree>
+  </p:cSld>
+  <p:clrMapOvr>
+    <a:masterClrMapping/>
+  </p:clrMapOvr>
+</p:sld>
+</file>
+
+<file path=ppt/slides/slide18.xml><?xml version="1.0" encoding="utf-8"?>
+<p:sld xmlns:a="http://schemas.openxmlformats.org/drawingml/2006/main" xmlns:p="http://schemas.openxmlformats.org/presentationml/2006/main" xmlns:r="http://schemas.openxmlformats.org/officeDocument/2006/relationships">
+  <p:cSld>
+    <p:bg>
+      <p:bgPr>
+        <a:solidFill>
+          <a:srgbClr val="000000"/>
+        </a:solidFill>
+        <a:effectLst/>
+      </p:bgPr>
+    </p:bg>
+    <p:spTree>
+      <p:nvGrpSpPr>
+        <p:cNvPr id="1" name=""/>
+        <p:cNvGrpSpPr/>
+        <p:nvPr/>
+      </p:nvGrpSpPr>
+      <p:grpSpPr/>
+      <p:sp>
+        <p:nvSpPr>
+          <p:cNvPr id="2" name="TextBox 1"/>
+          <p:cNvSpPr txBox="1"/>
+          <p:nvPr/>
+        </p:nvSpPr>
+        <p:spPr>
+          <a:xfrm>
+            <a:off x="0" y="762000"/>
             <a:ext cx="18288000" cy="476250"/>
           </a:xfrm>
           <a:prstGeom prst="rect">
@@ -5511,13 +5108,372 @@
           <a:p>
             <a:pPr algn="ctr"/>
             <a:r>
-              <a:rPr sz="1200" b="0" i="1" kern="0" spc="0">
+              <a:rPr sz="1400" b="0" i="0" kern="0" spc="0">
                 <a:solidFill>
                   <a:srgbClr val="9B9B9B"/>
                 </a:solidFill>
                 <a:latin typeface="Poppins"/>
               </a:rPr>
-              <a:t>Source: Código Casa — Estudio cuantitativo 2025 · Q60 · Base 500.</a:t>
+              <a:t>CONSUMER VOICE</a:t>
+            </a:r>
+          </a:p>
+        </p:txBody>
+      </p:sp>
+      <p:sp>
+        <p:nvSpPr>
+          <p:cNvPr id="3" name="TextBox 2"/>
+          <p:cNvSpPr txBox="1"/>
+          <p:nvPr/>
+        </p:nvSpPr>
+        <p:spPr>
+          <a:xfrm>
+            <a:off x="1343025" y="3143250"/>
+            <a:ext cx="15592425" cy="4286250"/>
+          </a:xfrm>
+          <a:prstGeom prst="rect">
+            <a:avLst/>
+          </a:prstGeom>
+          <a:noFill/>
+        </p:spPr>
+        <p:txBody>
+          <a:bodyPr wrap="square" lIns="0" rIns="0" tIns="0" bIns="0">
+            <a:spAutoFit/>
+          </a:bodyPr>
+          <a:lstStyle/>
+          <a:p>
+            <a:pPr algn="ctr"/>
+            <a:r>
+              <a:rPr sz="6000" i="0" b="0" kern="0" spc="0">
+                <a:solidFill>
+                  <a:srgbClr val="FFFFFF"/>
+                </a:solidFill>
+                <a:latin typeface="Instrument Serif"/>
+              </a:rPr>
+              <a:t>«Si mi esposo me golpea... aunque yo le diga a mi hija, mira, tú no puedes dejar que nadie te golpee, ella entiende que si él, que es mi esposo, me quiere y me golpea, es una respuesta al amor.»</a:t>
+            </a:r>
+          </a:p>
+        </p:txBody>
+      </p:sp>
+      <p:sp>
+        <p:nvSpPr>
+          <p:cNvPr id="4" name="TextBox 3"/>
+          <p:cNvSpPr txBox="1"/>
+          <p:nvPr/>
+        </p:nvSpPr>
+        <p:spPr>
+          <a:xfrm>
+            <a:off x="0" y="6000750"/>
+            <a:ext cx="18288000" cy="571500"/>
+          </a:xfrm>
+          <a:prstGeom prst="rect">
+            <a:avLst/>
+          </a:prstGeom>
+          <a:noFill/>
+        </p:spPr>
+        <p:txBody>
+          <a:bodyPr wrap="square" lIns="0" rIns="0" tIns="0" bIns="0">
+            <a:spAutoFit/>
+          </a:bodyPr>
+          <a:lstStyle/>
+          <a:p>
+            <a:pPr algn="ctr"/>
+            <a:r>
+              <a:rPr sz="2000" b="0" i="1" kern="0" spc="0">
+                <a:solidFill>
+                  <a:srgbClr val="FFFFFF"/>
+                </a:solidFill>
+                <a:latin typeface="Poppins"/>
+              </a:rPr>
+              <a:t>— Familia Extendida</a:t>
+            </a:r>
+          </a:p>
+        </p:txBody>
+      </p:sp>
+    </p:spTree>
+  </p:cSld>
+  <p:clrMapOvr>
+    <a:masterClrMapping/>
+  </p:clrMapOvr>
+</p:sld>
+</file>
+
+<file path=ppt/slides/slide19.xml><?xml version="1.0" encoding="utf-8"?>
+<p:sld xmlns:a="http://schemas.openxmlformats.org/drawingml/2006/main" xmlns:p="http://schemas.openxmlformats.org/presentationml/2006/main" xmlns:r="http://schemas.openxmlformats.org/officeDocument/2006/relationships">
+  <p:cSld>
+    <p:bg>
+      <p:bgPr>
+        <a:solidFill>
+          <a:srgbClr val="000000"/>
+        </a:solidFill>
+        <a:effectLst/>
+      </p:bgPr>
+    </p:bg>
+    <p:spTree>
+      <p:nvGrpSpPr>
+        <p:cNvPr id="1" name=""/>
+        <p:cNvGrpSpPr/>
+        <p:nvPr/>
+      </p:nvGrpSpPr>
+      <p:grpSpPr/>
+      <p:sp>
+        <p:nvSpPr>
+          <p:cNvPr id="2" name="TextBox 1"/>
+          <p:cNvSpPr txBox="1"/>
+          <p:nvPr/>
+        </p:nvSpPr>
+        <p:spPr>
+          <a:xfrm>
+            <a:off x="952500" y="762000"/>
+            <a:ext cx="16383000" cy="3048000"/>
+          </a:xfrm>
+          <a:prstGeom prst="rect">
+            <a:avLst/>
+          </a:prstGeom>
+          <a:noFill/>
+        </p:spPr>
+        <p:txBody>
+          <a:bodyPr wrap="square" lIns="0" rIns="0" tIns="0" bIns="0">
+            <a:spAutoFit/>
+          </a:bodyPr>
+          <a:lstStyle/>
+          <a:p>
+            <a:pPr algn="ctr"/>
+            <a:r>
+              <a:rPr sz="5000" b="0" i="0" kern="0" spc="0">
+                <a:solidFill>
+                  <a:srgbClr val="FFFFFF"/>
+                </a:solidFill>
+                <a:latin typeface="Instrument Serif"/>
+              </a:rPr>
+              <a:t>CUANDO HAY UN ADULTO MAYOR EN EL HOGAR, EL CUIDADO RECAE SOBRE UNA SOLA PERSONA. </a:t>
+            </a:r>
+            <a:r>
+              <a:rPr sz="5000" b="0" i="1" kern="0" spc="0">
+                <a:solidFill>
+                  <a:srgbClr val="FFFFFF"/>
+                </a:solidFill>
+                <a:latin typeface="Instrument Serif"/>
+              </a:rPr>
+              <a:t>12.8% RESPONDE “YO MISMO/A” — DIEZ VECES MÁS QUE EL CUIDADOR CONTRATADO.</a:t>
+            </a:r>
+          </a:p>
+        </p:txBody>
+      </p:sp>
+      <p:sp>
+        <p:nvSpPr>
+          <p:cNvPr id="3" name="Rectangle 2"/>
+          <p:cNvSpPr/>
+          <p:nvPr/>
+        </p:nvSpPr>
+        <p:spPr>
+          <a:xfrm>
+            <a:off x="9134475" y="4381500"/>
+            <a:ext cx="19050" cy="2647950"/>
+          </a:xfrm>
+          <a:prstGeom prst="rect">
+            <a:avLst/>
+          </a:prstGeom>
+          <a:solidFill>
+            <a:srgbClr val="2E2E2E"/>
+          </a:solidFill>
+          <a:ln>
+            <a:noFill/>
+          </a:ln>
+        </p:spPr>
+        <p:style>
+          <a:lnRef idx="1">
+            <a:schemeClr val="accent1"/>
+          </a:lnRef>
+          <a:fillRef idx="3">
+            <a:schemeClr val="accent1"/>
+          </a:fillRef>
+          <a:effectRef idx="2">
+            <a:schemeClr val="accent1"/>
+          </a:effectRef>
+          <a:fontRef idx="minor">
+            <a:schemeClr val="lt1"/>
+          </a:fontRef>
+        </p:style>
+        <p:txBody>
+          <a:bodyPr rtlCol="0" anchor="ctr"/>
+          <a:lstStyle/>
+          <a:p>
+            <a:pPr algn="ctr"/>
+          </a:p>
+        </p:txBody>
+      </p:sp>
+      <p:sp>
+        <p:nvSpPr>
+          <p:cNvPr id="4" name="TextBox 3"/>
+          <p:cNvSpPr txBox="1"/>
+          <p:nvPr/>
+        </p:nvSpPr>
+        <p:spPr>
+          <a:xfrm>
+            <a:off x="1905000" y="4572000"/>
+            <a:ext cx="8382000" cy="1905000"/>
+          </a:xfrm>
+          <a:prstGeom prst="rect">
+            <a:avLst/>
+          </a:prstGeom>
+          <a:noFill/>
+        </p:spPr>
+        <p:txBody>
+          <a:bodyPr wrap="square" lIns="0" rIns="0" tIns="0" bIns="0">
+            <a:spAutoFit/>
+          </a:bodyPr>
+          <a:lstStyle/>
+          <a:p>
+            <a:pPr algn="ctr"/>
+            <a:r>
+              <a:rPr sz="13500" b="0" i="1" kern="0" spc="0">
+                <a:solidFill>
+                  <a:srgbClr val="FFFFFF"/>
+                </a:solidFill>
+                <a:latin typeface="Instrument Serif"/>
+              </a:rPr>
+              <a:t>13%</a:t>
+            </a:r>
+          </a:p>
+        </p:txBody>
+      </p:sp>
+      <p:sp>
+        <p:nvSpPr>
+          <p:cNvPr id="5" name="TextBox 4"/>
+          <p:cNvSpPr txBox="1"/>
+          <p:nvPr/>
+        </p:nvSpPr>
+        <p:spPr>
+          <a:xfrm>
+            <a:off x="1905000" y="6667500"/>
+            <a:ext cx="8382000" cy="1714500"/>
+          </a:xfrm>
+          <a:prstGeom prst="rect">
+            <a:avLst/>
+          </a:prstGeom>
+          <a:noFill/>
+        </p:spPr>
+        <p:txBody>
+          <a:bodyPr wrap="square" lIns="0" rIns="0" tIns="0" bIns="0">
+            <a:spAutoFit/>
+          </a:bodyPr>
+          <a:lstStyle/>
+          <a:p>
+            <a:pPr algn="ctr"/>
+            <a:r>
+              <a:rPr sz="1600" b="0" i="0" kern="0" spc="0">
+                <a:solidFill>
+                  <a:srgbClr val="FFFFFF"/>
+                </a:solidFill>
+                <a:latin typeface="Poppins"/>
+              </a:rPr>
+              <a:t>responde "</a:t>
+            </a:r>
+            <a:r>
+              <a:rPr sz="1600" b="1" i="0" kern="0" spc="0">
+                <a:solidFill>
+                  <a:srgbClr val="FFFFFF"/>
+                </a:solidFill>
+                <a:latin typeface="Poppins"/>
+              </a:rPr>
+              <a:t>yo mismo/a</a:t>
+            </a:r>
+            <a:r>
+              <a:rPr sz="1600" b="0" i="0" kern="0" spc="0">
+                <a:solidFill>
+                  <a:srgbClr val="FFFFFF"/>
+                </a:solidFill>
+                <a:latin typeface="Poppins"/>
+              </a:rPr>
+              <a:t>" al cuidado del adulto mayor en el hogar, frente a 2.0% que lo comparte entre varios y 0.6% que contrata un cuidador. El cuidado no se distribuye: se individualiza. Q68, Base 500.</a:t>
+            </a:r>
+          </a:p>
+        </p:txBody>
+      </p:sp>
+      <p:sp>
+        <p:nvSpPr>
+          <p:cNvPr id="6" name="TextBox 5"/>
+          <p:cNvSpPr txBox="1"/>
+          <p:nvPr/>
+        </p:nvSpPr>
+        <p:spPr>
+          <a:xfrm>
+            <a:off x="8001000" y="4572000"/>
+            <a:ext cx="8382000" cy="1905000"/>
+          </a:xfrm>
+          <a:prstGeom prst="rect">
+            <a:avLst/>
+          </a:prstGeom>
+          <a:noFill/>
+        </p:spPr>
+        <p:txBody>
+          <a:bodyPr wrap="square" lIns="0" rIns="0" tIns="0" bIns="0">
+            <a:spAutoFit/>
+          </a:bodyPr>
+          <a:lstStyle/>
+          <a:p>
+            <a:pPr algn="ctr"/>
+            <a:r>
+              <a:rPr sz="13500" b="0" i="1" kern="0" spc="0">
+                <a:solidFill>
+                  <a:srgbClr val="FFFFFF"/>
+                </a:solidFill>
+                <a:latin typeface="Instrument Serif"/>
+              </a:rPr>
+              <a:t>73%</a:t>
+            </a:r>
+          </a:p>
+        </p:txBody>
+      </p:sp>
+      <p:sp>
+        <p:nvSpPr>
+          <p:cNvPr id="7" name="TextBox 6"/>
+          <p:cNvSpPr txBox="1"/>
+          <p:nvPr/>
+        </p:nvSpPr>
+        <p:spPr>
+          <a:xfrm>
+            <a:off x="8001000" y="6667500"/>
+            <a:ext cx="8382000" cy="1714500"/>
+          </a:xfrm>
+          <a:prstGeom prst="rect">
+            <a:avLst/>
+          </a:prstGeom>
+          <a:noFill/>
+        </p:spPr>
+        <p:txBody>
+          <a:bodyPr wrap="square" lIns="0" rIns="0" tIns="0" bIns="0">
+            <a:spAutoFit/>
+          </a:bodyPr>
+          <a:lstStyle/>
+          <a:p>
+            <a:pPr algn="ctr"/>
+            <a:r>
+              <a:rPr sz="1600" b="0" i="0" kern="0" spc="0">
+                <a:solidFill>
+                  <a:srgbClr val="FFFFFF"/>
+                </a:solidFill>
+                <a:latin typeface="Poppins"/>
+              </a:rPr>
+              <a:t>no convive con ninguna </a:t>
+            </a:r>
+            <a:r>
+              <a:rPr sz="1600" b="1" i="0" kern="0" spc="0">
+                <a:solidFill>
+                  <a:srgbClr val="FFFFFF"/>
+                </a:solidFill>
+                <a:latin typeface="Poppins"/>
+              </a:rPr>
+              <a:t>persona mayor</a:t>
+            </a:r>
+            <a:r>
+              <a:rPr sz="1600" b="0" i="0" kern="0" spc="0">
+                <a:solidFill>
+                  <a:srgbClr val="FFFFFF"/>
+                </a:solidFill>
+                <a:latin typeface="Poppins"/>
+              </a:rPr>
+              <a:t>. La convivencia con adulto mayor se concentra en hogares extendidos (44.4%) y en mayores de 55 (52.9% sí conviven). Q68 × tipología y edad.</a:t>
             </a:r>
           </a:p>
         </p:txBody>
@@ -5572,7 +5528,7 @@
           <a:p>
             <a:pPr algn="ctr"/>
             <a:r>
-              <a:rPr sz="1200" b="0" i="0" kern="0" spc="0">
+              <a:rPr sz="1400" b="0" i="0" kern="0" spc="0">
                 <a:solidFill>
                   <a:srgbClr val="9B9B9B"/>
                 </a:solidFill>
@@ -5585,24 +5541,160 @@
       </p:sp>
       <p:sp>
         <p:nvSpPr>
-          <p:cNvPr id="3" name="Rounded Rectangle 2"/>
+          <p:cNvPr id="3" name="TextBox 2"/>
+          <p:cNvSpPr txBox="1"/>
+          <p:nvPr/>
+        </p:nvSpPr>
+        <p:spPr>
+          <a:xfrm>
+            <a:off x="1343025" y="3143250"/>
+            <a:ext cx="15592425" cy="4286250"/>
+          </a:xfrm>
+          <a:prstGeom prst="rect">
+            <a:avLst/>
+          </a:prstGeom>
+          <a:noFill/>
+        </p:spPr>
+        <p:txBody>
+          <a:bodyPr wrap="square" lIns="0" rIns="0" tIns="0" bIns="0">
+            <a:spAutoFit/>
+          </a:bodyPr>
+          <a:lstStyle/>
+          <a:p>
+            <a:pPr algn="ctr"/>
+            <a:r>
+              <a:rPr sz="6000" i="0" b="0" kern="0" spc="0">
+                <a:solidFill>
+                  <a:srgbClr val="FFFFFF"/>
+                </a:solidFill>
+                <a:latin typeface="Instrument Serif"/>
+              </a:rPr>
+              <a:t>«Aquí para tú adoptar, uno de los requisitos es que tú tienes que estar casado y el matrimonio en nuestro país es entre un hombre y una mujer (...) por lo cual nosotros ninguno podemos adoptar.»</a:t>
+            </a:r>
+          </a:p>
+        </p:txBody>
+      </p:sp>
+      <p:sp>
+        <p:nvSpPr>
+          <p:cNvPr id="4" name="TextBox 3"/>
+          <p:cNvSpPr txBox="1"/>
+          <p:nvPr/>
+        </p:nvSpPr>
+        <p:spPr>
+          <a:xfrm>
+            <a:off x="0" y="6000750"/>
+            <a:ext cx="18288000" cy="571500"/>
+          </a:xfrm>
+          <a:prstGeom prst="rect">
+            <a:avLst/>
+          </a:prstGeom>
+          <a:noFill/>
+        </p:spPr>
+        <p:txBody>
+          <a:bodyPr wrap="square" lIns="0" rIns="0" tIns="0" bIns="0">
+            <a:spAutoFit/>
+          </a:bodyPr>
+          <a:lstStyle/>
+          <a:p>
+            <a:pPr algn="ctr"/>
+            <a:r>
+              <a:rPr sz="2000" b="0" i="1" kern="0" spc="0">
+                <a:solidFill>
+                  <a:srgbClr val="FFFFFF"/>
+                </a:solidFill>
+                <a:latin typeface="Poppins"/>
+              </a:rPr>
+              <a:t>— Familia Homoparental</a:t>
+            </a:r>
+          </a:p>
+        </p:txBody>
+      </p:sp>
+    </p:spTree>
+  </p:cSld>
+  <p:clrMapOvr>
+    <a:masterClrMapping/>
+  </p:clrMapOvr>
+</p:sld>
+</file>
+
+<file path=ppt/slides/slide20.xml><?xml version="1.0" encoding="utf-8"?>
+<p:sld xmlns:a="http://schemas.openxmlformats.org/drawingml/2006/main" xmlns:p="http://schemas.openxmlformats.org/presentationml/2006/main" xmlns:r="http://schemas.openxmlformats.org/officeDocument/2006/relationships">
+  <p:cSld>
+    <p:bg>
+      <p:bgPr>
+        <a:solidFill>
+          <a:srgbClr val="000000"/>
+        </a:solidFill>
+        <a:effectLst/>
+      </p:bgPr>
+    </p:bg>
+    <p:spTree>
+      <p:nvGrpSpPr>
+        <p:cNvPr id="1" name=""/>
+        <p:cNvGrpSpPr/>
+        <p:nvPr/>
+      </p:nvGrpSpPr>
+      <p:grpSpPr/>
+      <p:sp>
+        <p:nvSpPr>
+          <p:cNvPr id="2" name="TextBox 1"/>
+          <p:cNvSpPr txBox="1"/>
+          <p:nvPr/>
+        </p:nvSpPr>
+        <p:spPr>
+          <a:xfrm>
+            <a:off x="952500" y="762000"/>
+            <a:ext cx="16383000" cy="3048000"/>
+          </a:xfrm>
+          <a:prstGeom prst="rect">
+            <a:avLst/>
+          </a:prstGeom>
+          <a:noFill/>
+        </p:spPr>
+        <p:txBody>
+          <a:bodyPr wrap="square" lIns="0" rIns="0" tIns="0" bIns="0">
+            <a:spAutoFit/>
+          </a:bodyPr>
+          <a:lstStyle/>
+          <a:p>
+            <a:pPr algn="ctr"/>
+            <a:r>
+              <a:rPr sz="5000" b="0" i="0" kern="0" spc="0">
+                <a:solidFill>
+                  <a:srgbClr val="FFFFFF"/>
+                </a:solidFill>
+                <a:latin typeface="Instrument Serif"/>
+              </a:rPr>
+              <a:t>73.8% PIDE PENSIONES PARA QUE LOS MAYORES VIVAN CON DIGNIDAD. </a:t>
+            </a:r>
+            <a:r>
+              <a:rPr sz="5000" b="0" i="1" kern="0" spc="0">
+                <a:solidFill>
+                  <a:srgbClr val="FFFFFF"/>
+                </a:solidFill>
+                <a:latin typeface="Instrument Serif"/>
+              </a:rPr>
+              <a:t>EL RESPETO Y LA COMPAÑÍA LLEGAN DESPUÉS. LO PRIMERO SIEMPRE ES LA PLATA.</a:t>
+            </a:r>
+          </a:p>
+        </p:txBody>
+      </p:sp>
+      <p:sp>
+        <p:nvSpPr>
+          <p:cNvPr id="3" name="Rectangle 2"/>
           <p:cNvSpPr/>
           <p:nvPr/>
         </p:nvSpPr>
         <p:spPr>
           <a:xfrm>
-            <a:off x="1343025" y="2095500"/>
-            <a:ext cx="15592425" cy="4619625"/>
-          </a:xfrm>
-          <a:prstGeom prst="roundRect">
-            <a:avLst>
-              <a:gd name="adj" fmla="val 5000"/>
-            </a:avLst>
+            <a:off x="9134475" y="4381500"/>
+            <a:ext cx="19050" cy="2647950"/>
+          </a:xfrm>
+          <a:prstGeom prst="rect">
+            <a:avLst/>
           </a:prstGeom>
           <a:solidFill>
-            <a:srgbClr val="000000">
-              <a:alpha val="45000"/>
-            </a:srgbClr>
+            <a:srgbClr val="2E2E2E"/>
           </a:solidFill>
           <a:ln>
             <a:noFill/>
@@ -5638,45 +5730,170 @@
         </p:nvSpPr>
         <p:spPr>
           <a:xfrm>
-            <a:off x="2105025" y="2667000"/>
-            <a:ext cx="14068425" cy="3476625"/>
-          </a:xfrm>
-          <a:prstGeom prst="rect">
-            <a:avLst/>
-          </a:prstGeom>
-          <a:noFill/>
-        </p:spPr>
-        <p:txBody>
-          <a:bodyPr wrap="square" lIns="0" rIns="0" tIns="0" bIns="0">
-            <a:spAutoFit/>
-          </a:bodyPr>
-          <a:lstStyle/>
-          <a:p>
-            <a:pPr algn="ctr"/>
-            <a:r>
-              <a:rPr sz="3750" i="0" b="0" kern="0" spc="0">
+            <a:off x="1905000" y="4572000"/>
+            <a:ext cx="8382000" cy="1905000"/>
+          </a:xfrm>
+          <a:prstGeom prst="rect">
+            <a:avLst/>
+          </a:prstGeom>
+          <a:noFill/>
+        </p:spPr>
+        <p:txBody>
+          <a:bodyPr wrap="square" lIns="0" rIns="0" tIns="0" bIns="0">
+            <a:spAutoFit/>
+          </a:bodyPr>
+          <a:lstStyle/>
+          <a:p>
+            <a:pPr algn="ctr"/>
+            <a:r>
+              <a:rPr sz="13500" b="0" i="1" kern="0" spc="0">
                 <a:solidFill>
                   <a:srgbClr val="FFFFFF"/>
                 </a:solidFill>
                 <a:latin typeface="Instrument Serif"/>
               </a:rPr>
-              <a:t>«Aquí usted no tiene familia, usted vive y convive con un amiguito o una amiguita. Jurídicamente eso no existe. Tú no existes para nada. Tú tienes un problema de violencia de género en personas del mismo sexo que viven juntas, y eso se califica como una riña, no como violencia de género.»</a:t>
-            </a:r>
-          </a:p>
-          <a:p>
-            <a:pPr algn="ctr">
-              <a:spcBef>
-                <a:spcPts val="1000"/>
-              </a:spcBef>
-            </a:pPr>
-            <a:r>
-              <a:rPr sz="1650" i="1" b="0" kern="0" spc="0">
-                <a:solidFill>
-                  <a:srgbClr val="FFFFFF"/>
-                </a:solidFill>
-                <a:latin typeface="Poppins"/>
-              </a:rPr>
-              <a:t>— Familia Homoparental</a:t>
+              <a:t>74%</a:t>
+            </a:r>
+          </a:p>
+        </p:txBody>
+      </p:sp>
+      <p:sp>
+        <p:nvSpPr>
+          <p:cNvPr id="5" name="TextBox 4"/>
+          <p:cNvSpPr txBox="1"/>
+          <p:nvPr/>
+        </p:nvSpPr>
+        <p:spPr>
+          <a:xfrm>
+            <a:off x="1905000" y="6667500"/>
+            <a:ext cx="8382000" cy="1714500"/>
+          </a:xfrm>
+          <a:prstGeom prst="rect">
+            <a:avLst/>
+          </a:prstGeom>
+          <a:noFill/>
+        </p:spPr>
+        <p:txBody>
+          <a:bodyPr wrap="square" lIns="0" rIns="0" tIns="0" bIns="0">
+            <a:spAutoFit/>
+          </a:bodyPr>
+          <a:lstStyle/>
+          <a:p>
+            <a:pPr algn="ctr"/>
+            <a:r>
+              <a:rPr sz="1600" b="0" i="0" kern="0" spc="0">
+                <a:solidFill>
+                  <a:srgbClr val="FFFFFF"/>
+                </a:solidFill>
+                <a:latin typeface="Poppins"/>
+              </a:rPr>
+              <a:t>menciona </a:t>
+            </a:r>
+            <a:r>
+              <a:rPr sz="1600" b="1" i="0" kern="0" spc="0">
+                <a:solidFill>
+                  <a:srgbClr val="FFFFFF"/>
+                </a:solidFill>
+                <a:latin typeface="Poppins"/>
+              </a:rPr>
+              <a:t>pensiones o apoyos económicos suficientes</a:t>
+            </a:r>
+            <a:r>
+              <a:rPr sz="1600" b="0" i="0" kern="0" spc="0">
+                <a:solidFill>
+                  <a:srgbClr val="FFFFFF"/>
+                </a:solidFill>
+                <a:latin typeface="Poppins"/>
+              </a:rPr>
+              <a:t> como lo que más falta para que la tercera edad viva con dignidad. Le sigue acceso a salud (53.4%). El respeto y reconocimiento familiar queda en 32.4%. Q69, Base 500.</a:t>
+            </a:r>
+          </a:p>
+        </p:txBody>
+      </p:sp>
+      <p:sp>
+        <p:nvSpPr>
+          <p:cNvPr id="6" name="TextBox 5"/>
+          <p:cNvSpPr txBox="1"/>
+          <p:nvPr/>
+        </p:nvSpPr>
+        <p:spPr>
+          <a:xfrm>
+            <a:off x="8001000" y="4572000"/>
+            <a:ext cx="8382000" cy="1905000"/>
+          </a:xfrm>
+          <a:prstGeom prst="rect">
+            <a:avLst/>
+          </a:prstGeom>
+          <a:noFill/>
+        </p:spPr>
+        <p:txBody>
+          <a:bodyPr wrap="square" lIns="0" rIns="0" tIns="0" bIns="0">
+            <a:spAutoFit/>
+          </a:bodyPr>
+          <a:lstStyle/>
+          <a:p>
+            <a:pPr algn="ctr"/>
+            <a:r>
+              <a:rPr sz="13500" b="0" i="1" kern="0" spc="0">
+                <a:solidFill>
+                  <a:srgbClr val="FFFFFF"/>
+                </a:solidFill>
+                <a:latin typeface="Instrument Serif"/>
+              </a:rPr>
+              <a:t>53%</a:t>
+            </a:r>
+          </a:p>
+        </p:txBody>
+      </p:sp>
+      <p:sp>
+        <p:nvSpPr>
+          <p:cNvPr id="7" name="TextBox 6"/>
+          <p:cNvSpPr txBox="1"/>
+          <p:nvPr/>
+        </p:nvSpPr>
+        <p:spPr>
+          <a:xfrm>
+            <a:off x="8001000" y="6667500"/>
+            <a:ext cx="8382000" cy="1714500"/>
+          </a:xfrm>
+          <a:prstGeom prst="rect">
+            <a:avLst/>
+          </a:prstGeom>
+          <a:noFill/>
+        </p:spPr>
+        <p:txBody>
+          <a:bodyPr wrap="square" lIns="0" rIns="0" tIns="0" bIns="0">
+            <a:spAutoFit/>
+          </a:bodyPr>
+          <a:lstStyle/>
+          <a:p>
+            <a:pPr algn="ctr"/>
+            <a:r>
+              <a:rPr sz="1600" b="0" i="0" kern="0" spc="0">
+                <a:solidFill>
+                  <a:srgbClr val="FFFFFF"/>
+                </a:solidFill>
+                <a:latin typeface="Poppins"/>
+              </a:rPr>
+              <a:t>menciona </a:t>
+            </a:r>
+            <a:r>
+              <a:rPr sz="1600" b="1" i="0" kern="0" spc="0">
+                <a:solidFill>
+                  <a:srgbClr val="FFFFFF"/>
+                </a:solidFill>
+                <a:latin typeface="Poppins"/>
+              </a:rPr>
+              <a:t>acceso gratuito o asequible a salud</a:t>
+            </a:r>
+            <a:r>
+              <a:rPr sz="1600" b="0" i="0" kern="0" spc="0">
+                <a:solidFill>
+                  <a:srgbClr val="FFFFFF"/>
+                </a:solidFill>
+                <a:latin typeface="Poppins"/>
+              </a:rPr>
+              <a:t> como segunda prioridad. La prioridad de pensiones es transversal: de 70.6% en NSE C a 83.3% en C+; de 65.5% en 18–24 a 79.0% en 55+. Ningún segmento la desplaza del primer lugar.</a:t>
             </a:r>
           </a:p>
         </p:txBody>
@@ -5715,74 +5932,88 @@
         </p:nvSpPr>
         <p:spPr>
           <a:xfrm>
-            <a:off x="952500" y="952500"/>
-            <a:ext cx="16383000" cy="2857500"/>
-          </a:xfrm>
-          <a:prstGeom prst="rect">
-            <a:avLst/>
-          </a:prstGeom>
-          <a:noFill/>
-        </p:spPr>
-        <p:txBody>
-          <a:bodyPr wrap="square" lIns="0" rIns="0" tIns="0" bIns="0">
-            <a:spAutoFit/>
-          </a:bodyPr>
-          <a:lstStyle/>
-          <a:p>
-            <a:pPr algn="ctr"/>
-            <a:r>
-              <a:rPr sz="3150" b="0" i="0" kern="0" spc="0">
+            <a:off x="952500" y="762000"/>
+            <a:ext cx="16383000" cy="3048000"/>
+          </a:xfrm>
+          <a:prstGeom prst="rect">
+            <a:avLst/>
+          </a:prstGeom>
+          <a:noFill/>
+        </p:spPr>
+        <p:txBody>
+          <a:bodyPr wrap="square" lIns="0" rIns="0" tIns="0" bIns="0">
+            <a:spAutoFit/>
+          </a:bodyPr>
+          <a:lstStyle/>
+          <a:p>
+            <a:pPr algn="ctr"/>
+            <a:r>
+              <a:rPr sz="5000" b="0" i="0" kern="0" spc="0">
                 <a:solidFill>
                   <a:srgbClr val="FFFFFF"/>
                 </a:solidFill>
                 <a:latin typeface="Instrument Serif"/>
               </a:rPr>
-              <a:t>EL LÍMITE DEL RESPETO DOMINICANO SIEMPRE ES EL MISMO: LOS NIÑOS. </a:t>
-            </a:r>
-            <a:r>
-              <a:rPr sz="3150" b="0" i="1" kern="0" spc="0">
+              <a:t>LA ACEPTACIÓN DE FAMILIAS DEL MISMO SEXO SIEMPRE LLEGA CON UN ‘PERO’. </a:t>
+            </a:r>
+            <a:r>
+              <a:rPr sz="5000" b="0" i="1" kern="0" spc="0">
                 <a:solidFill>
                   <a:srgbClr val="FFFFFF"/>
                 </a:solidFill>
                 <a:latin typeface="Instrument Serif"/>
               </a:rPr>
-              <a:t>HAY QUIENES SON PARTE DE UNA PAREJA DEL MISMO SEXO Y AUN ASÍ DICEN QUE ESE NO ES UN AMBIENTE PARA UN HIJO.</a:t>
-            </a:r>
-          </a:p>
-        </p:txBody>
-      </p:sp>
-      <p:sp>
-        <p:nvSpPr>
-          <p:cNvPr id="3" name="TextBox 2"/>
-          <p:cNvSpPr txBox="1"/>
-          <p:nvPr/>
-        </p:nvSpPr>
-        <p:spPr>
-          <a:xfrm>
-            <a:off x="5229225" y="4762500"/>
-            <a:ext cx="7829550" cy="1905000"/>
-          </a:xfrm>
-          <a:prstGeom prst="rect">
-            <a:avLst/>
-          </a:prstGeom>
-          <a:noFill/>
-        </p:spPr>
-        <p:txBody>
-          <a:bodyPr wrap="square" lIns="0" rIns="0" tIns="0" bIns="0">
-            <a:spAutoFit/>
-          </a:bodyPr>
-          <a:lstStyle/>
-          <a:p>
-            <a:pPr algn="ctr"/>
-            <a:r>
-              <a:rPr sz="13500" b="0" i="1" kern="0" spc="0">
-                <a:solidFill>
-                  <a:srgbClr val="FFFFFF"/>
-                </a:solidFill>
-                <a:latin typeface="Instrument Serif"/>
-              </a:rPr>
-              <a:t>60%</a:t>
-            </a:r>
+              <a:t>SE RESPETA LA PAREJA. SE DUDA DEL HIJO.</a:t>
+            </a:r>
+          </a:p>
+        </p:txBody>
+      </p:sp>
+      <p:sp>
+        <p:nvSpPr>
+          <p:cNvPr id="3" name="Rounded Rectangle 2"/>
+          <p:cNvSpPr/>
+          <p:nvPr/>
+        </p:nvSpPr>
+        <p:spPr>
+          <a:xfrm>
+            <a:off x="3533775" y="4086225"/>
+            <a:ext cx="5229225" cy="2105025"/>
+          </a:xfrm>
+          <a:prstGeom prst="roundRect">
+            <a:avLst>
+              <a:gd name="adj" fmla="val 5000"/>
+            </a:avLst>
+          </a:prstGeom>
+          <a:solidFill>
+            <a:srgbClr val="000000">
+              <a:alpha val="45000"/>
+            </a:srgbClr>
+          </a:solidFill>
+          <a:ln w="12700">
+            <a:solidFill>
+              <a:srgbClr val="FFFFFF"/>
+            </a:solidFill>
+          </a:ln>
+        </p:spPr>
+        <p:style>
+          <a:lnRef idx="1">
+            <a:schemeClr val="accent1"/>
+          </a:lnRef>
+          <a:fillRef idx="3">
+            <a:schemeClr val="accent1"/>
+          </a:fillRef>
+          <a:effectRef idx="2">
+            <a:schemeClr val="accent1"/>
+          </a:effectRef>
+          <a:fontRef idx="minor">
+            <a:schemeClr val="lt1"/>
+          </a:fontRef>
+        </p:style>
+        <p:txBody>
+          <a:bodyPr rtlCol="0" anchor="ctr"/>
+          <a:lstStyle/>
+          <a:p>
+            <a:pPr algn="ctr"/>
           </a:p>
         </p:txBody>
       </p:sp>
@@ -5794,82 +6025,145 @@
         </p:nvSpPr>
         <p:spPr>
           <a:xfrm>
-            <a:off x="5229225" y="6858000"/>
-            <a:ext cx="7829550" cy="1714500"/>
-          </a:xfrm>
-          <a:prstGeom prst="rect">
-            <a:avLst/>
-          </a:prstGeom>
-          <a:noFill/>
-        </p:spPr>
-        <p:txBody>
-          <a:bodyPr wrap="square" lIns="0" rIns="0" tIns="0" bIns="0">
-            <a:spAutoFit/>
-          </a:bodyPr>
-          <a:lstStyle/>
-          <a:p>
-            <a:pPr algn="ctr"/>
-            <a:r>
-              <a:rPr sz="1650" b="0" i="0" kern="0" spc="0">
-                <a:solidFill>
-                  <a:srgbClr val="FFFFFF"/>
-                </a:solidFill>
-                <a:latin typeface="Poppins"/>
-              </a:rPr>
-              <a:t>está en desacuerdo con que una pareja del mismo sexo sea reconocida legalmente como </a:t>
-            </a:r>
-            <a:r>
-              <a:rPr sz="1650" b="1" i="0" kern="0" spc="0">
-                <a:solidFill>
-                  <a:srgbClr val="FFFFFF"/>
-                </a:solidFill>
-                <a:latin typeface="Poppins"/>
-              </a:rPr>
-              <a:t>padres o madres</a:t>
-            </a:r>
-            <a:r>
-              <a:rPr sz="1650" b="0" i="0" kern="0" spc="0">
-                <a:solidFill>
-                  <a:srgbClr val="FFFFFF"/>
-                </a:solidFill>
-                <a:latin typeface="Poppins"/>
-              </a:rPr>
-              <a:t> de un mismo hijo. Ítem Q55 reconocimiento legal parentalidad.</a:t>
-            </a:r>
-          </a:p>
-        </p:txBody>
-      </p:sp>
-      <p:sp>
-        <p:nvSpPr>
-          <p:cNvPr id="5" name="TextBox 4"/>
-          <p:cNvSpPr txBox="1"/>
-          <p:nvPr/>
-        </p:nvSpPr>
-        <p:spPr>
-          <a:xfrm>
-            <a:off x="0" y="9429750"/>
-            <a:ext cx="18288000" cy="476250"/>
-          </a:xfrm>
-          <a:prstGeom prst="rect">
-            <a:avLst/>
-          </a:prstGeom>
-          <a:noFill/>
-        </p:spPr>
-        <p:txBody>
-          <a:bodyPr wrap="square" lIns="0" rIns="0" tIns="0" bIns="0">
-            <a:spAutoFit/>
-          </a:bodyPr>
-          <a:lstStyle/>
-          <a:p>
-            <a:pPr algn="ctr"/>
-            <a:r>
-              <a:rPr sz="1200" b="0" i="1" kern="0" spc="0">
-                <a:solidFill>
-                  <a:srgbClr val="9B9B9B"/>
-                </a:solidFill>
-                <a:latin typeface="Poppins"/>
-              </a:rPr>
-              <a:t>Source: Código Casa — Estudio cuantitativo + cualitativo 2025 · Q55, Q56 · Base 500.</a:t>
+            <a:off x="3819525" y="4324350"/>
+            <a:ext cx="4657725" cy="1628775"/>
+          </a:xfrm>
+          <a:prstGeom prst="rect">
+            <a:avLst/>
+          </a:prstGeom>
+          <a:noFill/>
+        </p:spPr>
+        <p:txBody>
+          <a:bodyPr wrap="square" lIns="0" rIns="0" tIns="0" bIns="0">
+            <a:spAutoFit/>
+          </a:bodyPr>
+          <a:lstStyle/>
+          <a:p>
+            <a:pPr algn="ctr"/>
+            <a:r>
+              <a:rPr sz="1500" i="0" b="0" kern="0" spc="0">
+                <a:solidFill>
+                  <a:srgbClr val="FFFFFF"/>
+                </a:solidFill>
+                <a:latin typeface="Poppins"/>
+              </a:rPr>
+              <a:t>«Respeto su decisión pero no la comparto. Últimamente se está viviendo en una época moderna en la cual quieren imponer eso (...) hacerlo como normal, algo que no es normal, porque (...) la palabra de Dios dice que hombre y mujer, no las dos personas del mismo sexo.»</a:t>
+            </a:r>
+          </a:p>
+          <a:p>
+            <a:pPr algn="ctr">
+              <a:spcBef>
+                <a:spcPts val="800"/>
+              </a:spcBef>
+            </a:pPr>
+            <a:r>
+              <a:rPr sz="1200" i="1" b="0" kern="0" spc="0">
+                <a:solidFill>
+                  <a:srgbClr val="FFFFFF"/>
+                </a:solidFill>
+                <a:latin typeface="Poppins"/>
+              </a:rPr>
+              <a:t>— Familia Monoparental</a:t>
+            </a:r>
+          </a:p>
+        </p:txBody>
+      </p:sp>
+      <p:sp>
+        <p:nvSpPr>
+          <p:cNvPr id="5" name="Rounded Rectangle 4"/>
+          <p:cNvSpPr/>
+          <p:nvPr/>
+        </p:nvSpPr>
+        <p:spPr>
+          <a:xfrm>
+            <a:off x="9525000" y="4086225"/>
+            <a:ext cx="5229225" cy="2105025"/>
+          </a:xfrm>
+          <a:prstGeom prst="roundRect">
+            <a:avLst>
+              <a:gd name="adj" fmla="val 5000"/>
+            </a:avLst>
+          </a:prstGeom>
+          <a:solidFill>
+            <a:srgbClr val="000000">
+              <a:alpha val="45000"/>
+            </a:srgbClr>
+          </a:solidFill>
+          <a:ln w="12700">
+            <a:solidFill>
+              <a:srgbClr val="FFFFFF"/>
+            </a:solidFill>
+          </a:ln>
+        </p:spPr>
+        <p:style>
+          <a:lnRef idx="1">
+            <a:schemeClr val="accent1"/>
+          </a:lnRef>
+          <a:fillRef idx="3">
+            <a:schemeClr val="accent1"/>
+          </a:fillRef>
+          <a:effectRef idx="2">
+            <a:schemeClr val="accent1"/>
+          </a:effectRef>
+          <a:fontRef idx="minor">
+            <a:schemeClr val="lt1"/>
+          </a:fontRef>
+        </p:style>
+        <p:txBody>
+          <a:bodyPr rtlCol="0" anchor="ctr"/>
+          <a:lstStyle/>
+          <a:p>
+            <a:pPr algn="ctr"/>
+          </a:p>
+        </p:txBody>
+      </p:sp>
+      <p:sp>
+        <p:nvSpPr>
+          <p:cNvPr id="6" name="TextBox 5"/>
+          <p:cNvSpPr txBox="1"/>
+          <p:nvPr/>
+        </p:nvSpPr>
+        <p:spPr>
+          <a:xfrm>
+            <a:off x="9810750" y="4324350"/>
+            <a:ext cx="4657725" cy="1628775"/>
+          </a:xfrm>
+          <a:prstGeom prst="rect">
+            <a:avLst/>
+          </a:prstGeom>
+          <a:noFill/>
+        </p:spPr>
+        <p:txBody>
+          <a:bodyPr wrap="square" lIns="0" rIns="0" tIns="0" bIns="0">
+            <a:spAutoFit/>
+          </a:bodyPr>
+          <a:lstStyle/>
+          <a:p>
+            <a:pPr algn="ctr"/>
+            <a:r>
+              <a:rPr sz="1500" i="0" b="0" kern="0" spc="0">
+                <a:solidFill>
+                  <a:srgbClr val="FFFFFF"/>
+                </a:solidFill>
+                <a:latin typeface="Poppins"/>
+              </a:rPr>
+              <a:t>«Un niño necesita tener un papá y una mamá porque dos hombres juntos o dos mujeres juntas no pueden procrear (...) yo respeto, pero esa es mi percepción muy personal.»</a:t>
+            </a:r>
+          </a:p>
+          <a:p>
+            <a:pPr algn="ctr">
+              <a:spcBef>
+                <a:spcPts val="800"/>
+              </a:spcBef>
+            </a:pPr>
+            <a:r>
+              <a:rPr sz="1200" i="1" b="0" kern="0" spc="0">
+                <a:solidFill>
+                  <a:srgbClr val="FFFFFF"/>
+                </a:solidFill>
+                <a:latin typeface="Poppins"/>
+              </a:rPr>
+              <a:t>— Familia Mixta</a:t>
             </a:r>
           </a:p>
         </p:txBody>
@@ -5908,53 +6202,58 @@
         </p:nvSpPr>
         <p:spPr>
           <a:xfrm>
-            <a:off x="0" y="762000"/>
-            <a:ext cx="18288000" cy="476250"/>
-          </a:xfrm>
-          <a:prstGeom prst="rect">
-            <a:avLst/>
-          </a:prstGeom>
-          <a:noFill/>
-        </p:spPr>
-        <p:txBody>
-          <a:bodyPr wrap="square" lIns="0" rIns="0" tIns="0" bIns="0">
-            <a:spAutoFit/>
-          </a:bodyPr>
-          <a:lstStyle/>
-          <a:p>
-            <a:pPr algn="ctr"/>
-            <a:r>
-              <a:rPr sz="1200" b="0" i="0" kern="0" spc="0">
-                <a:solidFill>
-                  <a:srgbClr val="9B9B9B"/>
-                </a:solidFill>
-                <a:latin typeface="Poppins"/>
-              </a:rPr>
-              <a:t>CONSUMER VOICE</a:t>
-            </a:r>
-          </a:p>
-        </p:txBody>
-      </p:sp>
-      <p:sp>
-        <p:nvSpPr>
-          <p:cNvPr id="3" name="Rounded Rectangle 2"/>
+            <a:off x="952500" y="762000"/>
+            <a:ext cx="16383000" cy="3048000"/>
+          </a:xfrm>
+          <a:prstGeom prst="rect">
+            <a:avLst/>
+          </a:prstGeom>
+          <a:noFill/>
+        </p:spPr>
+        <p:txBody>
+          <a:bodyPr wrap="square" lIns="0" rIns="0" tIns="0" bIns="0">
+            <a:spAutoFit/>
+          </a:bodyPr>
+          <a:lstStyle/>
+          <a:p>
+            <a:pPr algn="ctr"/>
+            <a:r>
+              <a:rPr sz="5000" b="0" i="0" kern="0" spc="0">
+                <a:solidFill>
+                  <a:srgbClr val="FFFFFF"/>
+                </a:solidFill>
+                <a:latin typeface="Instrument Serif"/>
+              </a:rPr>
+              <a:t>64% RECURRE SIEMPRE A LA FE EN MOMENTOS DE DIFICULTAD. </a:t>
+            </a:r>
+            <a:r>
+              <a:rPr sz="5000" b="0" i="1" kern="0" spc="0">
+                <a:solidFill>
+                  <a:srgbClr val="FFFFFF"/>
+                </a:solidFill>
+                <a:latin typeface="Instrument Serif"/>
+              </a:rPr>
+              <a:t>EL 64% NO ES PAREJO: SUBE A 70.8% EN MUJERES Y A 72.7% EN EL ESTRATO D.</a:t>
+            </a:r>
+          </a:p>
+        </p:txBody>
+      </p:sp>
+      <p:sp>
+        <p:nvSpPr>
+          <p:cNvPr id="3" name="Rectangle 2"/>
           <p:cNvSpPr/>
           <p:nvPr/>
         </p:nvSpPr>
         <p:spPr>
           <a:xfrm>
-            <a:off x="1343025" y="2095500"/>
-            <a:ext cx="15592425" cy="4619625"/>
-          </a:xfrm>
-          <a:prstGeom prst="roundRect">
-            <a:avLst>
-              <a:gd name="adj" fmla="val 5000"/>
-            </a:avLst>
+            <a:off x="6848475" y="4381500"/>
+            <a:ext cx="19050" cy="2647950"/>
+          </a:xfrm>
+          <a:prstGeom prst="rect">
+            <a:avLst/>
           </a:prstGeom>
           <a:solidFill>
-            <a:srgbClr val="000000">
-              <a:alpha val="45000"/>
-            </a:srgbClr>
+            <a:srgbClr val="2E2E2E"/>
           </a:solidFill>
           <a:ln>
             <a:noFill/>
@@ -5984,51 +6283,307 @@
       </p:sp>
       <p:sp>
         <p:nvSpPr>
-          <p:cNvPr id="4" name="TextBox 3"/>
-          <p:cNvSpPr txBox="1"/>
-          <p:nvPr/>
-        </p:nvSpPr>
-        <p:spPr>
-          <a:xfrm>
-            <a:off x="2105025" y="2667000"/>
-            <a:ext cx="14068425" cy="3476625"/>
-          </a:xfrm>
-          <a:prstGeom prst="rect">
-            <a:avLst/>
-          </a:prstGeom>
-          <a:noFill/>
-        </p:spPr>
-        <p:txBody>
-          <a:bodyPr wrap="square" lIns="0" rIns="0" tIns="0" bIns="0">
-            <a:spAutoFit/>
-          </a:bodyPr>
-          <a:lstStyle/>
-          <a:p>
-            <a:pPr algn="ctr"/>
-            <a:r>
-              <a:rPr sz="3750" i="0" b="0" kern="0" spc="0">
+          <p:cNvPr id="4" name="Rectangle 3"/>
+          <p:cNvSpPr/>
+          <p:nvPr/>
+        </p:nvSpPr>
+        <p:spPr>
+          <a:xfrm>
+            <a:off x="11420475" y="4381500"/>
+            <a:ext cx="19050" cy="2647950"/>
+          </a:xfrm>
+          <a:prstGeom prst="rect">
+            <a:avLst/>
+          </a:prstGeom>
+          <a:solidFill>
+            <a:srgbClr val="2E2E2E"/>
+          </a:solidFill>
+          <a:ln>
+            <a:noFill/>
+          </a:ln>
+        </p:spPr>
+        <p:style>
+          <a:lnRef idx="1">
+            <a:schemeClr val="accent1"/>
+          </a:lnRef>
+          <a:fillRef idx="3">
+            <a:schemeClr val="accent1"/>
+          </a:fillRef>
+          <a:effectRef idx="2">
+            <a:schemeClr val="accent1"/>
+          </a:effectRef>
+          <a:fontRef idx="minor">
+            <a:schemeClr val="lt1"/>
+          </a:fontRef>
+        </p:style>
+        <p:txBody>
+          <a:bodyPr rtlCol="0" anchor="ctr"/>
+          <a:lstStyle/>
+          <a:p>
+            <a:pPr algn="ctr"/>
+          </a:p>
+        </p:txBody>
+      </p:sp>
+      <p:sp>
+        <p:nvSpPr>
+          <p:cNvPr id="5" name="TextBox 4"/>
+          <p:cNvSpPr txBox="1"/>
+          <p:nvPr/>
+        </p:nvSpPr>
+        <p:spPr>
+          <a:xfrm>
+            <a:off x="1905000" y="4572000"/>
+            <a:ext cx="5334000" cy="1905000"/>
+          </a:xfrm>
+          <a:prstGeom prst="rect">
+            <a:avLst/>
+          </a:prstGeom>
+          <a:noFill/>
+        </p:spPr>
+        <p:txBody>
+          <a:bodyPr wrap="square" lIns="0" rIns="0" tIns="0" bIns="0">
+            <a:spAutoFit/>
+          </a:bodyPr>
+          <a:lstStyle/>
+          <a:p>
+            <a:pPr algn="ctr"/>
+            <a:r>
+              <a:rPr sz="13500" b="0" i="1" kern="0" spc="0">
                 <a:solidFill>
                   <a:srgbClr val="FFFFFF"/>
                 </a:solidFill>
                 <a:latin typeface="Instrument Serif"/>
               </a:rPr>
-              <a:t>«De la dos y de la cuatro, respeto su decisión pero no la comparto. Últimamente se está viviendo en una época moderna en la cual quieren imponer eso... hacerlo como normal, algo que no es normal, porque la palabra de Dios dice que hombre y mujer, no las dos personas del mismo sexo.»</a:t>
-            </a:r>
-          </a:p>
-          <a:p>
-            <a:pPr algn="ctr">
-              <a:spcBef>
-                <a:spcPts val="1000"/>
-              </a:spcBef>
-            </a:pPr>
-            <a:r>
-              <a:rPr sz="1650" i="1" b="0" kern="0" spc="0">
-                <a:solidFill>
-                  <a:srgbClr val="FFFFFF"/>
-                </a:solidFill>
-                <a:latin typeface="Poppins"/>
-              </a:rPr>
-              <a:t>— Familia Monoparental</a:t>
+              <a:t>64%</a:t>
+            </a:r>
+          </a:p>
+        </p:txBody>
+      </p:sp>
+      <p:sp>
+        <p:nvSpPr>
+          <p:cNvPr id="6" name="TextBox 5"/>
+          <p:cNvSpPr txBox="1"/>
+          <p:nvPr/>
+        </p:nvSpPr>
+        <p:spPr>
+          <a:xfrm>
+            <a:off x="1905000" y="6667500"/>
+            <a:ext cx="5334000" cy="1714500"/>
+          </a:xfrm>
+          <a:prstGeom prst="rect">
+            <a:avLst/>
+          </a:prstGeom>
+          <a:noFill/>
+        </p:spPr>
+        <p:txBody>
+          <a:bodyPr wrap="square" lIns="0" rIns="0" tIns="0" bIns="0">
+            <a:spAutoFit/>
+          </a:bodyPr>
+          <a:lstStyle/>
+          <a:p>
+            <a:pPr algn="ctr"/>
+            <a:r>
+              <a:rPr sz="1600" b="0" i="0" kern="0" spc="0">
+                <a:solidFill>
+                  <a:srgbClr val="FFFFFF"/>
+                </a:solidFill>
+                <a:latin typeface="Poppins"/>
+              </a:rPr>
+              <a:t>recurre </a:t>
+            </a:r>
+            <a:r>
+              <a:rPr sz="1600" b="1" i="0" kern="0" spc="0">
+                <a:solidFill>
+                  <a:srgbClr val="FFFFFF"/>
+                </a:solidFill>
+                <a:latin typeface="Poppins"/>
+              </a:rPr>
+              <a:t>siempre</a:t>
+            </a:r>
+            <a:r>
+              <a:rPr sz="1600" b="0" i="0" kern="0" spc="0">
+                <a:solidFill>
+                  <a:srgbClr val="FFFFFF"/>
+                </a:solidFill>
+                <a:latin typeface="Poppins"/>
+              </a:rPr>
+              <a:t> a la religión o espiritualidad como alivio o refugio en momentos de dificultad. Solo 6.6% declara que nunca. Q57, Base 500.</a:t>
+            </a:r>
+          </a:p>
+        </p:txBody>
+      </p:sp>
+      <p:sp>
+        <p:nvSpPr>
+          <p:cNvPr id="7" name="TextBox 6"/>
+          <p:cNvSpPr txBox="1"/>
+          <p:nvPr/>
+        </p:nvSpPr>
+        <p:spPr>
+          <a:xfrm>
+            <a:off x="6477000" y="4572000"/>
+            <a:ext cx="5334000" cy="1905000"/>
+          </a:xfrm>
+          <a:prstGeom prst="rect">
+            <a:avLst/>
+          </a:prstGeom>
+          <a:noFill/>
+        </p:spPr>
+        <p:txBody>
+          <a:bodyPr wrap="square" lIns="0" rIns="0" tIns="0" bIns="0">
+            <a:spAutoFit/>
+          </a:bodyPr>
+          <a:lstStyle/>
+          <a:p>
+            <a:pPr algn="ctr"/>
+            <a:r>
+              <a:rPr sz="13500" b="0" i="1" kern="0" spc="0">
+                <a:solidFill>
+                  <a:srgbClr val="FFFFFF"/>
+                </a:solidFill>
+                <a:latin typeface="Instrument Serif"/>
+              </a:rPr>
+              <a:t>71%</a:t>
+            </a:r>
+          </a:p>
+        </p:txBody>
+      </p:sp>
+      <p:sp>
+        <p:nvSpPr>
+          <p:cNvPr id="8" name="TextBox 7"/>
+          <p:cNvSpPr txBox="1"/>
+          <p:nvPr/>
+        </p:nvSpPr>
+        <p:spPr>
+          <a:xfrm>
+            <a:off x="6477000" y="6667500"/>
+            <a:ext cx="5334000" cy="1714500"/>
+          </a:xfrm>
+          <a:prstGeom prst="rect">
+            <a:avLst/>
+          </a:prstGeom>
+          <a:noFill/>
+        </p:spPr>
+        <p:txBody>
+          <a:bodyPr wrap="square" lIns="0" rIns="0" tIns="0" bIns="0">
+            <a:spAutoFit/>
+          </a:bodyPr>
+          <a:lstStyle/>
+          <a:p>
+            <a:pPr algn="ctr"/>
+            <a:r>
+              <a:rPr sz="1600" b="0" i="0" kern="0" spc="0">
+                <a:solidFill>
+                  <a:srgbClr val="FFFFFF"/>
+                </a:solidFill>
+                <a:latin typeface="Poppins"/>
+              </a:rPr>
+              <a:t>de las </a:t>
+            </a:r>
+            <a:r>
+              <a:rPr sz="1600" b="1" i="0" kern="0" spc="0">
+                <a:solidFill>
+                  <a:srgbClr val="FFFFFF"/>
+                </a:solidFill>
+                <a:latin typeface="Poppins"/>
+              </a:rPr>
+              <a:t>mujeres</a:t>
+            </a:r>
+            <a:r>
+              <a:rPr sz="1600" b="0" i="0" kern="0" spc="0">
+                <a:solidFill>
+                  <a:srgbClr val="FFFFFF"/>
+                </a:solidFill>
+                <a:latin typeface="Poppins"/>
+              </a:rPr>
+              <a:t> recurre siempre, frente a 53.3% de los hombres. Brecha de género: 17.5 puntos. Q57 × sexo, Base 305 mujeres / 195 hombres.</a:t>
+            </a:r>
+          </a:p>
+        </p:txBody>
+      </p:sp>
+      <p:sp>
+        <p:nvSpPr>
+          <p:cNvPr id="9" name="TextBox 8"/>
+          <p:cNvSpPr txBox="1"/>
+          <p:nvPr/>
+        </p:nvSpPr>
+        <p:spPr>
+          <a:xfrm>
+            <a:off x="11049000" y="4572000"/>
+            <a:ext cx="5334000" cy="1905000"/>
+          </a:xfrm>
+          <a:prstGeom prst="rect">
+            <a:avLst/>
+          </a:prstGeom>
+          <a:noFill/>
+        </p:spPr>
+        <p:txBody>
+          <a:bodyPr wrap="square" lIns="0" rIns="0" tIns="0" bIns="0">
+            <a:spAutoFit/>
+          </a:bodyPr>
+          <a:lstStyle/>
+          <a:p>
+            <a:pPr algn="ctr"/>
+            <a:r>
+              <a:rPr sz="13500" b="0" i="1" kern="0" spc="0">
+                <a:solidFill>
+                  <a:srgbClr val="FFFFFF"/>
+                </a:solidFill>
+                <a:latin typeface="Instrument Serif"/>
+              </a:rPr>
+              <a:t>73%</a:t>
+            </a:r>
+          </a:p>
+        </p:txBody>
+      </p:sp>
+      <p:sp>
+        <p:nvSpPr>
+          <p:cNvPr id="10" name="TextBox 9"/>
+          <p:cNvSpPr txBox="1"/>
+          <p:nvPr/>
+        </p:nvSpPr>
+        <p:spPr>
+          <a:xfrm>
+            <a:off x="11049000" y="6667500"/>
+            <a:ext cx="5334000" cy="1714500"/>
+          </a:xfrm>
+          <a:prstGeom prst="rect">
+            <a:avLst/>
+          </a:prstGeom>
+          <a:noFill/>
+        </p:spPr>
+        <p:txBody>
+          <a:bodyPr wrap="square" lIns="0" rIns="0" tIns="0" bIns="0">
+            <a:spAutoFit/>
+          </a:bodyPr>
+          <a:lstStyle/>
+          <a:p>
+            <a:pPr algn="ctr"/>
+            <a:r>
+              <a:rPr sz="1600" b="0" i="0" kern="0" spc="0">
+                <a:solidFill>
+                  <a:srgbClr val="FFFFFF"/>
+                </a:solidFill>
+                <a:latin typeface="Poppins"/>
+              </a:rPr>
+              <a:t>del </a:t>
+            </a:r>
+            <a:r>
+              <a:rPr sz="1600" b="1" i="0" kern="0" spc="0">
+                <a:solidFill>
+                  <a:srgbClr val="FFFFFF"/>
+                </a:solidFill>
+                <a:latin typeface="Poppins"/>
+              </a:rPr>
+              <a:t>estrato D</a:t>
+            </a:r>
+            <a:r>
+              <a:rPr sz="1600" b="0" i="0" kern="0" spc="0">
+                <a:solidFill>
+                  <a:srgbClr val="FFFFFF"/>
+                </a:solidFill>
+                <a:latin typeface="Poppins"/>
+              </a:rPr>
+              <a:t> recurre siempre, vs 52.8% en C+ y 61.5% en C. A menor NSE, mayor dependencia espiritual. Q57 × NSE, Base 172 NSE D.</a:t>
             </a:r>
           </a:p>
         </p:txBody>
@@ -6067,423 +6622,99 @@
         </p:nvSpPr>
         <p:spPr>
           <a:xfrm>
-            <a:off x="952500" y="952500"/>
-            <a:ext cx="16383000" cy="2857500"/>
-          </a:xfrm>
-          <a:prstGeom prst="rect">
-            <a:avLst/>
-          </a:prstGeom>
-          <a:noFill/>
-        </p:spPr>
-        <p:txBody>
-          <a:bodyPr wrap="square" lIns="0" rIns="0" tIns="0" bIns="0">
-            <a:spAutoFit/>
-          </a:bodyPr>
-          <a:lstStyle/>
-          <a:p>
-            <a:pPr algn="ctr"/>
-            <a:r>
-              <a:rPr sz="3150" b="0" i="0" kern="0" spc="0">
+            <a:off x="0" y="762000"/>
+            <a:ext cx="18288000" cy="476250"/>
+          </a:xfrm>
+          <a:prstGeom prst="rect">
+            <a:avLst/>
+          </a:prstGeom>
+          <a:noFill/>
+        </p:spPr>
+        <p:txBody>
+          <a:bodyPr wrap="square" lIns="0" rIns="0" tIns="0" bIns="0">
+            <a:spAutoFit/>
+          </a:bodyPr>
+          <a:lstStyle/>
+          <a:p>
+            <a:pPr algn="ctr"/>
+            <a:r>
+              <a:rPr sz="1400" b="0" i="0" kern="0" spc="0">
+                <a:solidFill>
+                  <a:srgbClr val="9B9B9B"/>
+                </a:solidFill>
+                <a:latin typeface="Poppins"/>
+              </a:rPr>
+              <a:t>CONSUMER VOICE</a:t>
+            </a:r>
+          </a:p>
+        </p:txBody>
+      </p:sp>
+      <p:sp>
+        <p:nvSpPr>
+          <p:cNvPr id="3" name="TextBox 2"/>
+          <p:cNvSpPr txBox="1"/>
+          <p:nvPr/>
+        </p:nvSpPr>
+        <p:spPr>
+          <a:xfrm>
+            <a:off x="1343025" y="3143250"/>
+            <a:ext cx="15592425" cy="4286250"/>
+          </a:xfrm>
+          <a:prstGeom prst="rect">
+            <a:avLst/>
+          </a:prstGeom>
+          <a:noFill/>
+        </p:spPr>
+        <p:txBody>
+          <a:bodyPr wrap="square" lIns="0" rIns="0" tIns="0" bIns="0">
+            <a:spAutoFit/>
+          </a:bodyPr>
+          <a:lstStyle/>
+          <a:p>
+            <a:pPr algn="ctr"/>
+            <a:r>
+              <a:rPr sz="6000" i="0" b="0" kern="0" spc="0">
                 <a:solidFill>
                   <a:srgbClr val="FFFFFF"/>
                 </a:solidFill>
                 <a:latin typeface="Instrument Serif"/>
               </a:rPr>
-              <a:t>64% RECURRE SIEMPRE A LA FE EN MOMENTOS DE DIFICULTAD. </a:t>
-            </a:r>
-            <a:r>
-              <a:rPr sz="3150" b="0" i="1" kern="0" spc="0">
-                <a:solidFill>
-                  <a:srgbClr val="FFFFFF"/>
-                </a:solidFill>
-                <a:latin typeface="Instrument Serif"/>
-              </a:rPr>
-              <a:t>ESE 64% NO ES PAREJO: ES MÁS MUJER, MÁS BAJO EL NIVEL SOCIOECONÓMICO, MÁS ALTA LA DEPENDENCIA.</a:t>
-            </a:r>
-          </a:p>
-        </p:txBody>
-      </p:sp>
-      <p:sp>
-        <p:nvSpPr>
-          <p:cNvPr id="3" name="Rectangle 2"/>
-          <p:cNvSpPr/>
-          <p:nvPr/>
-        </p:nvSpPr>
-        <p:spPr>
-          <a:xfrm>
-            <a:off x="6848475" y="4572000"/>
-            <a:ext cx="19050" cy="2647950"/>
-          </a:xfrm>
-          <a:prstGeom prst="rect">
-            <a:avLst/>
-          </a:prstGeom>
-          <a:solidFill>
-            <a:srgbClr val="2E2E2E"/>
-          </a:solidFill>
-          <a:ln>
-            <a:noFill/>
-          </a:ln>
-        </p:spPr>
-        <p:style>
-          <a:lnRef idx="1">
-            <a:schemeClr val="accent1"/>
-          </a:lnRef>
-          <a:fillRef idx="3">
-            <a:schemeClr val="accent1"/>
-          </a:fillRef>
-          <a:effectRef idx="2">
-            <a:schemeClr val="accent1"/>
-          </a:effectRef>
-          <a:fontRef idx="minor">
-            <a:schemeClr val="lt1"/>
-          </a:fontRef>
-        </p:style>
-        <p:txBody>
-          <a:bodyPr rtlCol="0" anchor="ctr"/>
-          <a:lstStyle/>
-          <a:p>
-            <a:pPr algn="ctr"/>
-          </a:p>
-        </p:txBody>
-      </p:sp>
-      <p:sp>
-        <p:nvSpPr>
-          <p:cNvPr id="4" name="Rectangle 3"/>
-          <p:cNvSpPr/>
-          <p:nvPr/>
-        </p:nvSpPr>
-        <p:spPr>
-          <a:xfrm>
-            <a:off x="11420475" y="4572000"/>
-            <a:ext cx="19050" cy="2647950"/>
-          </a:xfrm>
-          <a:prstGeom prst="rect">
-            <a:avLst/>
-          </a:prstGeom>
-          <a:solidFill>
-            <a:srgbClr val="2E2E2E"/>
-          </a:solidFill>
-          <a:ln>
-            <a:noFill/>
-          </a:ln>
-        </p:spPr>
-        <p:style>
-          <a:lnRef idx="1">
-            <a:schemeClr val="accent1"/>
-          </a:lnRef>
-          <a:fillRef idx="3">
-            <a:schemeClr val="accent1"/>
-          </a:fillRef>
-          <a:effectRef idx="2">
-            <a:schemeClr val="accent1"/>
-          </a:effectRef>
-          <a:fontRef idx="minor">
-            <a:schemeClr val="lt1"/>
-          </a:fontRef>
-        </p:style>
-        <p:txBody>
-          <a:bodyPr rtlCol="0" anchor="ctr"/>
-          <a:lstStyle/>
-          <a:p>
-            <a:pPr algn="ctr"/>
-          </a:p>
-        </p:txBody>
-      </p:sp>
-      <p:sp>
-        <p:nvSpPr>
-          <p:cNvPr id="5" name="TextBox 4"/>
-          <p:cNvSpPr txBox="1"/>
-          <p:nvPr/>
-        </p:nvSpPr>
-        <p:spPr>
-          <a:xfrm>
-            <a:off x="1905000" y="4762500"/>
-            <a:ext cx="5334000" cy="1905000"/>
-          </a:xfrm>
-          <a:prstGeom prst="rect">
-            <a:avLst/>
-          </a:prstGeom>
-          <a:noFill/>
-        </p:spPr>
-        <p:txBody>
-          <a:bodyPr wrap="square" lIns="0" rIns="0" tIns="0" bIns="0">
-            <a:spAutoFit/>
-          </a:bodyPr>
-          <a:lstStyle/>
-          <a:p>
-            <a:pPr algn="ctr"/>
-            <a:r>
-              <a:rPr sz="13500" b="0" i="1" kern="0" spc="0">
-                <a:solidFill>
-                  <a:srgbClr val="FFFFFF"/>
-                </a:solidFill>
-                <a:latin typeface="Instrument Serif"/>
-              </a:rPr>
-              <a:t>64%</a:t>
-            </a:r>
-          </a:p>
-        </p:txBody>
-      </p:sp>
-      <p:sp>
-        <p:nvSpPr>
-          <p:cNvPr id="6" name="TextBox 5"/>
-          <p:cNvSpPr txBox="1"/>
-          <p:nvPr/>
-        </p:nvSpPr>
-        <p:spPr>
-          <a:xfrm>
-            <a:off x="1905000" y="6858000"/>
-            <a:ext cx="5334000" cy="1714500"/>
-          </a:xfrm>
-          <a:prstGeom prst="rect">
-            <a:avLst/>
-          </a:prstGeom>
-          <a:noFill/>
-        </p:spPr>
-        <p:txBody>
-          <a:bodyPr wrap="square" lIns="0" rIns="0" tIns="0" bIns="0">
-            <a:spAutoFit/>
-          </a:bodyPr>
-          <a:lstStyle/>
-          <a:p>
-            <a:pPr algn="ctr"/>
-            <a:r>
-              <a:rPr sz="1650" b="0" i="0" kern="0" spc="0">
-                <a:solidFill>
-                  <a:srgbClr val="FFFFFF"/>
-                </a:solidFill>
-                <a:latin typeface="Poppins"/>
-              </a:rPr>
-              <a:t>marca “Siempre” recurrir a la </a:t>
-            </a:r>
-            <a:r>
-              <a:rPr sz="1650" b="1" i="0" kern="0" spc="0">
-                <a:solidFill>
-                  <a:srgbClr val="FFFFFF"/>
-                </a:solidFill>
-                <a:latin typeface="Poppins"/>
-              </a:rPr>
-              <a:t>religión o espiritualidad</a:t>
-            </a:r>
-            <a:r>
-              <a:rPr sz="1650" b="0" i="0" kern="0" spc="0">
-                <a:solidFill>
-                  <a:srgbClr val="FFFFFF"/>
-                </a:solidFill>
-                <a:latin typeface="Poppins"/>
-              </a:rPr>
-              <a:t> como refugio en momentos de dificultad. Solo 6.6% dice nunca. Q57, Base 500.</a:t>
-            </a:r>
-          </a:p>
-        </p:txBody>
-      </p:sp>
-      <p:sp>
-        <p:nvSpPr>
-          <p:cNvPr id="7" name="TextBox 6"/>
-          <p:cNvSpPr txBox="1"/>
-          <p:nvPr/>
-        </p:nvSpPr>
-        <p:spPr>
-          <a:xfrm>
-            <a:off x="6477000" y="4762500"/>
-            <a:ext cx="5334000" cy="1905000"/>
-          </a:xfrm>
-          <a:prstGeom prst="rect">
-            <a:avLst/>
-          </a:prstGeom>
-          <a:noFill/>
-        </p:spPr>
-        <p:txBody>
-          <a:bodyPr wrap="square" lIns="0" rIns="0" tIns="0" bIns="0">
-            <a:spAutoFit/>
-          </a:bodyPr>
-          <a:lstStyle/>
-          <a:p>
-            <a:pPr algn="ctr"/>
-            <a:r>
-              <a:rPr sz="13500" b="0" i="1" kern="0" spc="0">
-                <a:solidFill>
-                  <a:srgbClr val="FFFFFF"/>
-                </a:solidFill>
-                <a:latin typeface="Instrument Serif"/>
-              </a:rPr>
-              <a:t>71%</a:t>
-            </a:r>
-          </a:p>
-        </p:txBody>
-      </p:sp>
-      <p:sp>
-        <p:nvSpPr>
-          <p:cNvPr id="8" name="TextBox 7"/>
-          <p:cNvSpPr txBox="1"/>
-          <p:nvPr/>
-        </p:nvSpPr>
-        <p:spPr>
-          <a:xfrm>
-            <a:off x="6477000" y="6858000"/>
-            <a:ext cx="5334000" cy="1714500"/>
-          </a:xfrm>
-          <a:prstGeom prst="rect">
-            <a:avLst/>
-          </a:prstGeom>
-          <a:noFill/>
-        </p:spPr>
-        <p:txBody>
-          <a:bodyPr wrap="square" lIns="0" rIns="0" tIns="0" bIns="0">
-            <a:spAutoFit/>
-          </a:bodyPr>
-          <a:lstStyle/>
-          <a:p>
-            <a:pPr algn="ctr"/>
-            <a:r>
-              <a:rPr sz="1650" b="0" i="0" kern="0" spc="0">
-                <a:solidFill>
-                  <a:srgbClr val="FFFFFF"/>
-                </a:solidFill>
-                <a:latin typeface="Poppins"/>
-              </a:rPr>
-              <a:t>de las </a:t>
-            </a:r>
-            <a:r>
-              <a:rPr sz="1650" b="1" i="0" kern="0" spc="0">
-                <a:solidFill>
-                  <a:srgbClr val="FFFFFF"/>
-                </a:solidFill>
-                <a:latin typeface="Poppins"/>
-              </a:rPr>
-              <a:t>mujeres</a:t>
-            </a:r>
-            <a:r>
-              <a:rPr sz="1650" b="0" i="0" kern="0" spc="0">
-                <a:solidFill>
-                  <a:srgbClr val="FFFFFF"/>
-                </a:solidFill>
-                <a:latin typeface="Poppins"/>
-              </a:rPr>
-              <a:t> recurre siempre a la fe, vs 53.3% de los hombres. Brecha de género: 17.5 puntos. Q57 × sexo.</a:t>
-            </a:r>
-          </a:p>
-        </p:txBody>
-      </p:sp>
-      <p:sp>
-        <p:nvSpPr>
-          <p:cNvPr id="9" name="TextBox 8"/>
-          <p:cNvSpPr txBox="1"/>
-          <p:nvPr/>
-        </p:nvSpPr>
-        <p:spPr>
-          <a:xfrm>
-            <a:off x="11049000" y="4762500"/>
-            <a:ext cx="5334000" cy="1905000"/>
-          </a:xfrm>
-          <a:prstGeom prst="rect">
-            <a:avLst/>
-          </a:prstGeom>
-          <a:noFill/>
-        </p:spPr>
-        <p:txBody>
-          <a:bodyPr wrap="square" lIns="0" rIns="0" tIns="0" bIns="0">
-            <a:spAutoFit/>
-          </a:bodyPr>
-          <a:lstStyle/>
-          <a:p>
-            <a:pPr algn="ctr"/>
-            <a:r>
-              <a:rPr sz="13500" b="0" i="1" kern="0" spc="0">
-                <a:solidFill>
-                  <a:srgbClr val="FFFFFF"/>
-                </a:solidFill>
-                <a:latin typeface="Instrument Serif"/>
-              </a:rPr>
-              <a:t>73%</a:t>
-            </a:r>
-          </a:p>
-        </p:txBody>
-      </p:sp>
-      <p:sp>
-        <p:nvSpPr>
-          <p:cNvPr id="10" name="TextBox 9"/>
-          <p:cNvSpPr txBox="1"/>
-          <p:nvPr/>
-        </p:nvSpPr>
-        <p:spPr>
-          <a:xfrm>
-            <a:off x="11049000" y="6858000"/>
-            <a:ext cx="5334000" cy="1714500"/>
-          </a:xfrm>
-          <a:prstGeom prst="rect">
-            <a:avLst/>
-          </a:prstGeom>
-          <a:noFill/>
-        </p:spPr>
-        <p:txBody>
-          <a:bodyPr wrap="square" lIns="0" rIns="0" tIns="0" bIns="0">
-            <a:spAutoFit/>
-          </a:bodyPr>
-          <a:lstStyle/>
-          <a:p>
-            <a:pPr algn="ctr"/>
-            <a:r>
-              <a:rPr sz="1650" b="0" i="0" kern="0" spc="0">
-                <a:solidFill>
-                  <a:srgbClr val="FFFFFF"/>
-                </a:solidFill>
-                <a:latin typeface="Poppins"/>
-              </a:rPr>
-              <a:t>del </a:t>
-            </a:r>
-            <a:r>
-              <a:rPr sz="1650" b="1" i="0" kern="0" spc="0">
-                <a:solidFill>
-                  <a:srgbClr val="FFFFFF"/>
-                </a:solidFill>
-                <a:latin typeface="Poppins"/>
-              </a:rPr>
-              <a:t>estrato D</a:t>
-            </a:r>
-            <a:r>
-              <a:rPr sz="1650" b="0" i="0" kern="0" spc="0">
-                <a:solidFill>
-                  <a:srgbClr val="FFFFFF"/>
-                </a:solidFill>
-                <a:latin typeface="Poppins"/>
-              </a:rPr>
-              <a:t> recurre siempre, vs 52.8% del estrato C+ y 61.5% del estrato C. A menor NSE, mayor dependencia espiritual.</a:t>
-            </a:r>
-          </a:p>
-        </p:txBody>
-      </p:sp>
-      <p:sp>
-        <p:nvSpPr>
-          <p:cNvPr id="11" name="TextBox 10"/>
-          <p:cNvSpPr txBox="1"/>
-          <p:nvPr/>
-        </p:nvSpPr>
-        <p:spPr>
-          <a:xfrm>
-            <a:off x="0" y="9429750"/>
-            <a:ext cx="18288000" cy="476250"/>
-          </a:xfrm>
-          <a:prstGeom prst="rect">
-            <a:avLst/>
-          </a:prstGeom>
-          <a:noFill/>
-        </p:spPr>
-        <p:txBody>
-          <a:bodyPr wrap="square" lIns="0" rIns="0" tIns="0" bIns="0">
-            <a:spAutoFit/>
-          </a:bodyPr>
-          <a:lstStyle/>
-          <a:p>
-            <a:pPr algn="ctr"/>
-            <a:r>
-              <a:rPr sz="1200" b="0" i="1" kern="0" spc="0">
-                <a:solidFill>
-                  <a:srgbClr val="9B9B9B"/>
-                </a:solidFill>
-                <a:latin typeface="Poppins"/>
-              </a:rPr>
-              <a:t>Source: Código Casa — Estudio cuantitativo + cualitativo 2025 · Q57, Q57 × D2, Q57 × D6 · Base 500.</a:t>
+              <a:t>«Me refugio mucho en Dios, en la oración. Tener una conexión con Dios para mí es importante, dejarle las cosas a él, que él se encargue, porque hay días que tú dices yo no puedo más y Dios se encarga.»</a:t>
+            </a:r>
+          </a:p>
+        </p:txBody>
+      </p:sp>
+      <p:sp>
+        <p:nvSpPr>
+          <p:cNvPr id="4" name="TextBox 3"/>
+          <p:cNvSpPr txBox="1"/>
+          <p:nvPr/>
+        </p:nvSpPr>
+        <p:spPr>
+          <a:xfrm>
+            <a:off x="0" y="6000750"/>
+            <a:ext cx="18288000" cy="571500"/>
+          </a:xfrm>
+          <a:prstGeom prst="rect">
+            <a:avLst/>
+          </a:prstGeom>
+          <a:noFill/>
+        </p:spPr>
+        <p:txBody>
+          <a:bodyPr wrap="square" lIns="0" rIns="0" tIns="0" bIns="0">
+            <a:spAutoFit/>
+          </a:bodyPr>
+          <a:lstStyle/>
+          <a:p>
+            <a:pPr algn="ctr"/>
+            <a:r>
+              <a:rPr sz="2000" b="0" i="1" kern="0" spc="0">
+                <a:solidFill>
+                  <a:srgbClr val="FFFFFF"/>
+                </a:solidFill>
+                <a:latin typeface="Poppins"/>
+              </a:rPr>
+              <a:t>— Familia Biparental con Hijos Adultos</a:t>
             </a:r>
           </a:p>
         </p:txBody>
@@ -6522,53 +6753,58 @@
         </p:nvSpPr>
         <p:spPr>
           <a:xfrm>
-            <a:off x="0" y="762000"/>
-            <a:ext cx="18288000" cy="476250"/>
-          </a:xfrm>
-          <a:prstGeom prst="rect">
-            <a:avLst/>
-          </a:prstGeom>
-          <a:noFill/>
-        </p:spPr>
-        <p:txBody>
-          <a:bodyPr wrap="square" lIns="0" rIns="0" tIns="0" bIns="0">
-            <a:spAutoFit/>
-          </a:bodyPr>
-          <a:lstStyle/>
-          <a:p>
-            <a:pPr algn="ctr"/>
-            <a:r>
-              <a:rPr sz="1200" b="0" i="0" kern="0" spc="0">
-                <a:solidFill>
-                  <a:srgbClr val="9B9B9B"/>
-                </a:solidFill>
-                <a:latin typeface="Poppins"/>
-              </a:rPr>
-              <a:t>CONSUMER VOICE</a:t>
-            </a:r>
-          </a:p>
-        </p:txBody>
-      </p:sp>
-      <p:sp>
-        <p:nvSpPr>
-          <p:cNvPr id="3" name="Rounded Rectangle 2"/>
+            <a:off x="952500" y="762000"/>
+            <a:ext cx="16383000" cy="3048000"/>
+          </a:xfrm>
+          <a:prstGeom prst="rect">
+            <a:avLst/>
+          </a:prstGeom>
+          <a:noFill/>
+        </p:spPr>
+        <p:txBody>
+          <a:bodyPr wrap="square" lIns="0" rIns="0" tIns="0" bIns="0">
+            <a:spAutoFit/>
+          </a:bodyPr>
+          <a:lstStyle/>
+          <a:p>
+            <a:pPr algn="ctr"/>
+            <a:r>
+              <a:rPr sz="5000" b="0" i="0" kern="0" spc="0">
+                <a:solidFill>
+                  <a:srgbClr val="FFFFFF"/>
+                </a:solidFill>
+                <a:latin typeface="Instrument Serif"/>
+              </a:rPr>
+              <a:t>EL DOMINICANO ES CASI UNÁNIMEMENTE CREYENTE. CÓMO CREE — ESO ESTÁ PARTIDO EN TRES MITADES CASI IGUALES, </a:t>
+            </a:r>
+            <a:r>
+              <a:rPr sz="5000" b="0" i="1" kern="0" spc="0">
+                <a:solidFill>
+                  <a:srgbClr val="FFFFFF"/>
+                </a:solidFill>
+                <a:latin typeface="Instrument Serif"/>
+              </a:rPr>
+              <a:t>Y EL NO CREYENTE ES UNA RAREZA DE 1.2%.</a:t>
+            </a:r>
+          </a:p>
+        </p:txBody>
+      </p:sp>
+      <p:sp>
+        <p:nvSpPr>
+          <p:cNvPr id="3" name="Rectangle 2"/>
           <p:cNvSpPr/>
           <p:nvPr/>
         </p:nvSpPr>
         <p:spPr>
           <a:xfrm>
-            <a:off x="1343025" y="2095500"/>
-            <a:ext cx="15592425" cy="4619625"/>
-          </a:xfrm>
-          <a:prstGeom prst="roundRect">
-            <a:avLst>
-              <a:gd name="adj" fmla="val 5000"/>
-            </a:avLst>
+            <a:off x="9134475" y="4381500"/>
+            <a:ext cx="19050" cy="2647950"/>
+          </a:xfrm>
+          <a:prstGeom prst="rect">
+            <a:avLst/>
           </a:prstGeom>
           <a:solidFill>
-            <a:srgbClr val="000000">
-              <a:alpha val="45000"/>
-            </a:srgbClr>
+            <a:srgbClr val="2E2E2E"/>
           </a:solidFill>
           <a:ln>
             <a:noFill/>
@@ -6604,45 +6840,170 @@
         </p:nvSpPr>
         <p:spPr>
           <a:xfrm>
-            <a:off x="2105025" y="2667000"/>
-            <a:ext cx="14068425" cy="3476625"/>
-          </a:xfrm>
-          <a:prstGeom prst="rect">
-            <a:avLst/>
-          </a:prstGeom>
-          <a:noFill/>
-        </p:spPr>
-        <p:txBody>
-          <a:bodyPr wrap="square" lIns="0" rIns="0" tIns="0" bIns="0">
-            <a:spAutoFit/>
-          </a:bodyPr>
-          <a:lstStyle/>
-          <a:p>
-            <a:pPr algn="ctr"/>
-            <a:r>
-              <a:rPr sz="3750" i="0" b="0" kern="0" spc="0">
+            <a:off x="1905000" y="4572000"/>
+            <a:ext cx="8382000" cy="1905000"/>
+          </a:xfrm>
+          <a:prstGeom prst="rect">
+            <a:avLst/>
+          </a:prstGeom>
+          <a:noFill/>
+        </p:spPr>
+        <p:txBody>
+          <a:bodyPr wrap="square" lIns="0" rIns="0" tIns="0" bIns="0">
+            <a:spAutoFit/>
+          </a:bodyPr>
+          <a:lstStyle/>
+          <a:p>
+            <a:pPr algn="ctr"/>
+            <a:r>
+              <a:rPr sz="13500" b="0" i="1" kern="0" spc="0">
                 <a:solidFill>
                   <a:srgbClr val="FFFFFF"/>
                 </a:solidFill>
                 <a:latin typeface="Instrument Serif"/>
               </a:rPr>
-              <a:t>«He buscado ayuda profesional para tratar esas cosas... ¿Qué también yo hago? Me refugio mucho en Dios, en la oración. Tener una conexión con Dios para mí es importante, dejarle las cosas a él, que él se encargue, porque hay días que tú dices yo no puedo más y Dios se encarga.»</a:t>
-            </a:r>
-          </a:p>
-          <a:p>
-            <a:pPr algn="ctr">
-              <a:spcBef>
-                <a:spcPts val="1000"/>
-              </a:spcBef>
-            </a:pPr>
-            <a:r>
-              <a:rPr sz="1650" i="1" b="0" kern="0" spc="0">
-                <a:solidFill>
-                  <a:srgbClr val="FFFFFF"/>
-                </a:solidFill>
-                <a:latin typeface="Poppins"/>
-              </a:rPr>
-              <a:t>— Familia Biparental con Hijos Adultos</a:t>
+              <a:t>31%</a:t>
+            </a:r>
+          </a:p>
+        </p:txBody>
+      </p:sp>
+      <p:sp>
+        <p:nvSpPr>
+          <p:cNvPr id="5" name="TextBox 4"/>
+          <p:cNvSpPr txBox="1"/>
+          <p:nvPr/>
+        </p:nvSpPr>
+        <p:spPr>
+          <a:xfrm>
+            <a:off x="1905000" y="6667500"/>
+            <a:ext cx="8382000" cy="1714500"/>
+          </a:xfrm>
+          <a:prstGeom prst="rect">
+            <a:avLst/>
+          </a:prstGeom>
+          <a:noFill/>
+        </p:spPr>
+        <p:txBody>
+          <a:bodyPr wrap="square" lIns="0" rIns="0" tIns="0" bIns="0">
+            <a:spAutoFit/>
+          </a:bodyPr>
+          <a:lstStyle/>
+          <a:p>
+            <a:pPr algn="ctr"/>
+            <a:r>
+              <a:rPr sz="1600" b="0" i="0" kern="0" spc="0">
+                <a:solidFill>
+                  <a:srgbClr val="FFFFFF"/>
+                </a:solidFill>
+                <a:latin typeface="Poppins"/>
+              </a:rPr>
+              <a:t>es </a:t>
+            </a:r>
+            <a:r>
+              <a:rPr sz="1600" b="1" i="0" kern="0" spc="0">
+                <a:solidFill>
+                  <a:srgbClr val="FFFFFF"/>
+                </a:solidFill>
+                <a:latin typeface="Poppins"/>
+              </a:rPr>
+              <a:t>creyente ocasional</a:t>
+            </a:r>
+            <a:r>
+              <a:rPr sz="1600" b="0" i="0" kern="0" spc="0">
+                <a:solidFill>
+                  <a:srgbClr val="FFFFFF"/>
+                </a:solidFill>
+                <a:latin typeface="Poppins"/>
+              </a:rPr>
+              <a:t>, 30.2% muy practicante y activo, 28.8% espiritual sin práctica regular. Solo 8.0% queda fuera del marco religioso o espiritual. Q58, Base 500.</a:t>
+            </a:r>
+          </a:p>
+        </p:txBody>
+      </p:sp>
+      <p:sp>
+        <p:nvSpPr>
+          <p:cNvPr id="6" name="TextBox 5"/>
+          <p:cNvSpPr txBox="1"/>
+          <p:nvPr/>
+        </p:nvSpPr>
+        <p:spPr>
+          <a:xfrm>
+            <a:off x="8001000" y="4572000"/>
+            <a:ext cx="8382000" cy="1905000"/>
+          </a:xfrm>
+          <a:prstGeom prst="rect">
+            <a:avLst/>
+          </a:prstGeom>
+          <a:noFill/>
+        </p:spPr>
+        <p:txBody>
+          <a:bodyPr wrap="square" lIns="0" rIns="0" tIns="0" bIns="0">
+            <a:spAutoFit/>
+          </a:bodyPr>
+          <a:lstStyle/>
+          <a:p>
+            <a:pPr algn="ctr"/>
+            <a:r>
+              <a:rPr sz="13500" b="0" i="1" kern="0" spc="0">
+                <a:solidFill>
+                  <a:srgbClr val="FFFFFF"/>
+                </a:solidFill>
+                <a:latin typeface="Instrument Serif"/>
+              </a:rPr>
+              <a:t>47%</a:t>
+            </a:r>
+          </a:p>
+        </p:txBody>
+      </p:sp>
+      <p:sp>
+        <p:nvSpPr>
+          <p:cNvPr id="7" name="TextBox 6"/>
+          <p:cNvSpPr txBox="1"/>
+          <p:nvPr/>
+        </p:nvSpPr>
+        <p:spPr>
+          <a:xfrm>
+            <a:off x="8001000" y="6667500"/>
+            <a:ext cx="8382000" cy="1714500"/>
+          </a:xfrm>
+          <a:prstGeom prst="rect">
+            <a:avLst/>
+          </a:prstGeom>
+          <a:noFill/>
+        </p:spPr>
+        <p:txBody>
+          <a:bodyPr wrap="square" lIns="0" rIns="0" tIns="0" bIns="0">
+            <a:spAutoFit/>
+          </a:bodyPr>
+          <a:lstStyle/>
+          <a:p>
+            <a:pPr algn="ctr"/>
+            <a:r>
+              <a:rPr sz="1600" b="0" i="0" kern="0" spc="0">
+                <a:solidFill>
+                  <a:srgbClr val="FFFFFF"/>
+                </a:solidFill>
+                <a:latin typeface="Poppins"/>
+              </a:rPr>
+              <a:t>de los </a:t>
+            </a:r>
+            <a:r>
+              <a:rPr sz="1600" b="1" i="0" kern="0" spc="0">
+                <a:solidFill>
+                  <a:srgbClr val="FFFFFF"/>
+                </a:solidFill>
+                <a:latin typeface="Poppins"/>
+              </a:rPr>
+              <a:t>18–24 años</a:t>
+            </a:r>
+            <a:r>
+              <a:rPr sz="1600" b="0" i="0" kern="0" spc="0">
+                <a:solidFill>
+                  <a:srgbClr val="FFFFFF"/>
+                </a:solidFill>
+                <a:latin typeface="Poppins"/>
+              </a:rPr>
+              <a:t> elige "creyente ocasional" como perfil dominante; en los 55+ el perfil top es "muy practicante y activo" (47.1%). El creyente se vuelve más practicante al envejecer.</a:t>
             </a:r>
           </a:p>
         </p:txBody>
@@ -6681,38 +7042,38 @@
         </p:nvSpPr>
         <p:spPr>
           <a:xfrm>
-            <a:off x="952500" y="952500"/>
-            <a:ext cx="16383000" cy="2857500"/>
-          </a:xfrm>
-          <a:prstGeom prst="rect">
-            <a:avLst/>
-          </a:prstGeom>
-          <a:noFill/>
-        </p:spPr>
-        <p:txBody>
-          <a:bodyPr wrap="square" lIns="0" rIns="0" tIns="0" bIns="0">
-            <a:spAutoFit/>
-          </a:bodyPr>
-          <a:lstStyle/>
-          <a:p>
-            <a:pPr algn="ctr"/>
-            <a:r>
-              <a:rPr sz="3150" b="0" i="0" kern="0" spc="0">
+            <a:off x="952500" y="762000"/>
+            <a:ext cx="16383000" cy="3048000"/>
+          </a:xfrm>
+          <a:prstGeom prst="rect">
+            <a:avLst/>
+          </a:prstGeom>
+          <a:noFill/>
+        </p:spPr>
+        <p:txBody>
+          <a:bodyPr wrap="square" lIns="0" rIns="0" tIns="0" bIns="0">
+            <a:spAutoFit/>
+          </a:bodyPr>
+          <a:lstStyle/>
+          <a:p>
+            <a:pPr algn="ctr"/>
+            <a:r>
+              <a:rPr sz="5000" b="0" i="0" kern="0" spc="0">
                 <a:solidFill>
                   <a:srgbClr val="FFFFFF"/>
                 </a:solidFill>
                 <a:latin typeface="Instrument Serif"/>
               </a:rPr>
-              <a:t>EL DOMINICANO CREE, PERO NO EN INSTITUCIÓN. 30.8% ES CREYENTE OCASIONAL, 28.8% ESPIRITUAL SIN PRÁCTICA REGULAR. </a:t>
-            </a:r>
-            <a:r>
-              <a:rPr sz="3150" b="0" i="1" kern="0" spc="0">
+              <a:t>9 DE CADA 10 DICEN NO HABER SUFRIDO DISCRIMINACIÓN EN 3 AÑOS. </a:t>
+            </a:r>
+            <a:r>
+              <a:rPr sz="5000" b="0" i="1" kern="0" spc="0">
                 <a:solidFill>
                   <a:srgbClr val="FFFFFF"/>
                 </a:solidFill>
                 <a:latin typeface="Instrument Serif"/>
               </a:rPr>
-              <a:t>SOLO 30.2% SE DECLARA MUY PRACTICANTE Y ACTIVO.</a:t>
+              <a:t>EN HOGARES MONOPARENTALES LA CIFRA CAE A 83.6% — CASI 8 PUNTOS BAJO EL PROMEDIO.</a:t>
             </a:r>
           </a:p>
         </p:txBody>
@@ -6725,7 +7086,7 @@
         </p:nvSpPr>
         <p:spPr>
           <a:xfrm>
-            <a:off x="9134475" y="4572000"/>
+            <a:off x="9134475" y="4381500"/>
             <a:ext cx="19050" cy="2647950"/>
           </a:xfrm>
           <a:prstGeom prst="rect">
@@ -6768,7 +7129,7 @@
         </p:nvSpPr>
         <p:spPr>
           <a:xfrm>
-            <a:off x="1905000" y="4762500"/>
+            <a:off x="1905000" y="4572000"/>
             <a:ext cx="8382000" cy="1905000"/>
           </a:xfrm>
           <a:prstGeom prst="rect">
@@ -6790,7 +7151,7 @@
                 </a:solidFill>
                 <a:latin typeface="Instrument Serif"/>
               </a:rPr>
-              <a:t>31%</a:t>
+              <a:t>91%</a:t>
             </a:r>
           </a:p>
         </p:txBody>
@@ -6803,7 +7164,7 @@
         </p:nvSpPr>
         <p:spPr>
           <a:xfrm>
-            <a:off x="1905000" y="6858000"/>
+            <a:off x="1905000" y="6667500"/>
             <a:ext cx="8382000" cy="1714500"/>
           </a:xfrm>
           <a:prstGeom prst="rect">
@@ -6819,31 +7180,31 @@
           <a:p>
             <a:pPr algn="ctr"/>
             <a:r>
-              <a:rPr sz="1650" b="0" i="0" kern="0" spc="0">
-                <a:solidFill>
-                  <a:srgbClr val="FFFFFF"/>
-                </a:solidFill>
-                <a:latin typeface="Poppins"/>
-              </a:rPr>
-              <a:t>es </a:t>
-            </a:r>
-            <a:r>
-              <a:rPr sz="1650" b="1" i="0" kern="0" spc="0">
-                <a:solidFill>
-                  <a:srgbClr val="FFFFFF"/>
-                </a:solidFill>
-                <a:latin typeface="Poppins"/>
-              </a:rPr>
-              <a:t>creyente ocasional</a:t>
-            </a:r>
-            <a:r>
-              <a:rPr sz="1650" b="0" i="0" kern="0" spc="0">
-                <a:solidFill>
-                  <a:srgbClr val="FFFFFF"/>
-                </a:solidFill>
-                <a:latin typeface="Poppins"/>
-              </a:rPr>
-              <a:t>, 30.2% muy practicante y activo, 28.8% espiritual sin práctica regular. La relación con la fe se reparte en tercios. Q58, Base 500.</a:t>
+              <a:rPr sz="1600" b="0" i="0" kern="0" spc="0">
+                <a:solidFill>
+                  <a:srgbClr val="FFFFFF"/>
+                </a:solidFill>
+                <a:latin typeface="Poppins"/>
+              </a:rPr>
+              <a:t>declara no haber sido víctima de </a:t>
+            </a:r>
+            <a:r>
+              <a:rPr sz="1600" b="1" i="0" kern="0" spc="0">
+                <a:solidFill>
+                  <a:srgbClr val="FFFFFF"/>
+                </a:solidFill>
+                <a:latin typeface="Poppins"/>
+              </a:rPr>
+              <a:t>discriminación</a:t>
+            </a:r>
+            <a:r>
+              <a:rPr sz="1600" b="0" i="0" kern="0" spc="0">
+                <a:solidFill>
+                  <a:srgbClr val="FFFFFF"/>
+                </a:solidFill>
+                <a:latin typeface="Poppins"/>
+              </a:rPr>
+              <a:t> en los últimos 3 años. La mención más alta entre quienes sí reportan algo: "comentarios ofensivos sobre el color de piel" (2.8%, n=14). Q60, Base 500.</a:t>
             </a:r>
           </a:p>
         </p:txBody>
@@ -6856,7 +7217,7 @@
         </p:nvSpPr>
         <p:spPr>
           <a:xfrm>
-            <a:off x="8001000" y="4762500"/>
+            <a:off x="8001000" y="4572000"/>
             <a:ext cx="8382000" cy="1905000"/>
           </a:xfrm>
           <a:prstGeom prst="rect">
@@ -6878,7 +7239,7 @@
                 </a:solidFill>
                 <a:latin typeface="Instrument Serif"/>
               </a:rPr>
-              <a:t>8%</a:t>
+              <a:t>84%</a:t>
             </a:r>
           </a:p>
         </p:txBody>
@@ -6891,7 +7252,7 @@
         </p:nvSpPr>
         <p:spPr>
           <a:xfrm>
-            <a:off x="8001000" y="6858000"/>
+            <a:off x="8001000" y="6667500"/>
             <a:ext cx="8382000" cy="1714500"/>
           </a:xfrm>
           <a:prstGeom prst="rect">
@@ -6907,66 +7268,31 @@
           <a:p>
             <a:pPr algn="ctr"/>
             <a:r>
-              <a:rPr sz="1650" b="0" i="0" kern="0" spc="0">
-                <a:solidFill>
-                  <a:srgbClr val="FFFFFF"/>
-                </a:solidFill>
-                <a:latin typeface="Poppins"/>
-              </a:rPr>
-              <a:t>queda fuera de la órbita espiritual: 6.8% sin afiliación ni práctica, 1.2% no creyente. El país mantiene casi por completo algún vínculo con </a:t>
-            </a:r>
-            <a:r>
-              <a:rPr sz="1650" b="1" i="0" kern="0" spc="0">
-                <a:solidFill>
-                  <a:srgbClr val="FFFFFF"/>
-                </a:solidFill>
-                <a:latin typeface="Poppins"/>
-              </a:rPr>
-              <a:t>lo espiritual</a:t>
-            </a:r>
-            <a:r>
-              <a:rPr sz="1650" b="0" i="0" kern="0" spc="0">
-                <a:solidFill>
-                  <a:srgbClr val="FFFFFF"/>
-                </a:solidFill>
-                <a:latin typeface="Poppins"/>
-              </a:rPr>
-              <a:t> — la fractura es de práctica, no de fe.</a:t>
-            </a:r>
-          </a:p>
-        </p:txBody>
-      </p:sp>
-      <p:sp>
-        <p:nvSpPr>
-          <p:cNvPr id="8" name="TextBox 7"/>
-          <p:cNvSpPr txBox="1"/>
-          <p:nvPr/>
-        </p:nvSpPr>
-        <p:spPr>
-          <a:xfrm>
-            <a:off x="0" y="9429750"/>
-            <a:ext cx="18288000" cy="476250"/>
-          </a:xfrm>
-          <a:prstGeom prst="rect">
-            <a:avLst/>
-          </a:prstGeom>
-          <a:noFill/>
-        </p:spPr>
-        <p:txBody>
-          <a:bodyPr wrap="square" lIns="0" rIns="0" tIns="0" bIns="0">
-            <a:spAutoFit/>
-          </a:bodyPr>
-          <a:lstStyle/>
-          <a:p>
-            <a:pPr algn="ctr"/>
-            <a:r>
-              <a:rPr sz="1200" b="0" i="1" kern="0" spc="0">
-                <a:solidFill>
-                  <a:srgbClr val="9B9B9B"/>
-                </a:solidFill>
-                <a:latin typeface="Poppins"/>
-              </a:rPr>
-              <a:t>Source: Código Casa — Estudio cuantitativo + cualitativo 2025 · Q58 · Base 500.</a:t>
+              <a:rPr sz="1600" b="0" i="0" kern="0" spc="0">
+                <a:solidFill>
+                  <a:srgbClr val="FFFFFF"/>
+                </a:solidFill>
+                <a:latin typeface="Poppins"/>
+              </a:rPr>
+              <a:t>en hogares </a:t>
+            </a:r>
+            <a:r>
+              <a:rPr sz="1600" b="1" i="0" kern="0" spc="0">
+                <a:solidFill>
+                  <a:srgbClr val="FFFFFF"/>
+                </a:solidFill>
+                <a:latin typeface="Poppins"/>
+              </a:rPr>
+              <a:t>monoparentales</a:t>
+            </a:r>
+            <a:r>
+              <a:rPr sz="1600" b="0" i="0" kern="0" spc="0">
+                <a:solidFill>
+                  <a:srgbClr val="FFFFFF"/>
+                </a:solidFill>
+                <a:latin typeface="Poppins"/>
+              </a:rPr>
+              <a:t> declara no haber sido víctima — la cifra más baja de todas las tipologías, frente a 93.7% en biparental con hijos menores de 18. Q60 × tipología, Base 122.</a:t>
             </a:r>
           </a:p>
         </p:txBody>
@@ -7021,7 +7347,7 @@
           <a:p>
             <a:pPr algn="ctr"/>
             <a:r>
-              <a:rPr sz="1200" b="0" i="0" kern="0" spc="0">
+              <a:rPr sz="1400" b="0" i="0" kern="0" spc="0">
                 <a:solidFill>
                   <a:srgbClr val="9B9B9B"/>
                 </a:solidFill>
@@ -7034,48 +7360,36 @@
       </p:sp>
       <p:sp>
         <p:nvSpPr>
-          <p:cNvPr id="3" name="Rounded Rectangle 2"/>
-          <p:cNvSpPr/>
-          <p:nvPr/>
-        </p:nvSpPr>
-        <p:spPr>
-          <a:xfrm>
-            <a:off x="1343025" y="2095500"/>
-            <a:ext cx="15592425" cy="4619625"/>
-          </a:xfrm>
-          <a:prstGeom prst="roundRect">
-            <a:avLst>
-              <a:gd name="adj" fmla="val 5000"/>
-            </a:avLst>
-          </a:prstGeom>
-          <a:solidFill>
-            <a:srgbClr val="000000">
-              <a:alpha val="45000"/>
-            </a:srgbClr>
-          </a:solidFill>
-          <a:ln>
-            <a:noFill/>
-          </a:ln>
-        </p:spPr>
-        <p:style>
-          <a:lnRef idx="1">
-            <a:schemeClr val="accent1"/>
-          </a:lnRef>
-          <a:fillRef idx="3">
-            <a:schemeClr val="accent1"/>
-          </a:fillRef>
-          <a:effectRef idx="2">
-            <a:schemeClr val="accent1"/>
-          </a:effectRef>
-          <a:fontRef idx="minor">
-            <a:schemeClr val="lt1"/>
-          </a:fontRef>
-        </p:style>
-        <p:txBody>
-          <a:bodyPr rtlCol="0" anchor="ctr"/>
-          <a:lstStyle/>
-          <a:p>
-            <a:pPr algn="ctr"/>
+          <p:cNvPr id="3" name="TextBox 2"/>
+          <p:cNvSpPr txBox="1"/>
+          <p:nvPr/>
+        </p:nvSpPr>
+        <p:spPr>
+          <a:xfrm>
+            <a:off x="1343025" y="3143250"/>
+            <a:ext cx="15592425" cy="4286250"/>
+          </a:xfrm>
+          <a:prstGeom prst="rect">
+            <a:avLst/>
+          </a:prstGeom>
+          <a:noFill/>
+        </p:spPr>
+        <p:txBody>
+          <a:bodyPr wrap="square" lIns="0" rIns="0" tIns="0" bIns="0">
+            <a:spAutoFit/>
+          </a:bodyPr>
+          <a:lstStyle/>
+          <a:p>
+            <a:pPr algn="ctr"/>
+            <a:r>
+              <a:rPr sz="6000" i="0" b="0" kern="0" spc="0">
+                <a:solidFill>
+                  <a:srgbClr val="FFFFFF"/>
+                </a:solidFill>
+                <a:latin typeface="Instrument Serif"/>
+              </a:rPr>
+              <a:t>«La discriminación con la gente: que tú vas a una tienda aquí y si tú no vas bien vestido te miran mal, te vienen todos para acá y no vas a comprar nada.»</a:t>
+            </a:r>
           </a:p>
         </p:txBody>
       </p:sp>
@@ -7087,45 +7401,29 @@
         </p:nvSpPr>
         <p:spPr>
           <a:xfrm>
-            <a:off x="2105025" y="2667000"/>
-            <a:ext cx="14068425" cy="3476625"/>
-          </a:xfrm>
-          <a:prstGeom prst="rect">
-            <a:avLst/>
-          </a:prstGeom>
-          <a:noFill/>
-        </p:spPr>
-        <p:txBody>
-          <a:bodyPr wrap="square" lIns="0" rIns="0" tIns="0" bIns="0">
-            <a:spAutoFit/>
-          </a:bodyPr>
-          <a:lstStyle/>
-          <a:p>
-            <a:pPr algn="ctr"/>
-            <a:r>
-              <a:rPr sz="3750" i="0" b="0" kern="0" spc="0">
-                <a:solidFill>
-                  <a:srgbClr val="FFFFFF"/>
-                </a:solidFill>
-                <a:latin typeface="Instrument Serif"/>
-              </a:rPr>
-              <a:t>«Yo soy básicamente la nota discordante de ese entorno... yo no me rijo por la línea en la que va mi familia, sin embargo yo respeto lo que yo vi, yo entiendo que esa es la manera en la que las familias funcionan.»</a:t>
-            </a:r>
-          </a:p>
-          <a:p>
-            <a:pPr algn="ctr">
-              <a:spcBef>
-                <a:spcPts val="1000"/>
-              </a:spcBef>
-            </a:pPr>
-            <a:r>
-              <a:rPr sz="1650" i="1" b="0" kern="0" spc="0">
-                <a:solidFill>
-                  <a:srgbClr val="FFFFFF"/>
-                </a:solidFill>
-                <a:latin typeface="Poppins"/>
-              </a:rPr>
-              <a:t>— Familia Mixta</a:t>
+            <a:off x="0" y="6000750"/>
+            <a:ext cx="18288000" cy="571500"/>
+          </a:xfrm>
+          <a:prstGeom prst="rect">
+            <a:avLst/>
+          </a:prstGeom>
+          <a:noFill/>
+        </p:spPr>
+        <p:txBody>
+          <a:bodyPr wrap="square" lIns="0" rIns="0" tIns="0" bIns="0">
+            <a:spAutoFit/>
+          </a:bodyPr>
+          <a:lstStyle/>
+          <a:p>
+            <a:pPr algn="ctr"/>
+            <a:r>
+              <a:rPr sz="2000" b="0" i="1" kern="0" spc="0">
+                <a:solidFill>
+                  <a:srgbClr val="FFFFFF"/>
+                </a:solidFill>
+                <a:latin typeface="Poppins"/>
+              </a:rPr>
+              <a:t>— Familia Biparental con Hijos Adultos</a:t>
             </a:r>
           </a:p>
         </p:txBody>
@@ -7164,38 +7462,38 @@
         </p:nvSpPr>
         <p:spPr>
           <a:xfrm>
-            <a:off x="952500" y="952500"/>
-            <a:ext cx="16383000" cy="2857500"/>
-          </a:xfrm>
-          <a:prstGeom prst="rect">
-            <a:avLst/>
-          </a:prstGeom>
-          <a:noFill/>
-        </p:spPr>
-        <p:txBody>
-          <a:bodyPr wrap="square" lIns="0" rIns="0" tIns="0" bIns="0">
-            <a:spAutoFit/>
-          </a:bodyPr>
-          <a:lstStyle/>
-          <a:p>
-            <a:pPr algn="ctr"/>
-            <a:r>
-              <a:rPr sz="3150" b="0" i="0" kern="0" spc="0">
+            <a:off x="952500" y="762000"/>
+            <a:ext cx="16383000" cy="3048000"/>
+          </a:xfrm>
+          <a:prstGeom prst="rect">
+            <a:avLst/>
+          </a:prstGeom>
+          <a:noFill/>
+        </p:spPr>
+        <p:txBody>
+          <a:bodyPr wrap="square" lIns="0" rIns="0" tIns="0" bIns="0">
+            <a:spAutoFit/>
+          </a:bodyPr>
+          <a:lstStyle/>
+          <a:p>
+            <a:pPr algn="ctr"/>
+            <a:r>
+              <a:rPr sz="5000" b="0" i="0" kern="0" spc="0">
                 <a:solidFill>
                   <a:srgbClr val="FFFFFF"/>
                 </a:solidFill>
                 <a:latin typeface="Instrument Serif"/>
               </a:rPr>
-              <a:t>54.2% CALIFICA DE MUY BAJA LA INCLUSIÓN DE DISCAPACIDAD EN SU COMUNIDAD. </a:t>
-            </a:r>
-            <a:r>
-              <a:rPr sz="3150" b="0" i="1" kern="0" spc="0">
+              <a:t>54.2% CALIFICA DE MUY BAJA LA INCLUSIÓN DE DISCAPACIDAD EN SU COMUNIDAD. 61.8% CREE QUE ESA MISMA COMUNIDAD </a:t>
+            </a:r>
+            <a:r>
+              <a:rPr sz="5000" b="0" i="1" kern="0" spc="0">
                 <a:solidFill>
                   <a:srgbClr val="FFFFFF"/>
                 </a:solidFill>
                 <a:latin typeface="Instrument Serif"/>
               </a:rPr>
-              <a:t>EN EL ESTRATO D, EL 71.5% DICE QUE LA COMUNIDAD NO ESTÁ NADA PREPARADA PARA INCLUIRLA.</a:t>
+              <a:t>NO ESTÁ NADA PREPARADA PARA INCLUIR.</a:t>
             </a:r>
           </a:p>
         </p:txBody>
@@ -7208,7 +7506,7 @@
         </p:nvSpPr>
         <p:spPr>
           <a:xfrm>
-            <a:off x="6848475" y="4572000"/>
+            <a:off x="6848475" y="4381500"/>
             <a:ext cx="19050" cy="2647950"/>
           </a:xfrm>
           <a:prstGeom prst="rect">
@@ -7251,7 +7549,7 @@
         </p:nvSpPr>
         <p:spPr>
           <a:xfrm>
-            <a:off x="11420475" y="4572000"/>
+            <a:off x="11420475" y="4381500"/>
             <a:ext cx="19050" cy="2647950"/>
           </a:xfrm>
           <a:prstGeom prst="rect">
@@ -7294,7 +7592,7 @@
         </p:nvSpPr>
         <p:spPr>
           <a:xfrm>
-            <a:off x="1905000" y="4762500"/>
+            <a:off x="1905000" y="4572000"/>
             <a:ext cx="5334000" cy="1905000"/>
           </a:xfrm>
           <a:prstGeom prst="rect">
@@ -7329,7 +7627,7 @@
         </p:nvSpPr>
         <p:spPr>
           <a:xfrm>
-            <a:off x="1905000" y="6858000"/>
+            <a:off x="1905000" y="6667500"/>
             <a:ext cx="5334000" cy="1714500"/>
           </a:xfrm>
           <a:prstGeom prst="rect">
@@ -7345,7 +7643,7 @@
           <a:p>
             <a:pPr algn="ctr"/>
             <a:r>
-              <a:rPr sz="1650" b="0" i="0" kern="0" spc="0">
+              <a:rPr sz="1600" b="0" i="0" kern="0" spc="0">
                 <a:solidFill>
                   <a:srgbClr val="FFFFFF"/>
                 </a:solidFill>
@@ -7354,7 +7652,7 @@
               <a:t>califica de </a:t>
             </a:r>
             <a:r>
-              <a:rPr sz="1650" b="1" i="0" kern="0" spc="0">
+              <a:rPr sz="1600" b="1" i="0" kern="0" spc="0">
                 <a:solidFill>
                   <a:srgbClr val="FFFFFF"/>
                 </a:solidFill>
@@ -7363,13 +7661,13 @@
               <a:t>muy baja</a:t>
             </a:r>
             <a:r>
-              <a:rPr sz="1650" b="0" i="0" kern="0" spc="0">
-                <a:solidFill>
-                  <a:srgbClr val="FFFFFF"/>
-                </a:solidFill>
-                <a:latin typeface="Poppins"/>
-              </a:rPr>
-              <a:t> la inclusión de personas con discapacidad en su comunidad; solo 19.0% la califica de muy alta. Q61, Base 500.</a:t>
+              <a:rPr sz="1600" b="0" i="0" kern="0" spc="0">
+                <a:solidFill>
+                  <a:srgbClr val="FFFFFF"/>
+                </a:solidFill>
+                <a:latin typeface="Poppins"/>
+              </a:rPr>
+              <a:t> (nota 1 de 5) la inclusión de personas con discapacidad en su comunidad. Sumando notas 1 y 2, el 61.6% la reprueba. Q61, Base 500.</a:t>
             </a:r>
           </a:p>
         </p:txBody>
@@ -7382,7 +7680,7 @@
         </p:nvSpPr>
         <p:spPr>
           <a:xfrm>
-            <a:off x="6477000" y="4762500"/>
+            <a:off x="6477000" y="4572000"/>
             <a:ext cx="5334000" cy="1905000"/>
           </a:xfrm>
           <a:prstGeom prst="rect">
@@ -7417,7 +7715,7 @@
         </p:nvSpPr>
         <p:spPr>
           <a:xfrm>
-            <a:off x="6477000" y="6858000"/>
+            <a:off x="6477000" y="6667500"/>
             <a:ext cx="5334000" cy="1714500"/>
           </a:xfrm>
           <a:prstGeom prst="rect">
@@ -7433,16 +7731,16 @@
           <a:p>
             <a:pPr algn="ctr"/>
             <a:r>
-              <a:rPr sz="1650" b="0" i="0" kern="0" spc="0">
-                <a:solidFill>
-                  <a:srgbClr val="FFFFFF"/>
-                </a:solidFill>
-                <a:latin typeface="Poppins"/>
-              </a:rPr>
-              <a:t>cree que su comunidad no está </a:t>
-            </a:r>
-            <a:r>
-              <a:rPr sz="1650" b="1" i="0" kern="0" spc="0">
+              <a:rPr sz="1600" b="0" i="0" kern="0" spc="0">
+                <a:solidFill>
+                  <a:srgbClr val="FFFFFF"/>
+                </a:solidFill>
+                <a:latin typeface="Poppins"/>
+              </a:rPr>
+              <a:t>cree que su comunidad está "</a:t>
+            </a:r>
+            <a:r>
+              <a:rPr sz="1600" b="1" i="0" kern="0" spc="0">
                 <a:solidFill>
                   <a:srgbClr val="FFFFFF"/>
                 </a:solidFill>
@@ -7451,13 +7749,13 @@
               <a:t>nada preparada</a:t>
             </a:r>
             <a:r>
-              <a:rPr sz="1650" b="0" i="0" kern="0" spc="0">
-                <a:solidFill>
-                  <a:srgbClr val="FFFFFF"/>
-                </a:solidFill>
-                <a:latin typeface="Poppins"/>
-              </a:rPr>
-              <a:t> para incluir personas neurodivergentes o con discapacidad; solo 12.0% la ve muy preparada. Q63, Base 500.</a:t>
+              <a:rPr sz="1600" b="0" i="0" kern="0" spc="0">
+                <a:solidFill>
+                  <a:srgbClr val="FFFFFF"/>
+                </a:solidFill>
+                <a:latin typeface="Poppins"/>
+              </a:rPr>
+              <a:t>" para incluir personas neurodivergentes o con discapacidad en trabajo, escuela y transporte. Solo 12.0% la ve muy preparada. Q63, Base 500.</a:t>
             </a:r>
           </a:p>
         </p:txBody>
@@ -7470,7 +7768,7 @@
         </p:nvSpPr>
         <p:spPr>
           <a:xfrm>
-            <a:off x="11049000" y="4762500"/>
+            <a:off x="11049000" y="4572000"/>
             <a:ext cx="5334000" cy="1905000"/>
           </a:xfrm>
           <a:prstGeom prst="rect">
@@ -7505,7 +7803,7 @@
         </p:nvSpPr>
         <p:spPr>
           <a:xfrm>
-            <a:off x="11049000" y="6858000"/>
+            <a:off x="11049000" y="6667500"/>
             <a:ext cx="5334000" cy="1714500"/>
           </a:xfrm>
           <a:prstGeom prst="rect">
@@ -7521,16 +7819,16 @@
           <a:p>
             <a:pPr algn="ctr"/>
             <a:r>
-              <a:rPr sz="1650" b="0" i="0" kern="0" spc="0">
-                <a:solidFill>
-                  <a:srgbClr val="FFFFFF"/>
-                </a:solidFill>
-                <a:latin typeface="Poppins"/>
-              </a:rPr>
-              <a:t>del </a:t>
-            </a:r>
-            <a:r>
-              <a:rPr sz="1650" b="1" i="0" kern="0" spc="0">
+              <a:rPr sz="1600" b="0" i="0" kern="0" spc="0">
+                <a:solidFill>
+                  <a:srgbClr val="FFFFFF"/>
+                </a:solidFill>
+                <a:latin typeface="Poppins"/>
+              </a:rPr>
+              <a:t>"Nada preparada" sube en el </a:t>
+            </a:r>
+            <a:r>
+              <a:rPr sz="1600" b="1" i="0" kern="0" spc="0">
                 <a:solidFill>
                   <a:srgbClr val="FFFFFF"/>
                 </a:solidFill>
@@ -7539,48 +7837,13 @@
               <a:t>estrato D</a:t>
             </a:r>
             <a:r>
-              <a:rPr sz="1650" b="0" i="0" kern="0" spc="0">
-                <a:solidFill>
-                  <a:srgbClr val="FFFFFF"/>
-                </a:solidFill>
-                <a:latin typeface="Poppins"/>
-              </a:rPr>
-              <a:t> considera la comunidad no preparada, vs 70.6% de los mayores de 55. La exclusión percibida crece con la vulnerabilidad.</a:t>
-            </a:r>
-          </a:p>
-        </p:txBody>
-      </p:sp>
-      <p:sp>
-        <p:nvSpPr>
-          <p:cNvPr id="11" name="TextBox 10"/>
-          <p:cNvSpPr txBox="1"/>
-          <p:nvPr/>
-        </p:nvSpPr>
-        <p:spPr>
-          <a:xfrm>
-            <a:off x="0" y="9429750"/>
-            <a:ext cx="18288000" cy="476250"/>
-          </a:xfrm>
-          <a:prstGeom prst="rect">
-            <a:avLst/>
-          </a:prstGeom>
-          <a:noFill/>
-        </p:spPr>
-        <p:txBody>
-          <a:bodyPr wrap="square" lIns="0" rIns="0" tIns="0" bIns="0">
-            <a:spAutoFit/>
-          </a:bodyPr>
-          <a:lstStyle/>
-          <a:p>
-            <a:pPr algn="ctr"/>
-            <a:r>
-              <a:rPr sz="1200" b="0" i="1" kern="0" spc="0">
-                <a:solidFill>
-                  <a:srgbClr val="9B9B9B"/>
-                </a:solidFill>
-                <a:latin typeface="Poppins"/>
-              </a:rPr>
-              <a:t>Source: Código Casa — Estudio cuantitativo 2025 · Q61, Q63, Q63 × D6, Q63 × D5 · Base 500.</a:t>
+              <a:rPr sz="1600" b="0" i="0" kern="0" spc="0">
+                <a:solidFill>
+                  <a:srgbClr val="FFFFFF"/>
+                </a:solidFill>
+                <a:latin typeface="Poppins"/>
+              </a:rPr>
+              <a:t> (71.5%, n=172) y en mayores de 55 (70.6%, n=119), frente a 54.5% en 18–24. La exclusión percibida crece con la precariedad y la edad.</a:t>
             </a:r>
           </a:p>
         </p:txBody>

--- a/Agentes Hallazgos/sistema-de-creencias-deck-flat.pptx
+++ b/Agentes Hallazgos/sistema-de-creencias-deck-flat.pptx
@@ -3168,7 +3168,7 @@
         <p:spPr>
           <a:xfrm>
             <a:off x="6848475" y="4381500"/>
-            <a:ext cx="19050" cy="2647950"/>
+            <a:ext cx="19050" cy="1457325"/>
           </a:xfrm>
           <a:prstGeom prst="rect">
             <a:avLst/>
@@ -3211,7 +3211,7 @@
         <p:spPr>
           <a:xfrm>
             <a:off x="11420475" y="4381500"/>
-            <a:ext cx="19050" cy="2647950"/>
+            <a:ext cx="19050" cy="1457325"/>
           </a:xfrm>
           <a:prstGeom prst="rect">
             <a:avLst/>
@@ -3253,8 +3253,8 @@
         </p:nvSpPr>
         <p:spPr>
           <a:xfrm>
-            <a:off x="1905000" y="4572000"/>
-            <a:ext cx="5334000" cy="1905000"/>
+            <a:off x="2771775" y="4572000"/>
+            <a:ext cx="3600450" cy="1905000"/>
           </a:xfrm>
           <a:prstGeom prst="rect">
             <a:avLst/>
@@ -3288,23 +3288,23 @@
         </p:nvSpPr>
         <p:spPr>
           <a:xfrm>
-            <a:off x="1905000" y="6667500"/>
-            <a:ext cx="5334000" cy="1714500"/>
-          </a:xfrm>
-          <a:prstGeom prst="rect">
-            <a:avLst/>
-          </a:prstGeom>
-          <a:noFill/>
-        </p:spPr>
-        <p:txBody>
-          <a:bodyPr wrap="square" lIns="0" rIns="0" tIns="0" bIns="0">
-            <a:spAutoFit/>
-          </a:bodyPr>
-          <a:lstStyle/>
-          <a:p>
-            <a:pPr algn="ctr"/>
-            <a:r>
-              <a:rPr sz="1600" b="0" i="0" kern="0" spc="0">
+            <a:off x="2771775" y="6667500"/>
+            <a:ext cx="3600450" cy="1076325"/>
+          </a:xfrm>
+          <a:prstGeom prst="rect">
+            <a:avLst/>
+          </a:prstGeom>
+          <a:noFill/>
+        </p:spPr>
+        <p:txBody>
+          <a:bodyPr wrap="square" lIns="0" rIns="0" tIns="0" bIns="0">
+            <a:spAutoFit/>
+          </a:bodyPr>
+          <a:lstStyle/>
+          <a:p>
+            <a:pPr algn="ctr"/>
+            <a:r>
+              <a:rPr sz="1300" b="0" i="0" kern="0" spc="0">
                 <a:solidFill>
                   <a:srgbClr val="FFFFFF"/>
                 </a:solidFill>
@@ -3313,7 +3313,7 @@
               <a:t>está en desacuerdo con que una pareja del mismo sexo pueda </a:t>
             </a:r>
             <a:r>
-              <a:rPr sz="1600" b="1" i="0" kern="0" spc="0">
+              <a:rPr sz="1300" b="1" i="0" kern="0" spc="0">
                 <a:solidFill>
                   <a:srgbClr val="FFFFFF"/>
                 </a:solidFill>
@@ -3322,7 +3322,7 @@
               <a:t>adoptar legalmente</a:t>
             </a:r>
             <a:r>
-              <a:rPr sz="1600" b="0" i="0" kern="0" spc="0">
+              <a:rPr sz="1300" b="0" i="0" kern="0" spc="0">
                 <a:solidFill>
                   <a:srgbClr val="FFFFFF"/>
                 </a:solidFill>
@@ -3341,8 +3341,8 @@
         </p:nvSpPr>
         <p:spPr>
           <a:xfrm>
-            <a:off x="6477000" y="4572000"/>
-            <a:ext cx="5334000" cy="1905000"/>
+            <a:off x="7343775" y="4572000"/>
+            <a:ext cx="3600450" cy="1905000"/>
           </a:xfrm>
           <a:prstGeom prst="rect">
             <a:avLst/>
@@ -3376,23 +3376,23 @@
         </p:nvSpPr>
         <p:spPr>
           <a:xfrm>
-            <a:off x="6477000" y="6667500"/>
-            <a:ext cx="5334000" cy="1714500"/>
-          </a:xfrm>
-          <a:prstGeom prst="rect">
-            <a:avLst/>
-          </a:prstGeom>
-          <a:noFill/>
-        </p:spPr>
-        <p:txBody>
-          <a:bodyPr wrap="square" lIns="0" rIns="0" tIns="0" bIns="0">
-            <a:spAutoFit/>
-          </a:bodyPr>
-          <a:lstStyle/>
-          <a:p>
-            <a:pPr algn="ctr"/>
-            <a:r>
-              <a:rPr sz="1600" b="0" i="0" kern="0" spc="0">
+            <a:off x="7343775" y="6667500"/>
+            <a:ext cx="3600450" cy="1076325"/>
+          </a:xfrm>
+          <a:prstGeom prst="rect">
+            <a:avLst/>
+          </a:prstGeom>
+          <a:noFill/>
+        </p:spPr>
+        <p:txBody>
+          <a:bodyPr wrap="square" lIns="0" rIns="0" tIns="0" bIns="0">
+            <a:spAutoFit/>
+          </a:bodyPr>
+          <a:lstStyle/>
+          <a:p>
+            <a:pPr algn="ctr"/>
+            <a:r>
+              <a:rPr sz="1300" b="0" i="0" kern="0" spc="0">
                 <a:solidFill>
                   <a:srgbClr val="FFFFFF"/>
                 </a:solidFill>
@@ -3401,7 +3401,7 @@
               <a:t>acepta que </a:t>
             </a:r>
             <a:r>
-              <a:rPr sz="1600" b="1" i="0" kern="0" spc="0">
+              <a:rPr sz="1300" b="1" i="0" kern="0" spc="0">
                 <a:solidFill>
                   <a:srgbClr val="FFFFFF"/>
                 </a:solidFill>
@@ -3410,7 +3410,7 @@
               <a:t>compren una propiedad juntos</a:t>
             </a:r>
             <a:r>
-              <a:rPr sz="1600" b="0" i="0" kern="0" spc="0">
+              <a:rPr sz="1300" b="0" i="0" kern="0" spc="0">
                 <a:solidFill>
                   <a:srgbClr val="FFFFFF"/>
                 </a:solidFill>
@@ -3429,8 +3429,8 @@
         </p:nvSpPr>
         <p:spPr>
           <a:xfrm>
-            <a:off x="11049000" y="4572000"/>
-            <a:ext cx="5334000" cy="1905000"/>
+            <a:off x="11915775" y="4572000"/>
+            <a:ext cx="3600450" cy="1905000"/>
           </a:xfrm>
           <a:prstGeom prst="rect">
             <a:avLst/>
@@ -3464,23 +3464,23 @@
         </p:nvSpPr>
         <p:spPr>
           <a:xfrm>
-            <a:off x="11049000" y="6667500"/>
-            <a:ext cx="5334000" cy="1714500"/>
-          </a:xfrm>
-          <a:prstGeom prst="rect">
-            <a:avLst/>
-          </a:prstGeom>
-          <a:noFill/>
-        </p:spPr>
-        <p:txBody>
-          <a:bodyPr wrap="square" lIns="0" rIns="0" tIns="0" bIns="0">
-            <a:spAutoFit/>
-          </a:bodyPr>
-          <a:lstStyle/>
-          <a:p>
-            <a:pPr algn="ctr"/>
-            <a:r>
-              <a:rPr sz="1600" b="0" i="0" kern="0" spc="0">
+            <a:off x="11915775" y="6667500"/>
+            <a:ext cx="3600450" cy="1076325"/>
+          </a:xfrm>
+          <a:prstGeom prst="rect">
+            <a:avLst/>
+          </a:prstGeom>
+          <a:noFill/>
+        </p:spPr>
+        <p:txBody>
+          <a:bodyPr wrap="square" lIns="0" rIns="0" tIns="0" bIns="0">
+            <a:spAutoFit/>
+          </a:bodyPr>
+          <a:lstStyle/>
+          <a:p>
+            <a:pPr algn="ctr"/>
+            <a:r>
+              <a:rPr sz="1300" b="0" i="0" kern="0" spc="0">
                 <a:solidFill>
                   <a:srgbClr val="FFFFFF"/>
                 </a:solidFill>
@@ -3489,7 +3489,7 @@
               <a:t>está muy de acuerdo con el acceso a </a:t>
             </a:r>
             <a:r>
-              <a:rPr sz="1600" b="1" i="0" kern="0" spc="0">
+              <a:rPr sz="1300" b="1" i="0" kern="0" spc="0">
                 <a:solidFill>
                   <a:srgbClr val="FFFFFF"/>
                 </a:solidFill>
@@ -3498,7 +3498,7 @@
               <a:t>servicios de salud familiar</a:t>
             </a:r>
             <a:r>
-              <a:rPr sz="1600" b="0" i="0" kern="0" spc="0">
+              <a:rPr sz="1300" b="0" i="0" kern="0" spc="0">
                 <a:solidFill>
                   <a:srgbClr val="FFFFFF"/>
                 </a:solidFill>
@@ -3719,7 +3719,7 @@
         <p:spPr>
           <a:xfrm>
             <a:off x="9134475" y="4381500"/>
-            <a:ext cx="19050" cy="2647950"/>
+            <a:ext cx="19050" cy="1457325"/>
           </a:xfrm>
           <a:prstGeom prst="rect">
             <a:avLst/>
@@ -3761,8 +3761,8 @@
         </p:nvSpPr>
         <p:spPr>
           <a:xfrm>
-            <a:off x="1905000" y="4572000"/>
-            <a:ext cx="8382000" cy="1905000"/>
+            <a:off x="4295775" y="4572000"/>
+            <a:ext cx="3600450" cy="1905000"/>
           </a:xfrm>
           <a:prstGeom prst="rect">
             <a:avLst/>
@@ -3796,23 +3796,23 @@
         </p:nvSpPr>
         <p:spPr>
           <a:xfrm>
-            <a:off x="1905000" y="6667500"/>
-            <a:ext cx="8382000" cy="1714500"/>
-          </a:xfrm>
-          <a:prstGeom prst="rect">
-            <a:avLst/>
-          </a:prstGeom>
-          <a:noFill/>
-        </p:spPr>
-        <p:txBody>
-          <a:bodyPr wrap="square" lIns="0" rIns="0" tIns="0" bIns="0">
-            <a:spAutoFit/>
-          </a:bodyPr>
-          <a:lstStyle/>
-          <a:p>
-            <a:pPr algn="ctr"/>
-            <a:r>
-              <a:rPr sz="1600" b="0" i="0" kern="0" spc="0">
+            <a:off x="4295775" y="6667500"/>
+            <a:ext cx="3600450" cy="1076325"/>
+          </a:xfrm>
+          <a:prstGeom prst="rect">
+            <a:avLst/>
+          </a:prstGeom>
+          <a:noFill/>
+        </p:spPr>
+        <p:txBody>
+          <a:bodyPr wrap="square" lIns="0" rIns="0" tIns="0" bIns="0">
+            <a:spAutoFit/>
+          </a:bodyPr>
+          <a:lstStyle/>
+          <a:p>
+            <a:pPr algn="ctr"/>
+            <a:r>
+              <a:rPr sz="1300" b="0" i="0" kern="0" spc="0">
                 <a:solidFill>
                   <a:srgbClr val="FFFFFF"/>
                 </a:solidFill>
@@ -3821,7 +3821,7 @@
               <a:t>se siente "</a:t>
             </a:r>
             <a:r>
-              <a:rPr sz="1600" b="1" i="0" kern="0" spc="0">
+              <a:rPr sz="1300" b="1" i="0" kern="0" spc="0">
                 <a:solidFill>
                   <a:srgbClr val="FFFFFF"/>
                 </a:solidFill>
@@ -3830,7 +3830,7 @@
               <a:t>muy cómodo/a</a:t>
             </a:r>
             <a:r>
-              <a:rPr sz="1600" b="0" i="0" kern="0" spc="0">
+              <a:rPr sz="1300" b="0" i="0" kern="0" spc="0">
                 <a:solidFill>
                   <a:srgbClr val="FFFFFF"/>
                 </a:solidFill>
@@ -3849,8 +3849,8 @@
         </p:nvSpPr>
         <p:spPr>
           <a:xfrm>
-            <a:off x="8001000" y="4572000"/>
-            <a:ext cx="8382000" cy="1905000"/>
+            <a:off x="10391775" y="4572000"/>
+            <a:ext cx="3600450" cy="1905000"/>
           </a:xfrm>
           <a:prstGeom prst="rect">
             <a:avLst/>
@@ -3884,23 +3884,23 @@
         </p:nvSpPr>
         <p:spPr>
           <a:xfrm>
-            <a:off x="8001000" y="6667500"/>
-            <a:ext cx="8382000" cy="1714500"/>
-          </a:xfrm>
-          <a:prstGeom prst="rect">
-            <a:avLst/>
-          </a:prstGeom>
-          <a:noFill/>
-        </p:spPr>
-        <p:txBody>
-          <a:bodyPr wrap="square" lIns="0" rIns="0" tIns="0" bIns="0">
-            <a:spAutoFit/>
-          </a:bodyPr>
-          <a:lstStyle/>
-          <a:p>
-            <a:pPr algn="ctr"/>
-            <a:r>
-              <a:rPr sz="1600" b="0" i="0" kern="0" spc="0">
+            <a:off x="10391775" y="6667500"/>
+            <a:ext cx="3600450" cy="1076325"/>
+          </a:xfrm>
+          <a:prstGeom prst="rect">
+            <a:avLst/>
+          </a:prstGeom>
+          <a:noFill/>
+        </p:spPr>
+        <p:txBody>
+          <a:bodyPr wrap="square" lIns="0" rIns="0" tIns="0" bIns="0">
+            <a:spAutoFit/>
+          </a:bodyPr>
+          <a:lstStyle/>
+          <a:p>
+            <a:pPr algn="ctr"/>
+            <a:r>
+              <a:rPr sz="1300" b="0" i="0" kern="0" spc="0">
                 <a:solidFill>
                   <a:srgbClr val="FFFFFF"/>
                 </a:solidFill>
@@ -3909,7 +3909,7 @@
               <a:t>de las </a:t>
             </a:r>
             <a:r>
-              <a:rPr sz="1600" b="1" i="0" kern="0" spc="0">
+              <a:rPr sz="1300" b="1" i="0" kern="0" spc="0">
                 <a:solidFill>
                   <a:srgbClr val="FFFFFF"/>
                 </a:solidFill>
@@ -3918,7 +3918,7 @@
               <a:t>mujeres</a:t>
             </a:r>
             <a:r>
-              <a:rPr sz="1600" b="0" i="0" kern="0" spc="0">
+              <a:rPr sz="1300" b="0" i="0" kern="0" spc="0">
                 <a:solidFill>
                   <a:srgbClr val="FFFFFF"/>
                 </a:solidFill>
@@ -4138,8 +4138,8 @@
         </p:nvSpPr>
         <p:spPr>
           <a:xfrm>
-            <a:off x="5229225" y="4572000"/>
-            <a:ext cx="7829550" cy="1905000"/>
+            <a:off x="7343775" y="4572000"/>
+            <a:ext cx="3600450" cy="1905000"/>
           </a:xfrm>
           <a:prstGeom prst="rect">
             <a:avLst/>
@@ -4173,23 +4173,23 @@
         </p:nvSpPr>
         <p:spPr>
           <a:xfrm>
-            <a:off x="5229225" y="6667500"/>
-            <a:ext cx="7829550" cy="1714500"/>
-          </a:xfrm>
-          <a:prstGeom prst="rect">
-            <a:avLst/>
-          </a:prstGeom>
-          <a:noFill/>
-        </p:spPr>
-        <p:txBody>
-          <a:bodyPr wrap="square" lIns="0" rIns="0" tIns="0" bIns="0">
-            <a:spAutoFit/>
-          </a:bodyPr>
-          <a:lstStyle/>
-          <a:p>
-            <a:pPr algn="ctr"/>
-            <a:r>
-              <a:rPr sz="1600" b="0" i="0" kern="0" spc="0">
+            <a:off x="7343775" y="6667500"/>
+            <a:ext cx="3600450" cy="1076325"/>
+          </a:xfrm>
+          <a:prstGeom prst="rect">
+            <a:avLst/>
+          </a:prstGeom>
+          <a:noFill/>
+        </p:spPr>
+        <p:txBody>
+          <a:bodyPr wrap="square" lIns="0" rIns="0" tIns="0" bIns="0">
+            <a:spAutoFit/>
+          </a:bodyPr>
+          <a:lstStyle/>
+          <a:p>
+            <a:pPr algn="ctr"/>
+            <a:r>
+              <a:rPr sz="1300" b="0" i="0" kern="0" spc="0">
                 <a:solidFill>
                   <a:srgbClr val="FFFFFF"/>
                 </a:solidFill>
@@ -4198,7 +4198,7 @@
               <a:t>declara que algún hijo vivió </a:t>
             </a:r>
             <a:r>
-              <a:rPr sz="1600" b="1" i="0" kern="0" spc="0">
+              <a:rPr sz="1300" b="1" i="0" kern="0" spc="0">
                 <a:solidFill>
                   <a:srgbClr val="FFFFFF"/>
                 </a:solidFill>
@@ -4207,7 +4207,7 @@
               <a:t>acoso o bullying</a:t>
             </a:r>
             <a:r>
-              <a:rPr sz="1600" b="0" i="0" kern="0" spc="0">
+              <a:rPr sz="1300" b="0" i="0" kern="0" spc="0">
                 <a:solidFill>
                   <a:srgbClr val="FFFFFF"/>
                 </a:solidFill>
@@ -4428,7 +4428,7 @@
         <p:spPr>
           <a:xfrm>
             <a:off x="9134475" y="4381500"/>
-            <a:ext cx="19050" cy="2647950"/>
+            <a:ext cx="19050" cy="1457325"/>
           </a:xfrm>
           <a:prstGeom prst="rect">
             <a:avLst/>
@@ -4470,8 +4470,8 @@
         </p:nvSpPr>
         <p:spPr>
           <a:xfrm>
-            <a:off x="1905000" y="4572000"/>
-            <a:ext cx="8382000" cy="1905000"/>
+            <a:off x="4295775" y="4572000"/>
+            <a:ext cx="3600450" cy="1905000"/>
           </a:xfrm>
           <a:prstGeom prst="rect">
             <a:avLst/>
@@ -4505,23 +4505,23 @@
         </p:nvSpPr>
         <p:spPr>
           <a:xfrm>
-            <a:off x="1905000" y="6667500"/>
-            <a:ext cx="8382000" cy="1714500"/>
-          </a:xfrm>
-          <a:prstGeom prst="rect">
-            <a:avLst/>
-          </a:prstGeom>
-          <a:noFill/>
-        </p:spPr>
-        <p:txBody>
-          <a:bodyPr wrap="square" lIns="0" rIns="0" tIns="0" bIns="0">
-            <a:spAutoFit/>
-          </a:bodyPr>
-          <a:lstStyle/>
-          <a:p>
-            <a:pPr algn="ctr"/>
-            <a:r>
-              <a:rPr sz="1600" b="0" i="0" kern="0" spc="0">
+            <a:off x="4295775" y="6667500"/>
+            <a:ext cx="3600450" cy="1076325"/>
+          </a:xfrm>
+          <a:prstGeom prst="rect">
+            <a:avLst/>
+          </a:prstGeom>
+          <a:noFill/>
+        </p:spPr>
+        <p:txBody>
+          <a:bodyPr wrap="square" lIns="0" rIns="0" tIns="0" bIns="0">
+            <a:spAutoFit/>
+          </a:bodyPr>
+          <a:lstStyle/>
+          <a:p>
+            <a:pPr algn="ctr"/>
+            <a:r>
+              <a:rPr sz="1300" b="0" i="0" kern="0" spc="0">
                 <a:solidFill>
                   <a:srgbClr val="FFFFFF"/>
                 </a:solidFill>
@@ -4530,7 +4530,7 @@
               <a:t>elige "que los </a:t>
             </a:r>
             <a:r>
-              <a:rPr sz="1600" b="1" i="0" kern="0" spc="0">
+              <a:rPr sz="1300" b="1" i="0" kern="0" spc="0">
                 <a:solidFill>
                   <a:srgbClr val="FFFFFF"/>
                 </a:solidFill>
@@ -4539,7 +4539,7 @@
               <a:t>padres estén más presentes</a:t>
             </a:r>
             <a:r>
-              <a:rPr sz="1600" b="0" i="0" kern="0" spc="0">
+              <a:rPr sz="1300" b="0" i="0" kern="0" spc="0">
                 <a:solidFill>
                   <a:srgbClr val="FFFFFF"/>
                 </a:solidFill>
@@ -4558,8 +4558,8 @@
         </p:nvSpPr>
         <p:spPr>
           <a:xfrm>
-            <a:off x="8001000" y="4572000"/>
-            <a:ext cx="8382000" cy="1905000"/>
+            <a:off x="10391775" y="4572000"/>
+            <a:ext cx="3600450" cy="1905000"/>
           </a:xfrm>
           <a:prstGeom prst="rect">
             <a:avLst/>
@@ -4593,23 +4593,23 @@
         </p:nvSpPr>
         <p:spPr>
           <a:xfrm>
-            <a:off x="8001000" y="6667500"/>
-            <a:ext cx="8382000" cy="1714500"/>
-          </a:xfrm>
-          <a:prstGeom prst="rect">
-            <a:avLst/>
-          </a:prstGeom>
-          <a:noFill/>
-        </p:spPr>
-        <p:txBody>
-          <a:bodyPr wrap="square" lIns="0" rIns="0" tIns="0" bIns="0">
-            <a:spAutoFit/>
-          </a:bodyPr>
-          <a:lstStyle/>
-          <a:p>
-            <a:pPr algn="ctr"/>
-            <a:r>
-              <a:rPr sz="1600" b="0" i="0" kern="0" spc="0">
+            <a:off x="10391775" y="6667500"/>
+            <a:ext cx="3600450" cy="1076325"/>
+          </a:xfrm>
+          <a:prstGeom prst="rect">
+            <a:avLst/>
+          </a:prstGeom>
+          <a:noFill/>
+        </p:spPr>
+        <p:txBody>
+          <a:bodyPr wrap="square" lIns="0" rIns="0" tIns="0" bIns="0">
+            <a:spAutoFit/>
+          </a:bodyPr>
+          <a:lstStyle/>
+          <a:p>
+            <a:pPr algn="ctr"/>
+            <a:r>
+              <a:rPr sz="1300" b="0" i="0" kern="0" spc="0">
                 <a:solidFill>
                   <a:srgbClr val="FFFFFF"/>
                 </a:solidFill>
@@ -4618,7 +4618,7 @@
               <a:t>elige </a:t>
             </a:r>
             <a:r>
-              <a:rPr sz="1600" b="1" i="0" kern="0" spc="0">
+              <a:rPr sz="1300" b="1" i="0" kern="0" spc="0">
                 <a:solidFill>
                   <a:srgbClr val="FFFFFF"/>
                 </a:solidFill>
@@ -4627,7 +4627,7 @@
               <a:t>flexibilidad laboral para ambos padres</a:t>
             </a:r>
             <a:r>
-              <a:rPr sz="1600" b="0" i="0" kern="0" spc="0">
+              <a:rPr sz="1300" b="0" i="0" kern="0" spc="0">
                 <a:solidFill>
                   <a:srgbClr val="FFFFFF"/>
                 </a:solidFill>
@@ -4848,7 +4848,7 @@
         <p:spPr>
           <a:xfrm>
             <a:off x="9134475" y="4381500"/>
-            <a:ext cx="19050" cy="2647950"/>
+            <a:ext cx="19050" cy="1457325"/>
           </a:xfrm>
           <a:prstGeom prst="rect">
             <a:avLst/>
@@ -4890,8 +4890,8 @@
         </p:nvSpPr>
         <p:spPr>
           <a:xfrm>
-            <a:off x="1905000" y="4572000"/>
-            <a:ext cx="8382000" cy="1905000"/>
+            <a:off x="4295775" y="4572000"/>
+            <a:ext cx="3600450" cy="1905000"/>
           </a:xfrm>
           <a:prstGeom prst="rect">
             <a:avLst/>
@@ -4925,23 +4925,23 @@
         </p:nvSpPr>
         <p:spPr>
           <a:xfrm>
-            <a:off x="1905000" y="6667500"/>
-            <a:ext cx="8382000" cy="1714500"/>
-          </a:xfrm>
-          <a:prstGeom prst="rect">
-            <a:avLst/>
-          </a:prstGeom>
-          <a:noFill/>
-        </p:spPr>
-        <p:txBody>
-          <a:bodyPr wrap="square" lIns="0" rIns="0" tIns="0" bIns="0">
-            <a:spAutoFit/>
-          </a:bodyPr>
-          <a:lstStyle/>
-          <a:p>
-            <a:pPr algn="ctr"/>
-            <a:r>
-              <a:rPr sz="1600" b="0" i="0" kern="0" spc="0">
+            <a:off x="4295775" y="6667500"/>
+            <a:ext cx="3600450" cy="1076325"/>
+          </a:xfrm>
+          <a:prstGeom prst="rect">
+            <a:avLst/>
+          </a:prstGeom>
+          <a:noFill/>
+        </p:spPr>
+        <p:txBody>
+          <a:bodyPr wrap="square" lIns="0" rIns="0" tIns="0" bIns="0">
+            <a:spAutoFit/>
+          </a:bodyPr>
+          <a:lstStyle/>
+          <a:p>
+            <a:pPr algn="ctr"/>
+            <a:r>
+              <a:rPr sz="1300" b="0" i="0" kern="0" spc="0">
                 <a:solidFill>
                   <a:srgbClr val="FFFFFF"/>
                 </a:solidFill>
@@ -4950,7 +4950,7 @@
               <a:t>reporta </a:t>
             </a:r>
             <a:r>
-              <a:rPr sz="1600" b="1" i="0" kern="0" spc="0">
+              <a:rPr sz="1300" b="1" i="0" kern="0" spc="0">
                 <a:solidFill>
                   <a:srgbClr val="FFFFFF"/>
                 </a:solidFill>
@@ -4959,7 +4959,7 @@
               <a:t>violencia económica</a:t>
             </a:r>
             <a:r>
-              <a:rPr sz="1600" b="0" i="0" kern="0" spc="0">
+              <a:rPr sz="1300" b="0" i="0" kern="0" spc="0">
                 <a:solidFill>
                   <a:srgbClr val="FFFFFF"/>
                 </a:solidFill>
@@ -4978,8 +4978,8 @@
         </p:nvSpPr>
         <p:spPr>
           <a:xfrm>
-            <a:off x="8001000" y="4572000"/>
-            <a:ext cx="8382000" cy="1905000"/>
+            <a:off x="10391775" y="4572000"/>
+            <a:ext cx="3600450" cy="1905000"/>
           </a:xfrm>
           <a:prstGeom prst="rect">
             <a:avLst/>
@@ -5013,23 +5013,23 @@
         </p:nvSpPr>
         <p:spPr>
           <a:xfrm>
-            <a:off x="8001000" y="6667500"/>
-            <a:ext cx="8382000" cy="1714500"/>
-          </a:xfrm>
-          <a:prstGeom prst="rect">
-            <a:avLst/>
-          </a:prstGeom>
-          <a:noFill/>
-        </p:spPr>
-        <p:txBody>
-          <a:bodyPr wrap="square" lIns="0" rIns="0" tIns="0" bIns="0">
-            <a:spAutoFit/>
-          </a:bodyPr>
-          <a:lstStyle/>
-          <a:p>
-            <a:pPr algn="ctr"/>
-            <a:r>
-              <a:rPr sz="1600" b="0" i="0" kern="0" spc="0">
+            <a:off x="10391775" y="6667500"/>
+            <a:ext cx="3600450" cy="1076325"/>
+          </a:xfrm>
+          <a:prstGeom prst="rect">
+            <a:avLst/>
+          </a:prstGeom>
+          <a:noFill/>
+        </p:spPr>
+        <p:txBody>
+          <a:bodyPr wrap="square" lIns="0" rIns="0" tIns="0" bIns="0">
+            <a:spAutoFit/>
+          </a:bodyPr>
+          <a:lstStyle/>
+          <a:p>
+            <a:pPr algn="ctr"/>
+            <a:r>
+              <a:rPr sz="1300" b="0" i="0" kern="0" spc="0">
                 <a:solidFill>
                   <a:srgbClr val="FFFFFF"/>
                 </a:solidFill>
@@ -5038,7 +5038,7 @@
               <a:t>declara no haber sufrido </a:t>
             </a:r>
             <a:r>
-              <a:rPr sz="1600" b="1" i="0" kern="0" spc="0">
+              <a:rPr sz="1300" b="1" i="0" kern="0" spc="0">
                 <a:solidFill>
                   <a:srgbClr val="FFFFFF"/>
                 </a:solidFill>
@@ -5047,7 +5047,7 @@
               <a:t>ningún tipo de violencia</a:t>
             </a:r>
             <a:r>
-              <a:rPr sz="1600" b="0" i="0" kern="0" spc="0">
+              <a:rPr sz="1300" b="0" i="0" kern="0" spc="0">
                 <a:solidFill>
                   <a:srgbClr val="FFFFFF"/>
                 </a:solidFill>
@@ -5268,7 +5268,7 @@
         <p:spPr>
           <a:xfrm>
             <a:off x="9134475" y="4381500"/>
-            <a:ext cx="19050" cy="2647950"/>
+            <a:ext cx="19050" cy="1457325"/>
           </a:xfrm>
           <a:prstGeom prst="rect">
             <a:avLst/>
@@ -5310,8 +5310,8 @@
         </p:nvSpPr>
         <p:spPr>
           <a:xfrm>
-            <a:off x="1905000" y="4572000"/>
-            <a:ext cx="8382000" cy="1905000"/>
+            <a:off x="4295775" y="4572000"/>
+            <a:ext cx="3600450" cy="1905000"/>
           </a:xfrm>
           <a:prstGeom prst="rect">
             <a:avLst/>
@@ -5345,23 +5345,23 @@
         </p:nvSpPr>
         <p:spPr>
           <a:xfrm>
-            <a:off x="1905000" y="6667500"/>
-            <a:ext cx="8382000" cy="1714500"/>
-          </a:xfrm>
-          <a:prstGeom prst="rect">
-            <a:avLst/>
-          </a:prstGeom>
-          <a:noFill/>
-        </p:spPr>
-        <p:txBody>
-          <a:bodyPr wrap="square" lIns="0" rIns="0" tIns="0" bIns="0">
-            <a:spAutoFit/>
-          </a:bodyPr>
-          <a:lstStyle/>
-          <a:p>
-            <a:pPr algn="ctr"/>
-            <a:r>
-              <a:rPr sz="1600" b="0" i="0" kern="0" spc="0">
+            <a:off x="4295775" y="6667500"/>
+            <a:ext cx="3600450" cy="1076325"/>
+          </a:xfrm>
+          <a:prstGeom prst="rect">
+            <a:avLst/>
+          </a:prstGeom>
+          <a:noFill/>
+        </p:spPr>
+        <p:txBody>
+          <a:bodyPr wrap="square" lIns="0" rIns="0" tIns="0" bIns="0">
+            <a:spAutoFit/>
+          </a:bodyPr>
+          <a:lstStyle/>
+          <a:p>
+            <a:pPr algn="ctr"/>
+            <a:r>
+              <a:rPr sz="1300" b="0" i="0" kern="0" spc="0">
                 <a:solidFill>
                   <a:srgbClr val="FFFFFF"/>
                 </a:solidFill>
@@ -5370,7 +5370,7 @@
               <a:t>responde "</a:t>
             </a:r>
             <a:r>
-              <a:rPr sz="1600" b="1" i="0" kern="0" spc="0">
+              <a:rPr sz="1300" b="1" i="0" kern="0" spc="0">
                 <a:solidFill>
                   <a:srgbClr val="FFFFFF"/>
                 </a:solidFill>
@@ -5379,7 +5379,7 @@
               <a:t>yo mismo/a</a:t>
             </a:r>
             <a:r>
-              <a:rPr sz="1600" b="0" i="0" kern="0" spc="0">
+              <a:rPr sz="1300" b="0" i="0" kern="0" spc="0">
                 <a:solidFill>
                   <a:srgbClr val="FFFFFF"/>
                 </a:solidFill>
@@ -5398,8 +5398,8 @@
         </p:nvSpPr>
         <p:spPr>
           <a:xfrm>
-            <a:off x="8001000" y="4572000"/>
-            <a:ext cx="8382000" cy="1905000"/>
+            <a:off x="10391775" y="4572000"/>
+            <a:ext cx="3600450" cy="1905000"/>
           </a:xfrm>
           <a:prstGeom prst="rect">
             <a:avLst/>
@@ -5433,23 +5433,23 @@
         </p:nvSpPr>
         <p:spPr>
           <a:xfrm>
-            <a:off x="8001000" y="6667500"/>
-            <a:ext cx="8382000" cy="1714500"/>
-          </a:xfrm>
-          <a:prstGeom prst="rect">
-            <a:avLst/>
-          </a:prstGeom>
-          <a:noFill/>
-        </p:spPr>
-        <p:txBody>
-          <a:bodyPr wrap="square" lIns="0" rIns="0" tIns="0" bIns="0">
-            <a:spAutoFit/>
-          </a:bodyPr>
-          <a:lstStyle/>
-          <a:p>
-            <a:pPr algn="ctr"/>
-            <a:r>
-              <a:rPr sz="1600" b="0" i="0" kern="0" spc="0">
+            <a:off x="10391775" y="6667500"/>
+            <a:ext cx="3600450" cy="1076325"/>
+          </a:xfrm>
+          <a:prstGeom prst="rect">
+            <a:avLst/>
+          </a:prstGeom>
+          <a:noFill/>
+        </p:spPr>
+        <p:txBody>
+          <a:bodyPr wrap="square" lIns="0" rIns="0" tIns="0" bIns="0">
+            <a:spAutoFit/>
+          </a:bodyPr>
+          <a:lstStyle/>
+          <a:p>
+            <a:pPr algn="ctr"/>
+            <a:r>
+              <a:rPr sz="1300" b="0" i="0" kern="0" spc="0">
                 <a:solidFill>
                   <a:srgbClr val="FFFFFF"/>
                 </a:solidFill>
@@ -5458,7 +5458,7 @@
               <a:t>no convive con ninguna </a:t>
             </a:r>
             <a:r>
-              <a:rPr sz="1600" b="1" i="0" kern="0" spc="0">
+              <a:rPr sz="1300" b="1" i="0" kern="0" spc="0">
                 <a:solidFill>
                   <a:srgbClr val="FFFFFF"/>
                 </a:solidFill>
@@ -5467,7 +5467,7 @@
               <a:t>persona mayor</a:t>
             </a:r>
             <a:r>
-              <a:rPr sz="1600" b="0" i="0" kern="0" spc="0">
+              <a:rPr sz="1300" b="0" i="0" kern="0" spc="0">
                 <a:solidFill>
                   <a:srgbClr val="FFFFFF"/>
                 </a:solidFill>
@@ -5688,7 +5688,7 @@
         <p:spPr>
           <a:xfrm>
             <a:off x="9134475" y="4381500"/>
-            <a:ext cx="19050" cy="2647950"/>
+            <a:ext cx="19050" cy="1457325"/>
           </a:xfrm>
           <a:prstGeom prst="rect">
             <a:avLst/>
@@ -5730,8 +5730,8 @@
         </p:nvSpPr>
         <p:spPr>
           <a:xfrm>
-            <a:off x="1905000" y="4572000"/>
-            <a:ext cx="8382000" cy="1905000"/>
+            <a:off x="4295775" y="4572000"/>
+            <a:ext cx="3600450" cy="1905000"/>
           </a:xfrm>
           <a:prstGeom prst="rect">
             <a:avLst/>
@@ -5765,23 +5765,23 @@
         </p:nvSpPr>
         <p:spPr>
           <a:xfrm>
-            <a:off x="1905000" y="6667500"/>
-            <a:ext cx="8382000" cy="1714500"/>
-          </a:xfrm>
-          <a:prstGeom prst="rect">
-            <a:avLst/>
-          </a:prstGeom>
-          <a:noFill/>
-        </p:spPr>
-        <p:txBody>
-          <a:bodyPr wrap="square" lIns="0" rIns="0" tIns="0" bIns="0">
-            <a:spAutoFit/>
-          </a:bodyPr>
-          <a:lstStyle/>
-          <a:p>
-            <a:pPr algn="ctr"/>
-            <a:r>
-              <a:rPr sz="1600" b="0" i="0" kern="0" spc="0">
+            <a:off x="4295775" y="6667500"/>
+            <a:ext cx="3600450" cy="1076325"/>
+          </a:xfrm>
+          <a:prstGeom prst="rect">
+            <a:avLst/>
+          </a:prstGeom>
+          <a:noFill/>
+        </p:spPr>
+        <p:txBody>
+          <a:bodyPr wrap="square" lIns="0" rIns="0" tIns="0" bIns="0">
+            <a:spAutoFit/>
+          </a:bodyPr>
+          <a:lstStyle/>
+          <a:p>
+            <a:pPr algn="ctr"/>
+            <a:r>
+              <a:rPr sz="1300" b="0" i="0" kern="0" spc="0">
                 <a:solidFill>
                   <a:srgbClr val="FFFFFF"/>
                 </a:solidFill>
@@ -5790,7 +5790,7 @@
               <a:t>menciona </a:t>
             </a:r>
             <a:r>
-              <a:rPr sz="1600" b="1" i="0" kern="0" spc="0">
+              <a:rPr sz="1300" b="1" i="0" kern="0" spc="0">
                 <a:solidFill>
                   <a:srgbClr val="FFFFFF"/>
                 </a:solidFill>
@@ -5799,7 +5799,7 @@
               <a:t>pensiones o apoyos económicos suficientes</a:t>
             </a:r>
             <a:r>
-              <a:rPr sz="1600" b="0" i="0" kern="0" spc="0">
+              <a:rPr sz="1300" b="0" i="0" kern="0" spc="0">
                 <a:solidFill>
                   <a:srgbClr val="FFFFFF"/>
                 </a:solidFill>
@@ -5818,8 +5818,8 @@
         </p:nvSpPr>
         <p:spPr>
           <a:xfrm>
-            <a:off x="8001000" y="4572000"/>
-            <a:ext cx="8382000" cy="1905000"/>
+            <a:off x="10391775" y="4572000"/>
+            <a:ext cx="3600450" cy="1905000"/>
           </a:xfrm>
           <a:prstGeom prst="rect">
             <a:avLst/>
@@ -5853,23 +5853,23 @@
         </p:nvSpPr>
         <p:spPr>
           <a:xfrm>
-            <a:off x="8001000" y="6667500"/>
-            <a:ext cx="8382000" cy="1714500"/>
-          </a:xfrm>
-          <a:prstGeom prst="rect">
-            <a:avLst/>
-          </a:prstGeom>
-          <a:noFill/>
-        </p:spPr>
-        <p:txBody>
-          <a:bodyPr wrap="square" lIns="0" rIns="0" tIns="0" bIns="0">
-            <a:spAutoFit/>
-          </a:bodyPr>
-          <a:lstStyle/>
-          <a:p>
-            <a:pPr algn="ctr"/>
-            <a:r>
-              <a:rPr sz="1600" b="0" i="0" kern="0" spc="0">
+            <a:off x="10391775" y="6667500"/>
+            <a:ext cx="3600450" cy="1076325"/>
+          </a:xfrm>
+          <a:prstGeom prst="rect">
+            <a:avLst/>
+          </a:prstGeom>
+          <a:noFill/>
+        </p:spPr>
+        <p:txBody>
+          <a:bodyPr wrap="square" lIns="0" rIns="0" tIns="0" bIns="0">
+            <a:spAutoFit/>
+          </a:bodyPr>
+          <a:lstStyle/>
+          <a:p>
+            <a:pPr algn="ctr"/>
+            <a:r>
+              <a:rPr sz="1300" b="0" i="0" kern="0" spc="0">
                 <a:solidFill>
                   <a:srgbClr val="FFFFFF"/>
                 </a:solidFill>
@@ -5878,7 +5878,7 @@
               <a:t>menciona </a:t>
             </a:r>
             <a:r>
-              <a:rPr sz="1600" b="1" i="0" kern="0" spc="0">
+              <a:rPr sz="1300" b="1" i="0" kern="0" spc="0">
                 <a:solidFill>
                   <a:srgbClr val="FFFFFF"/>
                 </a:solidFill>
@@ -5887,7 +5887,7 @@
               <a:t>acceso gratuito o asequible a salud</a:t>
             </a:r>
             <a:r>
-              <a:rPr sz="1600" b="0" i="0" kern="0" spc="0">
+              <a:rPr sz="1300" b="0" i="0" kern="0" spc="0">
                 <a:solidFill>
                   <a:srgbClr val="FFFFFF"/>
                 </a:solidFill>
@@ -6247,7 +6247,7 @@
         <p:spPr>
           <a:xfrm>
             <a:off x="6848475" y="4381500"/>
-            <a:ext cx="19050" cy="2647950"/>
+            <a:ext cx="19050" cy="1457325"/>
           </a:xfrm>
           <a:prstGeom prst="rect">
             <a:avLst/>
@@ -6290,7 +6290,7 @@
         <p:spPr>
           <a:xfrm>
             <a:off x="11420475" y="4381500"/>
-            <a:ext cx="19050" cy="2647950"/>
+            <a:ext cx="19050" cy="1457325"/>
           </a:xfrm>
           <a:prstGeom prst="rect">
             <a:avLst/>
@@ -6332,8 +6332,8 @@
         </p:nvSpPr>
         <p:spPr>
           <a:xfrm>
-            <a:off x="1905000" y="4572000"/>
-            <a:ext cx="5334000" cy="1905000"/>
+            <a:off x="2771775" y="4572000"/>
+            <a:ext cx="3600450" cy="1905000"/>
           </a:xfrm>
           <a:prstGeom prst="rect">
             <a:avLst/>
@@ -6367,23 +6367,23 @@
         </p:nvSpPr>
         <p:spPr>
           <a:xfrm>
-            <a:off x="1905000" y="6667500"/>
-            <a:ext cx="5334000" cy="1714500"/>
-          </a:xfrm>
-          <a:prstGeom prst="rect">
-            <a:avLst/>
-          </a:prstGeom>
-          <a:noFill/>
-        </p:spPr>
-        <p:txBody>
-          <a:bodyPr wrap="square" lIns="0" rIns="0" tIns="0" bIns="0">
-            <a:spAutoFit/>
-          </a:bodyPr>
-          <a:lstStyle/>
-          <a:p>
-            <a:pPr algn="ctr"/>
-            <a:r>
-              <a:rPr sz="1600" b="0" i="0" kern="0" spc="0">
+            <a:off x="2771775" y="6667500"/>
+            <a:ext cx="3600450" cy="1076325"/>
+          </a:xfrm>
+          <a:prstGeom prst="rect">
+            <a:avLst/>
+          </a:prstGeom>
+          <a:noFill/>
+        </p:spPr>
+        <p:txBody>
+          <a:bodyPr wrap="square" lIns="0" rIns="0" tIns="0" bIns="0">
+            <a:spAutoFit/>
+          </a:bodyPr>
+          <a:lstStyle/>
+          <a:p>
+            <a:pPr algn="ctr"/>
+            <a:r>
+              <a:rPr sz="1300" b="0" i="0" kern="0" spc="0">
                 <a:solidFill>
                   <a:srgbClr val="FFFFFF"/>
                 </a:solidFill>
@@ -6392,7 +6392,7 @@
               <a:t>recurre </a:t>
             </a:r>
             <a:r>
-              <a:rPr sz="1600" b="1" i="0" kern="0" spc="0">
+              <a:rPr sz="1300" b="1" i="0" kern="0" spc="0">
                 <a:solidFill>
                   <a:srgbClr val="FFFFFF"/>
                 </a:solidFill>
@@ -6401,7 +6401,7 @@
               <a:t>siempre</a:t>
             </a:r>
             <a:r>
-              <a:rPr sz="1600" b="0" i="0" kern="0" spc="0">
+              <a:rPr sz="1300" b="0" i="0" kern="0" spc="0">
                 <a:solidFill>
                   <a:srgbClr val="FFFFFF"/>
                 </a:solidFill>
@@ -6420,8 +6420,8 @@
         </p:nvSpPr>
         <p:spPr>
           <a:xfrm>
-            <a:off x="6477000" y="4572000"/>
-            <a:ext cx="5334000" cy="1905000"/>
+            <a:off x="7343775" y="4572000"/>
+            <a:ext cx="3600450" cy="1905000"/>
           </a:xfrm>
           <a:prstGeom prst="rect">
             <a:avLst/>
@@ -6455,23 +6455,23 @@
         </p:nvSpPr>
         <p:spPr>
           <a:xfrm>
-            <a:off x="6477000" y="6667500"/>
-            <a:ext cx="5334000" cy="1714500"/>
-          </a:xfrm>
-          <a:prstGeom prst="rect">
-            <a:avLst/>
-          </a:prstGeom>
-          <a:noFill/>
-        </p:spPr>
-        <p:txBody>
-          <a:bodyPr wrap="square" lIns="0" rIns="0" tIns="0" bIns="0">
-            <a:spAutoFit/>
-          </a:bodyPr>
-          <a:lstStyle/>
-          <a:p>
-            <a:pPr algn="ctr"/>
-            <a:r>
-              <a:rPr sz="1600" b="0" i="0" kern="0" spc="0">
+            <a:off x="7343775" y="6667500"/>
+            <a:ext cx="3600450" cy="1076325"/>
+          </a:xfrm>
+          <a:prstGeom prst="rect">
+            <a:avLst/>
+          </a:prstGeom>
+          <a:noFill/>
+        </p:spPr>
+        <p:txBody>
+          <a:bodyPr wrap="square" lIns="0" rIns="0" tIns="0" bIns="0">
+            <a:spAutoFit/>
+          </a:bodyPr>
+          <a:lstStyle/>
+          <a:p>
+            <a:pPr algn="ctr"/>
+            <a:r>
+              <a:rPr sz="1300" b="0" i="0" kern="0" spc="0">
                 <a:solidFill>
                   <a:srgbClr val="FFFFFF"/>
                 </a:solidFill>
@@ -6480,7 +6480,7 @@
               <a:t>de las </a:t>
             </a:r>
             <a:r>
-              <a:rPr sz="1600" b="1" i="0" kern="0" spc="0">
+              <a:rPr sz="1300" b="1" i="0" kern="0" spc="0">
                 <a:solidFill>
                   <a:srgbClr val="FFFFFF"/>
                 </a:solidFill>
@@ -6489,7 +6489,7 @@
               <a:t>mujeres</a:t>
             </a:r>
             <a:r>
-              <a:rPr sz="1600" b="0" i="0" kern="0" spc="0">
+              <a:rPr sz="1300" b="0" i="0" kern="0" spc="0">
                 <a:solidFill>
                   <a:srgbClr val="FFFFFF"/>
                 </a:solidFill>
@@ -6508,8 +6508,8 @@
         </p:nvSpPr>
         <p:spPr>
           <a:xfrm>
-            <a:off x="11049000" y="4572000"/>
-            <a:ext cx="5334000" cy="1905000"/>
+            <a:off x="11915775" y="4572000"/>
+            <a:ext cx="3600450" cy="1905000"/>
           </a:xfrm>
           <a:prstGeom prst="rect">
             <a:avLst/>
@@ -6543,23 +6543,23 @@
         </p:nvSpPr>
         <p:spPr>
           <a:xfrm>
-            <a:off x="11049000" y="6667500"/>
-            <a:ext cx="5334000" cy="1714500"/>
-          </a:xfrm>
-          <a:prstGeom prst="rect">
-            <a:avLst/>
-          </a:prstGeom>
-          <a:noFill/>
-        </p:spPr>
-        <p:txBody>
-          <a:bodyPr wrap="square" lIns="0" rIns="0" tIns="0" bIns="0">
-            <a:spAutoFit/>
-          </a:bodyPr>
-          <a:lstStyle/>
-          <a:p>
-            <a:pPr algn="ctr"/>
-            <a:r>
-              <a:rPr sz="1600" b="0" i="0" kern="0" spc="0">
+            <a:off x="11915775" y="6667500"/>
+            <a:ext cx="3600450" cy="1076325"/>
+          </a:xfrm>
+          <a:prstGeom prst="rect">
+            <a:avLst/>
+          </a:prstGeom>
+          <a:noFill/>
+        </p:spPr>
+        <p:txBody>
+          <a:bodyPr wrap="square" lIns="0" rIns="0" tIns="0" bIns="0">
+            <a:spAutoFit/>
+          </a:bodyPr>
+          <a:lstStyle/>
+          <a:p>
+            <a:pPr algn="ctr"/>
+            <a:r>
+              <a:rPr sz="1300" b="0" i="0" kern="0" spc="0">
                 <a:solidFill>
                   <a:srgbClr val="FFFFFF"/>
                 </a:solidFill>
@@ -6568,7 +6568,7 @@
               <a:t>del </a:t>
             </a:r>
             <a:r>
-              <a:rPr sz="1600" b="1" i="0" kern="0" spc="0">
+              <a:rPr sz="1300" b="1" i="0" kern="0" spc="0">
                 <a:solidFill>
                   <a:srgbClr val="FFFFFF"/>
                 </a:solidFill>
@@ -6577,7 +6577,7 @@
               <a:t>estrato D</a:t>
             </a:r>
             <a:r>
-              <a:rPr sz="1600" b="0" i="0" kern="0" spc="0">
+              <a:rPr sz="1300" b="0" i="0" kern="0" spc="0">
                 <a:solidFill>
                   <a:srgbClr val="FFFFFF"/>
                 </a:solidFill>
@@ -6798,7 +6798,7 @@
         <p:spPr>
           <a:xfrm>
             <a:off x="9134475" y="4381500"/>
-            <a:ext cx="19050" cy="2647950"/>
+            <a:ext cx="19050" cy="1457325"/>
           </a:xfrm>
           <a:prstGeom prst="rect">
             <a:avLst/>
@@ -6840,8 +6840,8 @@
         </p:nvSpPr>
         <p:spPr>
           <a:xfrm>
-            <a:off x="1905000" y="4572000"/>
-            <a:ext cx="8382000" cy="1905000"/>
+            <a:off x="4295775" y="4572000"/>
+            <a:ext cx="3600450" cy="1905000"/>
           </a:xfrm>
           <a:prstGeom prst="rect">
             <a:avLst/>
@@ -6875,23 +6875,23 @@
         </p:nvSpPr>
         <p:spPr>
           <a:xfrm>
-            <a:off x="1905000" y="6667500"/>
-            <a:ext cx="8382000" cy="1714500"/>
-          </a:xfrm>
-          <a:prstGeom prst="rect">
-            <a:avLst/>
-          </a:prstGeom>
-          <a:noFill/>
-        </p:spPr>
-        <p:txBody>
-          <a:bodyPr wrap="square" lIns="0" rIns="0" tIns="0" bIns="0">
-            <a:spAutoFit/>
-          </a:bodyPr>
-          <a:lstStyle/>
-          <a:p>
-            <a:pPr algn="ctr"/>
-            <a:r>
-              <a:rPr sz="1600" b="0" i="0" kern="0" spc="0">
+            <a:off x="4295775" y="6667500"/>
+            <a:ext cx="3600450" cy="1076325"/>
+          </a:xfrm>
+          <a:prstGeom prst="rect">
+            <a:avLst/>
+          </a:prstGeom>
+          <a:noFill/>
+        </p:spPr>
+        <p:txBody>
+          <a:bodyPr wrap="square" lIns="0" rIns="0" tIns="0" bIns="0">
+            <a:spAutoFit/>
+          </a:bodyPr>
+          <a:lstStyle/>
+          <a:p>
+            <a:pPr algn="ctr"/>
+            <a:r>
+              <a:rPr sz="1300" b="0" i="0" kern="0" spc="0">
                 <a:solidFill>
                   <a:srgbClr val="FFFFFF"/>
                 </a:solidFill>
@@ -6900,7 +6900,7 @@
               <a:t>es </a:t>
             </a:r>
             <a:r>
-              <a:rPr sz="1600" b="1" i="0" kern="0" spc="0">
+              <a:rPr sz="1300" b="1" i="0" kern="0" spc="0">
                 <a:solidFill>
                   <a:srgbClr val="FFFFFF"/>
                 </a:solidFill>
@@ -6909,7 +6909,7 @@
               <a:t>creyente ocasional</a:t>
             </a:r>
             <a:r>
-              <a:rPr sz="1600" b="0" i="0" kern="0" spc="0">
+              <a:rPr sz="1300" b="0" i="0" kern="0" spc="0">
                 <a:solidFill>
                   <a:srgbClr val="FFFFFF"/>
                 </a:solidFill>
@@ -6928,8 +6928,8 @@
         </p:nvSpPr>
         <p:spPr>
           <a:xfrm>
-            <a:off x="8001000" y="4572000"/>
-            <a:ext cx="8382000" cy="1905000"/>
+            <a:off x="10391775" y="4572000"/>
+            <a:ext cx="3600450" cy="1905000"/>
           </a:xfrm>
           <a:prstGeom prst="rect">
             <a:avLst/>
@@ -6963,23 +6963,23 @@
         </p:nvSpPr>
         <p:spPr>
           <a:xfrm>
-            <a:off x="8001000" y="6667500"/>
-            <a:ext cx="8382000" cy="1714500"/>
-          </a:xfrm>
-          <a:prstGeom prst="rect">
-            <a:avLst/>
-          </a:prstGeom>
-          <a:noFill/>
-        </p:spPr>
-        <p:txBody>
-          <a:bodyPr wrap="square" lIns="0" rIns="0" tIns="0" bIns="0">
-            <a:spAutoFit/>
-          </a:bodyPr>
-          <a:lstStyle/>
-          <a:p>
-            <a:pPr algn="ctr"/>
-            <a:r>
-              <a:rPr sz="1600" b="0" i="0" kern="0" spc="0">
+            <a:off x="10391775" y="6667500"/>
+            <a:ext cx="3600450" cy="1076325"/>
+          </a:xfrm>
+          <a:prstGeom prst="rect">
+            <a:avLst/>
+          </a:prstGeom>
+          <a:noFill/>
+        </p:spPr>
+        <p:txBody>
+          <a:bodyPr wrap="square" lIns="0" rIns="0" tIns="0" bIns="0">
+            <a:spAutoFit/>
+          </a:bodyPr>
+          <a:lstStyle/>
+          <a:p>
+            <a:pPr algn="ctr"/>
+            <a:r>
+              <a:rPr sz="1300" b="0" i="0" kern="0" spc="0">
                 <a:solidFill>
                   <a:srgbClr val="FFFFFF"/>
                 </a:solidFill>
@@ -6988,7 +6988,7 @@
               <a:t>de los </a:t>
             </a:r>
             <a:r>
-              <a:rPr sz="1600" b="1" i="0" kern="0" spc="0">
+              <a:rPr sz="1300" b="1" i="0" kern="0" spc="0">
                 <a:solidFill>
                   <a:srgbClr val="FFFFFF"/>
                 </a:solidFill>
@@ -6997,7 +6997,7 @@
               <a:t>18–24 años</a:t>
             </a:r>
             <a:r>
-              <a:rPr sz="1600" b="0" i="0" kern="0" spc="0">
+              <a:rPr sz="1300" b="0" i="0" kern="0" spc="0">
                 <a:solidFill>
                   <a:srgbClr val="FFFFFF"/>
                 </a:solidFill>
@@ -7087,7 +7087,7 @@
         <p:spPr>
           <a:xfrm>
             <a:off x="9134475" y="4381500"/>
-            <a:ext cx="19050" cy="2647950"/>
+            <a:ext cx="19050" cy="1457325"/>
           </a:xfrm>
           <a:prstGeom prst="rect">
             <a:avLst/>
@@ -7129,8 +7129,8 @@
         </p:nvSpPr>
         <p:spPr>
           <a:xfrm>
-            <a:off x="1905000" y="4572000"/>
-            <a:ext cx="8382000" cy="1905000"/>
+            <a:off x="4295775" y="4572000"/>
+            <a:ext cx="3600450" cy="1905000"/>
           </a:xfrm>
           <a:prstGeom prst="rect">
             <a:avLst/>
@@ -7164,23 +7164,23 @@
         </p:nvSpPr>
         <p:spPr>
           <a:xfrm>
-            <a:off x="1905000" y="6667500"/>
-            <a:ext cx="8382000" cy="1714500"/>
-          </a:xfrm>
-          <a:prstGeom prst="rect">
-            <a:avLst/>
-          </a:prstGeom>
-          <a:noFill/>
-        </p:spPr>
-        <p:txBody>
-          <a:bodyPr wrap="square" lIns="0" rIns="0" tIns="0" bIns="0">
-            <a:spAutoFit/>
-          </a:bodyPr>
-          <a:lstStyle/>
-          <a:p>
-            <a:pPr algn="ctr"/>
-            <a:r>
-              <a:rPr sz="1600" b="0" i="0" kern="0" spc="0">
+            <a:off x="4295775" y="6667500"/>
+            <a:ext cx="3600450" cy="1076325"/>
+          </a:xfrm>
+          <a:prstGeom prst="rect">
+            <a:avLst/>
+          </a:prstGeom>
+          <a:noFill/>
+        </p:spPr>
+        <p:txBody>
+          <a:bodyPr wrap="square" lIns="0" rIns="0" tIns="0" bIns="0">
+            <a:spAutoFit/>
+          </a:bodyPr>
+          <a:lstStyle/>
+          <a:p>
+            <a:pPr algn="ctr"/>
+            <a:r>
+              <a:rPr sz="1300" b="0" i="0" kern="0" spc="0">
                 <a:solidFill>
                   <a:srgbClr val="FFFFFF"/>
                 </a:solidFill>
@@ -7189,7 +7189,7 @@
               <a:t>declara no haber sido víctima de </a:t>
             </a:r>
             <a:r>
-              <a:rPr sz="1600" b="1" i="0" kern="0" spc="0">
+              <a:rPr sz="1300" b="1" i="0" kern="0" spc="0">
                 <a:solidFill>
                   <a:srgbClr val="FFFFFF"/>
                 </a:solidFill>
@@ -7198,7 +7198,7 @@
               <a:t>discriminación</a:t>
             </a:r>
             <a:r>
-              <a:rPr sz="1600" b="0" i="0" kern="0" spc="0">
+              <a:rPr sz="1300" b="0" i="0" kern="0" spc="0">
                 <a:solidFill>
                   <a:srgbClr val="FFFFFF"/>
                 </a:solidFill>
@@ -7217,8 +7217,8 @@
         </p:nvSpPr>
         <p:spPr>
           <a:xfrm>
-            <a:off x="8001000" y="4572000"/>
-            <a:ext cx="8382000" cy="1905000"/>
+            <a:off x="10391775" y="4572000"/>
+            <a:ext cx="3600450" cy="1905000"/>
           </a:xfrm>
           <a:prstGeom prst="rect">
             <a:avLst/>
@@ -7252,23 +7252,23 @@
         </p:nvSpPr>
         <p:spPr>
           <a:xfrm>
-            <a:off x="8001000" y="6667500"/>
-            <a:ext cx="8382000" cy="1714500"/>
-          </a:xfrm>
-          <a:prstGeom prst="rect">
-            <a:avLst/>
-          </a:prstGeom>
-          <a:noFill/>
-        </p:spPr>
-        <p:txBody>
-          <a:bodyPr wrap="square" lIns="0" rIns="0" tIns="0" bIns="0">
-            <a:spAutoFit/>
-          </a:bodyPr>
-          <a:lstStyle/>
-          <a:p>
-            <a:pPr algn="ctr"/>
-            <a:r>
-              <a:rPr sz="1600" b="0" i="0" kern="0" spc="0">
+            <a:off x="10391775" y="6667500"/>
+            <a:ext cx="3600450" cy="1076325"/>
+          </a:xfrm>
+          <a:prstGeom prst="rect">
+            <a:avLst/>
+          </a:prstGeom>
+          <a:noFill/>
+        </p:spPr>
+        <p:txBody>
+          <a:bodyPr wrap="square" lIns="0" rIns="0" tIns="0" bIns="0">
+            <a:spAutoFit/>
+          </a:bodyPr>
+          <a:lstStyle/>
+          <a:p>
+            <a:pPr algn="ctr"/>
+            <a:r>
+              <a:rPr sz="1300" b="0" i="0" kern="0" spc="0">
                 <a:solidFill>
                   <a:srgbClr val="FFFFFF"/>
                 </a:solidFill>
@@ -7277,7 +7277,7 @@
               <a:t>en hogares </a:t>
             </a:r>
             <a:r>
-              <a:rPr sz="1600" b="1" i="0" kern="0" spc="0">
+              <a:rPr sz="1300" b="1" i="0" kern="0" spc="0">
                 <a:solidFill>
                   <a:srgbClr val="FFFFFF"/>
                 </a:solidFill>
@@ -7286,7 +7286,7 @@
               <a:t>monoparentales</a:t>
             </a:r>
             <a:r>
-              <a:rPr sz="1600" b="0" i="0" kern="0" spc="0">
+              <a:rPr sz="1300" b="0" i="0" kern="0" spc="0">
                 <a:solidFill>
                   <a:srgbClr val="FFFFFF"/>
                 </a:solidFill>
@@ -7507,7 +7507,7 @@
         <p:spPr>
           <a:xfrm>
             <a:off x="6848475" y="4381500"/>
-            <a:ext cx="19050" cy="2647950"/>
+            <a:ext cx="19050" cy="1457325"/>
           </a:xfrm>
           <a:prstGeom prst="rect">
             <a:avLst/>
@@ -7550,7 +7550,7 @@
         <p:spPr>
           <a:xfrm>
             <a:off x="11420475" y="4381500"/>
-            <a:ext cx="19050" cy="2647950"/>
+            <a:ext cx="19050" cy="1457325"/>
           </a:xfrm>
           <a:prstGeom prst="rect">
             <a:avLst/>
@@ -7592,8 +7592,8 @@
         </p:nvSpPr>
         <p:spPr>
           <a:xfrm>
-            <a:off x="1905000" y="4572000"/>
-            <a:ext cx="5334000" cy="1905000"/>
+            <a:off x="2771775" y="4572000"/>
+            <a:ext cx="3600450" cy="1905000"/>
           </a:xfrm>
           <a:prstGeom prst="rect">
             <a:avLst/>
@@ -7627,23 +7627,23 @@
         </p:nvSpPr>
         <p:spPr>
           <a:xfrm>
-            <a:off x="1905000" y="6667500"/>
-            <a:ext cx="5334000" cy="1714500"/>
-          </a:xfrm>
-          <a:prstGeom prst="rect">
-            <a:avLst/>
-          </a:prstGeom>
-          <a:noFill/>
-        </p:spPr>
-        <p:txBody>
-          <a:bodyPr wrap="square" lIns="0" rIns="0" tIns="0" bIns="0">
-            <a:spAutoFit/>
-          </a:bodyPr>
-          <a:lstStyle/>
-          <a:p>
-            <a:pPr algn="ctr"/>
-            <a:r>
-              <a:rPr sz="1600" b="0" i="0" kern="0" spc="0">
+            <a:off x="2771775" y="6667500"/>
+            <a:ext cx="3600450" cy="1076325"/>
+          </a:xfrm>
+          <a:prstGeom prst="rect">
+            <a:avLst/>
+          </a:prstGeom>
+          <a:noFill/>
+        </p:spPr>
+        <p:txBody>
+          <a:bodyPr wrap="square" lIns="0" rIns="0" tIns="0" bIns="0">
+            <a:spAutoFit/>
+          </a:bodyPr>
+          <a:lstStyle/>
+          <a:p>
+            <a:pPr algn="ctr"/>
+            <a:r>
+              <a:rPr sz="1300" b="0" i="0" kern="0" spc="0">
                 <a:solidFill>
                   <a:srgbClr val="FFFFFF"/>
                 </a:solidFill>
@@ -7652,7 +7652,7 @@
               <a:t>califica de </a:t>
             </a:r>
             <a:r>
-              <a:rPr sz="1600" b="1" i="0" kern="0" spc="0">
+              <a:rPr sz="1300" b="1" i="0" kern="0" spc="0">
                 <a:solidFill>
                   <a:srgbClr val="FFFFFF"/>
                 </a:solidFill>
@@ -7661,7 +7661,7 @@
               <a:t>muy baja</a:t>
             </a:r>
             <a:r>
-              <a:rPr sz="1600" b="0" i="0" kern="0" spc="0">
+              <a:rPr sz="1300" b="0" i="0" kern="0" spc="0">
                 <a:solidFill>
                   <a:srgbClr val="FFFFFF"/>
                 </a:solidFill>
@@ -7680,8 +7680,8 @@
         </p:nvSpPr>
         <p:spPr>
           <a:xfrm>
-            <a:off x="6477000" y="4572000"/>
-            <a:ext cx="5334000" cy="1905000"/>
+            <a:off x="7343775" y="4572000"/>
+            <a:ext cx="3600450" cy="1905000"/>
           </a:xfrm>
           <a:prstGeom prst="rect">
             <a:avLst/>
@@ -7715,23 +7715,23 @@
         </p:nvSpPr>
         <p:spPr>
           <a:xfrm>
-            <a:off x="6477000" y="6667500"/>
-            <a:ext cx="5334000" cy="1714500"/>
-          </a:xfrm>
-          <a:prstGeom prst="rect">
-            <a:avLst/>
-          </a:prstGeom>
-          <a:noFill/>
-        </p:spPr>
-        <p:txBody>
-          <a:bodyPr wrap="square" lIns="0" rIns="0" tIns="0" bIns="0">
-            <a:spAutoFit/>
-          </a:bodyPr>
-          <a:lstStyle/>
-          <a:p>
-            <a:pPr algn="ctr"/>
-            <a:r>
-              <a:rPr sz="1600" b="0" i="0" kern="0" spc="0">
+            <a:off x="7343775" y="6667500"/>
+            <a:ext cx="3600450" cy="1076325"/>
+          </a:xfrm>
+          <a:prstGeom prst="rect">
+            <a:avLst/>
+          </a:prstGeom>
+          <a:noFill/>
+        </p:spPr>
+        <p:txBody>
+          <a:bodyPr wrap="square" lIns="0" rIns="0" tIns="0" bIns="0">
+            <a:spAutoFit/>
+          </a:bodyPr>
+          <a:lstStyle/>
+          <a:p>
+            <a:pPr algn="ctr"/>
+            <a:r>
+              <a:rPr sz="1300" b="0" i="0" kern="0" spc="0">
                 <a:solidFill>
                   <a:srgbClr val="FFFFFF"/>
                 </a:solidFill>
@@ -7740,7 +7740,7 @@
               <a:t>cree que su comunidad está "</a:t>
             </a:r>
             <a:r>
-              <a:rPr sz="1600" b="1" i="0" kern="0" spc="0">
+              <a:rPr sz="1300" b="1" i="0" kern="0" spc="0">
                 <a:solidFill>
                   <a:srgbClr val="FFFFFF"/>
                 </a:solidFill>
@@ -7749,7 +7749,7 @@
               <a:t>nada preparada</a:t>
             </a:r>
             <a:r>
-              <a:rPr sz="1600" b="0" i="0" kern="0" spc="0">
+              <a:rPr sz="1300" b="0" i="0" kern="0" spc="0">
                 <a:solidFill>
                   <a:srgbClr val="FFFFFF"/>
                 </a:solidFill>
@@ -7768,8 +7768,8 @@
         </p:nvSpPr>
         <p:spPr>
           <a:xfrm>
-            <a:off x="11049000" y="4572000"/>
-            <a:ext cx="5334000" cy="1905000"/>
+            <a:off x="11915775" y="4572000"/>
+            <a:ext cx="3600450" cy="1905000"/>
           </a:xfrm>
           <a:prstGeom prst="rect">
             <a:avLst/>
@@ -7803,23 +7803,23 @@
         </p:nvSpPr>
         <p:spPr>
           <a:xfrm>
-            <a:off x="11049000" y="6667500"/>
-            <a:ext cx="5334000" cy="1714500"/>
-          </a:xfrm>
-          <a:prstGeom prst="rect">
-            <a:avLst/>
-          </a:prstGeom>
-          <a:noFill/>
-        </p:spPr>
-        <p:txBody>
-          <a:bodyPr wrap="square" lIns="0" rIns="0" tIns="0" bIns="0">
-            <a:spAutoFit/>
-          </a:bodyPr>
-          <a:lstStyle/>
-          <a:p>
-            <a:pPr algn="ctr"/>
-            <a:r>
-              <a:rPr sz="1600" b="0" i="0" kern="0" spc="0">
+            <a:off x="11915775" y="6667500"/>
+            <a:ext cx="3600450" cy="1076325"/>
+          </a:xfrm>
+          <a:prstGeom prst="rect">
+            <a:avLst/>
+          </a:prstGeom>
+          <a:noFill/>
+        </p:spPr>
+        <p:txBody>
+          <a:bodyPr wrap="square" lIns="0" rIns="0" tIns="0" bIns="0">
+            <a:spAutoFit/>
+          </a:bodyPr>
+          <a:lstStyle/>
+          <a:p>
+            <a:pPr algn="ctr"/>
+            <a:r>
+              <a:rPr sz="1300" b="0" i="0" kern="0" spc="0">
                 <a:solidFill>
                   <a:srgbClr val="FFFFFF"/>
                 </a:solidFill>
@@ -7828,7 +7828,7 @@
               <a:t>"Nada preparada" sube en el </a:t>
             </a:r>
             <a:r>
-              <a:rPr sz="1600" b="1" i="0" kern="0" spc="0">
+              <a:rPr sz="1300" b="1" i="0" kern="0" spc="0">
                 <a:solidFill>
                   <a:srgbClr val="FFFFFF"/>
                 </a:solidFill>
@@ -7837,7 +7837,7 @@
               <a:t>estrato D</a:t>
             </a:r>
             <a:r>
-              <a:rPr sz="1600" b="0" i="0" kern="0" spc="0">
+              <a:rPr sz="1300" b="0" i="0" kern="0" spc="0">
                 <a:solidFill>
                   <a:srgbClr val="FFFFFF"/>
                 </a:solidFill>

--- a/Agentes Hallazgos/sistema-de-creencias-deck-flat.pptx
+++ b/Agentes Hallazgos/sistema-de-creencias-deck-flat.pptx
@@ -3594,7 +3594,7 @@
           <a:p>
             <a:pPr algn="ctr"/>
             <a:r>
-              <a:rPr sz="6000" i="0" b="0" kern="0" spc="0">
+              <a:rPr sz="5000" i="0" b="0" kern="0" spc="0">
                 <a:solidFill>
                   <a:srgbClr val="FFFFFF"/>
                 </a:solidFill>
@@ -4014,7 +4014,7 @@
           <a:p>
             <a:pPr algn="ctr"/>
             <a:r>
-              <a:rPr sz="6000" i="0" b="0" kern="0" spc="0">
+              <a:rPr sz="5000" i="0" b="0" kern="0" spc="0">
                 <a:solidFill>
                   <a:srgbClr val="FFFFFF"/>
                 </a:solidFill>
@@ -4303,7 +4303,7 @@
           <a:p>
             <a:pPr algn="ctr"/>
             <a:r>
-              <a:rPr sz="6000" i="0" b="0" kern="0" spc="0">
+              <a:rPr sz="5000" i="0" b="0" kern="0" spc="0">
                 <a:solidFill>
                   <a:srgbClr val="FFFFFF"/>
                 </a:solidFill>
@@ -4723,7 +4723,7 @@
           <a:p>
             <a:pPr algn="ctr"/>
             <a:r>
-              <a:rPr sz="6000" i="0" b="0" kern="0" spc="0">
+              <a:rPr sz="5000" i="0" b="0" kern="0" spc="0">
                 <a:solidFill>
                   <a:srgbClr val="FFFFFF"/>
                 </a:solidFill>
@@ -5143,7 +5143,7 @@
           <a:p>
             <a:pPr algn="ctr"/>
             <a:r>
-              <a:rPr sz="6000" i="0" b="0" kern="0" spc="0">
+              <a:rPr sz="5000" i="0" b="0" kern="0" spc="0">
                 <a:solidFill>
                   <a:srgbClr val="FFFFFF"/>
                 </a:solidFill>
@@ -5563,7 +5563,7 @@
           <a:p>
             <a:pPr algn="ctr"/>
             <a:r>
-              <a:rPr sz="6000" i="0" b="0" kern="0" spc="0">
+              <a:rPr sz="5000" i="0" b="0" kern="0" spc="0">
                 <a:solidFill>
                   <a:srgbClr val="FFFFFF"/>
                 </a:solidFill>
@@ -5976,8 +5976,8 @@
         </p:nvSpPr>
         <p:spPr>
           <a:xfrm>
-            <a:off x="3533775" y="4086225"/>
-            <a:ext cx="5229225" cy="2105025"/>
+            <a:off x="3362325" y="4086225"/>
+            <a:ext cx="5400675" cy="2162175"/>
           </a:xfrm>
           <a:prstGeom prst="roundRect">
             <a:avLst>
@@ -6025,8 +6025,8 @@
         </p:nvSpPr>
         <p:spPr>
           <a:xfrm>
-            <a:off x="3819525" y="4324350"/>
-            <a:ext cx="4657725" cy="1628775"/>
+            <a:off x="3648075" y="4324350"/>
+            <a:ext cx="4829175" cy="1685925"/>
           </a:xfrm>
           <a:prstGeom prst="rect">
             <a:avLst/>
@@ -6077,7 +6077,7 @@
         <p:spPr>
           <a:xfrm>
             <a:off x="9525000" y="4086225"/>
-            <a:ext cx="5229225" cy="2105025"/>
+            <a:ext cx="5400675" cy="2162175"/>
           </a:xfrm>
           <a:prstGeom prst="roundRect">
             <a:avLst>
@@ -6126,7 +6126,7 @@
         <p:spPr>
           <a:xfrm>
             <a:off x="9810750" y="4324350"/>
-            <a:ext cx="4657725" cy="1628775"/>
+            <a:ext cx="4829175" cy="1685925"/>
           </a:xfrm>
           <a:prstGeom prst="rect">
             <a:avLst/>
@@ -6673,7 +6673,7 @@
           <a:p>
             <a:pPr algn="ctr"/>
             <a:r>
-              <a:rPr sz="6000" i="0" b="0" kern="0" spc="0">
+              <a:rPr sz="5000" i="0" b="0" kern="0" spc="0">
                 <a:solidFill>
                   <a:srgbClr val="FFFFFF"/>
                 </a:solidFill>
@@ -7382,7 +7382,7 @@
           <a:p>
             <a:pPr algn="ctr"/>
             <a:r>
-              <a:rPr sz="6000" i="0" b="0" kern="0" spc="0">
+              <a:rPr sz="5000" i="0" b="0" kern="0" spc="0">
                 <a:solidFill>
                   <a:srgbClr val="FFFFFF"/>
                 </a:solidFill>

--- a/Agentes Hallazgos/sistema-de-creencias-deck-flat.pptx
+++ b/Agentes Hallazgos/sistema-de-creencias-deck-flat.pptx
@@ -4825,7 +4825,7 @@
                 </a:solidFill>
                 <a:latin typeface="Instrument Serif"/>
               </a:rPr>
-              <a:t>CUANDO EL DOMINICANO SÍ SUFRE VIOLENCIA, LA MÁS FRECUENTE NO ES LA FÍSICA: ES ECONÓMICA. </a:t>
+              <a:t>LA VIOLENCIA MÁS FRECUENTE EN EL HOGAR DOMINICANO ES LA ECONÓMICA: </a:t>
             </a:r>
             <a:r>
               <a:rPr sz="5000" b="0" i="1" kern="0" spc="0">
@@ -5954,7 +5954,7 @@
                 </a:solidFill>
                 <a:latin typeface="Instrument Serif"/>
               </a:rPr>
-              <a:t>LA ACEPTACIÓN DE FAMILIAS DEL MISMO SEXO SIEMPRE LLEGA CON UN ‘PERO’. </a:t>
+              <a:t>LA ACEPTACIÓN DE FAMILIAS DEL MISMO SEXO SIEMPRE LLEGA CON UN 'PERO'. </a:t>
             </a:r>
             <a:r>
               <a:rPr sz="5000" b="0" i="1" kern="0" spc="0">
